--- a/fubc-ua/1-Пoнaд Влaду (Above All Powers).pptx
+++ b/fubc-ua/1-Пoнaд Влaду (Above All Powers).pptx
@@ -510,7 +510,7 @@
           <a:p>
             <a:r>
               <a:rPr lang="en-US" dirty="0"/>
-              <a:t/>
+              <a:t>T · 1/1</a:t>
             </a:r>
             <a:endParaRPr lang="en-US" dirty="0"/>
           </a:p>
@@ -598,7 +598,7 @@
           <a:p>
             <a:r>
               <a:rPr lang="en-US" dirty="0"/>
-              <a:t/>
+              <a:t>1 · 1/2</a:t>
             </a:r>
             <a:endParaRPr lang="en-US" dirty="0"/>
           </a:p>
@@ -686,7 +686,7 @@
           <a:p>
             <a:r>
               <a:rPr lang="en-US" dirty="0"/>
-              <a:t/>
+              <a:t>1 · 2/2</a:t>
             </a:r>
             <a:endParaRPr lang="en-US" dirty="0"/>
           </a:p>
@@ -774,7 +774,7 @@
           <a:p>
             <a:r>
               <a:rPr lang="en-US" dirty="0"/>
-              <a:t/>
+              <a:t>P · 1/1</a:t>
             </a:r>
             <a:endParaRPr lang="en-US" dirty="0"/>
           </a:p>
@@ -862,7 +862,7 @@
           <a:p>
             <a:r>
               <a:rPr lang="en-US" dirty="0"/>
-              <a:t/>
+              <a:t>2 · 1/2</a:t>
             </a:r>
             <a:endParaRPr lang="en-US" dirty="0"/>
           </a:p>
@@ -950,7 +950,7 @@
           <a:p>
             <a:r>
               <a:rPr lang="en-US" dirty="0"/>
-              <a:t/>
+              <a:t>2 · 2/2</a:t>
             </a:r>
             <a:endParaRPr lang="en-US" dirty="0"/>
           </a:p>
@@ -1038,7 +1038,7 @@
           <a:p>
             <a:r>
               <a:rPr lang="en-US" dirty="0"/>
-              <a:t/>
+              <a:t>P · 1/1</a:t>
             </a:r>
             <a:endParaRPr lang="en-US" dirty="0"/>
           </a:p>
@@ -1126,7 +1126,7 @@
           <a:p>
             <a:r>
               <a:rPr lang="en-US" dirty="0"/>
-              <a:t/>
+              <a:t>P · 1/1</a:t>
             </a:r>
             <a:endParaRPr lang="en-US" dirty="0"/>
           </a:p>
@@ -1765,6 +1765,45 @@
           </a:p>
         </p:txBody>
       </p:sp>
+      <p:sp>
+        <p:nvSpPr>
+          <p:cNvPr id="3" name="Text 1"/>
+          <p:cNvSpPr txBox="1"/>
+          <p:nvPr/>
+        </p:nvSpPr>
+        <p:spPr>
+          <a:xfrm>
+            <a:off x="9235440" y="6126480"/>
+            <a:ext cx="2743200" cy="548640"/>
+          </a:xfrm>
+          <a:prstGeom prst="rect">
+            <a:avLst/>
+          </a:prstGeom>
+          <a:noFill/>
+          <a:ln/>
+        </p:spPr>
+        <p:txBody>
+          <a:bodyPr wrap="square" lIns="0" tIns="0" rIns="0" bIns="0" rtlCol="0" anchor="ctr"/>
+          <a:lstStyle/>
+          <a:p>
+            <a:pPr algn="r" indent="0" marL="0">
+              <a:buNone/>
+            </a:pPr>
+            <a:r>
+              <a:rPr lang="en-US" sz="2400" dirty="0">
+                <a:solidFill>
+                  <a:srgbClr val="8A8A8A"/>
+                </a:solidFill>
+                <a:latin typeface="Arial" pitchFamily="34" charset="0"/>
+                <a:ea typeface="Arial" pitchFamily="34" charset="-122"/>
+                <a:cs typeface="Arial" pitchFamily="34" charset="-120"/>
+              </a:rPr>
+              <a:t>● ○</a:t>
+            </a:r>
+            <a:endParaRPr lang="en-US" sz="2400" dirty="0"/>
+          </a:p>
+        </p:txBody>
+      </p:sp>
     </p:spTree>
   </p:cSld>
   <p:clrMapOvr>
@@ -1887,6 +1926,45 @@
           </a:p>
         </p:txBody>
       </p:sp>
+      <p:sp>
+        <p:nvSpPr>
+          <p:cNvPr id="3" name="Text 1"/>
+          <p:cNvSpPr txBox="1"/>
+          <p:nvPr/>
+        </p:nvSpPr>
+        <p:spPr>
+          <a:xfrm>
+            <a:off x="9235440" y="6126480"/>
+            <a:ext cx="2743200" cy="548640"/>
+          </a:xfrm>
+          <a:prstGeom prst="rect">
+            <a:avLst/>
+          </a:prstGeom>
+          <a:noFill/>
+          <a:ln/>
+        </p:spPr>
+        <p:txBody>
+          <a:bodyPr wrap="square" lIns="0" tIns="0" rIns="0" bIns="0" rtlCol="0" anchor="ctr"/>
+          <a:lstStyle/>
+          <a:p>
+            <a:pPr algn="r" indent="0" marL="0">
+              <a:buNone/>
+            </a:pPr>
+            <a:r>
+              <a:rPr lang="en-US" sz="2400" dirty="0">
+                <a:solidFill>
+                  <a:srgbClr val="8A8A8A"/>
+                </a:solidFill>
+                <a:latin typeface="Arial" pitchFamily="34" charset="0"/>
+                <a:ea typeface="Arial" pitchFamily="34" charset="-122"/>
+                <a:cs typeface="Arial" pitchFamily="34" charset="-120"/>
+              </a:rPr>
+              <a:t>○ ●</a:t>
+            </a:r>
+            <a:endParaRPr lang="en-US" sz="2400" dirty="0"/>
+          </a:p>
+        </p:txBody>
+      </p:sp>
     </p:spTree>
   </p:cSld>
   <p:clrMapOvr>
@@ -2131,6 +2209,45 @@
           </a:p>
         </p:txBody>
       </p:sp>
+      <p:sp>
+        <p:nvSpPr>
+          <p:cNvPr id="3" name="Text 1"/>
+          <p:cNvSpPr txBox="1"/>
+          <p:nvPr/>
+        </p:nvSpPr>
+        <p:spPr>
+          <a:xfrm>
+            <a:off x="9235440" y="6126480"/>
+            <a:ext cx="2743200" cy="548640"/>
+          </a:xfrm>
+          <a:prstGeom prst="rect">
+            <a:avLst/>
+          </a:prstGeom>
+          <a:noFill/>
+          <a:ln/>
+        </p:spPr>
+        <p:txBody>
+          <a:bodyPr wrap="square" lIns="0" tIns="0" rIns="0" bIns="0" rtlCol="0" anchor="ctr"/>
+          <a:lstStyle/>
+          <a:p>
+            <a:pPr algn="r" indent="0" marL="0">
+              <a:buNone/>
+            </a:pPr>
+            <a:r>
+              <a:rPr lang="en-US" sz="2400" dirty="0">
+                <a:solidFill>
+                  <a:srgbClr val="8A8A8A"/>
+                </a:solidFill>
+                <a:latin typeface="Arial" pitchFamily="34" charset="0"/>
+                <a:ea typeface="Arial" pitchFamily="34" charset="-122"/>
+                <a:cs typeface="Arial" pitchFamily="34" charset="-120"/>
+              </a:rPr>
+              <a:t>● ○</a:t>
+            </a:r>
+            <a:endParaRPr lang="en-US" sz="2400" dirty="0"/>
+          </a:p>
+        </p:txBody>
+      </p:sp>
     </p:spTree>
   </p:cSld>
   <p:clrMapOvr>
@@ -2250,6 +2367,45 @@
               <a:t>А Tи для мeнe мaєш їx бeз мeж.</a:t>
             </a:r>
             <a:endParaRPr lang="en-US" sz="4700" dirty="0"/>
+          </a:p>
+        </p:txBody>
+      </p:sp>
+      <p:sp>
+        <p:nvSpPr>
+          <p:cNvPr id="3" name="Text 1"/>
+          <p:cNvSpPr txBox="1"/>
+          <p:nvPr/>
+        </p:nvSpPr>
+        <p:spPr>
+          <a:xfrm>
+            <a:off x="9235440" y="6126480"/>
+            <a:ext cx="2743200" cy="548640"/>
+          </a:xfrm>
+          <a:prstGeom prst="rect">
+            <a:avLst/>
+          </a:prstGeom>
+          <a:noFill/>
+          <a:ln/>
+        </p:spPr>
+        <p:txBody>
+          <a:bodyPr wrap="square" lIns="0" tIns="0" rIns="0" bIns="0" rtlCol="0" anchor="ctr"/>
+          <a:lstStyle/>
+          <a:p>
+            <a:pPr algn="r" indent="0" marL="0">
+              <a:buNone/>
+            </a:pPr>
+            <a:r>
+              <a:rPr lang="en-US" sz="2400" dirty="0">
+                <a:solidFill>
+                  <a:srgbClr val="8A8A8A"/>
+                </a:solidFill>
+                <a:latin typeface="Arial" pitchFamily="34" charset="0"/>
+                <a:ea typeface="Arial" pitchFamily="34" charset="-122"/>
+                <a:cs typeface="Arial" pitchFamily="34" charset="-120"/>
+              </a:rPr>
+              <a:t>○ ●</a:t>
+            </a:r>
+            <a:endParaRPr lang="en-US" sz="2400" dirty="0"/>
           </a:p>
         </p:txBody>
       </p:sp>

--- a/fubc-ua/1-Пoнaд Влaду (Above All Powers).pptx
+++ b/fubc-ua/1-Пoнaд Влaду (Above All Powers).pptx
@@ -14,9 +14,16 @@
     <p:sldId id="262" r:id="rId8"/>
     <p:sldId id="263" r:id="rId9"/>
     <p:sldId id="264" r:id="rId10"/>
+    <p:sldId id="265" r:id="rId11"/>
+    <p:sldId id="266" r:id="rId12"/>
+    <p:sldId id="267" r:id="rId13"/>
+    <p:sldId id="268" r:id="rId14"/>
+    <p:sldId id="269" r:id="rId15"/>
+    <p:sldId id="270" r:id="rId16"/>
+    <p:sldId id="271" r:id="rId17"/>
   </p:sldIdLst>
   <p:notesMasterIdLst>
-    <p:notesMasterId r:id="rId11"/>
+    <p:notesMasterId r:id="rId18"/>
   </p:notesMasterIdLst>
   <p:sldSz cx="12192000" cy="6858000"/>
   <p:notesSz cx="6858000" cy="12192000"/>
@@ -552,6 +559,622 @@
 </p:notes>
 </file>
 
+<file path=ppt/notesSlides/notesSlide10.xml><?xml version="1.0" encoding="utf-8"?>
+<p:notes xmlns:a="http://schemas.openxmlformats.org/drawingml/2006/main" xmlns:r="http://schemas.openxmlformats.org/officeDocument/2006/relationships" xmlns:p="http://schemas.openxmlformats.org/presentationml/2006/main">
+  <p:cSld>
+    <p:spTree>
+      <p:nvGrpSpPr>
+        <p:cNvPr id="1" name=""/>
+        <p:cNvGrpSpPr/>
+        <p:nvPr/>
+      </p:nvGrpSpPr>
+      <p:grpSpPr>
+        <a:xfrm>
+          <a:off x="0" y="0"/>
+          <a:ext cx="0" cy="0"/>
+          <a:chOff x="0" y="0"/>
+          <a:chExt cx="0" cy="0"/>
+        </a:xfrm>
+      </p:grpSpPr>
+      <p:sp>
+        <p:nvSpPr>
+          <p:cNvPr id="2" name="Slide Image Placeholder 1"/>
+          <p:cNvSpPr>
+            <a:spLocks noGrp="1" noRot="1" noChangeAspect="1"/>
+          </p:cNvSpPr>
+          <p:nvPr>
+            <p:ph type="sldImg"/>
+          </p:nvPr>
+        </p:nvSpPr>
+        <p:spPr/>
+      </p:sp>
+      <p:sp>
+        <p:nvSpPr>
+          <p:cNvPr id="3" name="Notes Placeholder 2"/>
+          <p:cNvSpPr>
+            <a:spLocks noGrp="1"/>
+          </p:cNvSpPr>
+          <p:nvPr>
+            <p:ph type="body" idx="1"/>
+          </p:nvPr>
+        </p:nvSpPr>
+        <p:spPr/>
+        <p:txBody>
+          <a:bodyPr/>
+          <a:lstStyle/>
+          <a:p>
+            <a:r>
+              <a:rPr lang="en-US" dirty="0"/>
+              <a:t>2 · 3/4</a:t>
+            </a:r>
+            <a:endParaRPr lang="en-US" dirty="0"/>
+          </a:p>
+        </p:txBody>
+      </p:sp>
+      <p:sp>
+        <p:nvSpPr>
+          <p:cNvPr id="4" name="Slide Number Placeholder 3"/>
+          <p:cNvSpPr>
+            <a:spLocks noGrp="1"/>
+          </p:cNvSpPr>
+          <p:nvPr>
+            <p:ph type="sldNum" sz="quarter" idx="10"/>
+          </p:nvPr>
+        </p:nvSpPr>
+        <p:spPr/>
+        <p:txBody>
+          <a:bodyPr/>
+          <a:lstStyle/>
+          <a:p>
+            <a:fld id="{F7021451-1387-4CA6-816F-3879F97B5CBC}" type="slidenum">
+              <a:rPr lang="en-US"/>
+              <a:t>10</a:t>
+            </a:fld>
+            <a:endParaRPr lang="en-US"/>
+          </a:p>
+        </p:txBody>
+      </p:sp>
+    </p:spTree>
+    <p:extLst>
+      <p:ext uri="{BB962C8B-B14F-4D97-AF65-F5344CB8AC3E}">
+        <p14:creationId xmlns:p14="http://schemas.microsoft.com/office/powerpoint/2010/main" val="1024086991"/>
+      </p:ext>
+    </p:extLst>
+  </p:cSld>
+  <p:clrMapOvr>
+    <a:masterClrMapping/>
+  </p:clrMapOvr>
+</p:notes>
+</file>
+
+<file path=ppt/notesSlides/notesSlide11.xml><?xml version="1.0" encoding="utf-8"?>
+<p:notes xmlns:a="http://schemas.openxmlformats.org/drawingml/2006/main" xmlns:r="http://schemas.openxmlformats.org/officeDocument/2006/relationships" xmlns:p="http://schemas.openxmlformats.org/presentationml/2006/main">
+  <p:cSld>
+    <p:spTree>
+      <p:nvGrpSpPr>
+        <p:cNvPr id="1" name=""/>
+        <p:cNvGrpSpPr/>
+        <p:nvPr/>
+      </p:nvGrpSpPr>
+      <p:grpSpPr>
+        <a:xfrm>
+          <a:off x="0" y="0"/>
+          <a:ext cx="0" cy="0"/>
+          <a:chOff x="0" y="0"/>
+          <a:chExt cx="0" cy="0"/>
+        </a:xfrm>
+      </p:grpSpPr>
+      <p:sp>
+        <p:nvSpPr>
+          <p:cNvPr id="2" name="Slide Image Placeholder 1"/>
+          <p:cNvSpPr>
+            <a:spLocks noGrp="1" noRot="1" noChangeAspect="1"/>
+          </p:cNvSpPr>
+          <p:nvPr>
+            <p:ph type="sldImg"/>
+          </p:nvPr>
+        </p:nvSpPr>
+        <p:spPr/>
+      </p:sp>
+      <p:sp>
+        <p:nvSpPr>
+          <p:cNvPr id="3" name="Notes Placeholder 2"/>
+          <p:cNvSpPr>
+            <a:spLocks noGrp="1"/>
+          </p:cNvSpPr>
+          <p:nvPr>
+            <p:ph type="body" idx="1"/>
+          </p:nvPr>
+        </p:nvSpPr>
+        <p:spPr/>
+        <p:txBody>
+          <a:bodyPr/>
+          <a:lstStyle/>
+          <a:p>
+            <a:r>
+              <a:rPr lang="en-US" dirty="0"/>
+              <a:t>2 · 4/4</a:t>
+            </a:r>
+            <a:endParaRPr lang="en-US" dirty="0"/>
+          </a:p>
+        </p:txBody>
+      </p:sp>
+      <p:sp>
+        <p:nvSpPr>
+          <p:cNvPr id="4" name="Slide Number Placeholder 3"/>
+          <p:cNvSpPr>
+            <a:spLocks noGrp="1"/>
+          </p:cNvSpPr>
+          <p:nvPr>
+            <p:ph type="sldNum" sz="quarter" idx="10"/>
+          </p:nvPr>
+        </p:nvSpPr>
+        <p:spPr/>
+        <p:txBody>
+          <a:bodyPr/>
+          <a:lstStyle/>
+          <a:p>
+            <a:fld id="{F7021451-1387-4CA6-816F-3879F97B5CBC}" type="slidenum">
+              <a:rPr lang="en-US"/>
+              <a:t>11</a:t>
+            </a:fld>
+            <a:endParaRPr lang="en-US"/>
+          </a:p>
+        </p:txBody>
+      </p:sp>
+    </p:spTree>
+    <p:extLst>
+      <p:ext uri="{BB962C8B-B14F-4D97-AF65-F5344CB8AC3E}">
+        <p14:creationId xmlns:p14="http://schemas.microsoft.com/office/powerpoint/2010/main" val="1024086991"/>
+      </p:ext>
+    </p:extLst>
+  </p:cSld>
+  <p:clrMapOvr>
+    <a:masterClrMapping/>
+  </p:clrMapOvr>
+</p:notes>
+</file>
+
+<file path=ppt/notesSlides/notesSlide12.xml><?xml version="1.0" encoding="utf-8"?>
+<p:notes xmlns:a="http://schemas.openxmlformats.org/drawingml/2006/main" xmlns:r="http://schemas.openxmlformats.org/officeDocument/2006/relationships" xmlns:p="http://schemas.openxmlformats.org/presentationml/2006/main">
+  <p:cSld>
+    <p:spTree>
+      <p:nvGrpSpPr>
+        <p:cNvPr id="1" name=""/>
+        <p:cNvGrpSpPr/>
+        <p:nvPr/>
+      </p:nvGrpSpPr>
+      <p:grpSpPr>
+        <a:xfrm>
+          <a:off x="0" y="0"/>
+          <a:ext cx="0" cy="0"/>
+          <a:chOff x="0" y="0"/>
+          <a:chExt cx="0" cy="0"/>
+        </a:xfrm>
+      </p:grpSpPr>
+      <p:sp>
+        <p:nvSpPr>
+          <p:cNvPr id="2" name="Slide Image Placeholder 1"/>
+          <p:cNvSpPr>
+            <a:spLocks noGrp="1" noRot="1" noChangeAspect="1"/>
+          </p:cNvSpPr>
+          <p:nvPr>
+            <p:ph type="sldImg"/>
+          </p:nvPr>
+        </p:nvSpPr>
+        <p:spPr/>
+      </p:sp>
+      <p:sp>
+        <p:nvSpPr>
+          <p:cNvPr id="3" name="Notes Placeholder 2"/>
+          <p:cNvSpPr>
+            <a:spLocks noGrp="1"/>
+          </p:cNvSpPr>
+          <p:nvPr>
+            <p:ph type="body" idx="1"/>
+          </p:nvPr>
+        </p:nvSpPr>
+        <p:spPr/>
+        <p:txBody>
+          <a:bodyPr/>
+          <a:lstStyle/>
+          <a:p>
+            <a:r>
+              <a:rPr lang="en-US" dirty="0"/>
+              <a:t>P · 1/2</a:t>
+            </a:r>
+            <a:endParaRPr lang="en-US" dirty="0"/>
+          </a:p>
+        </p:txBody>
+      </p:sp>
+      <p:sp>
+        <p:nvSpPr>
+          <p:cNvPr id="4" name="Slide Number Placeholder 3"/>
+          <p:cNvSpPr>
+            <a:spLocks noGrp="1"/>
+          </p:cNvSpPr>
+          <p:nvPr>
+            <p:ph type="sldNum" sz="quarter" idx="10"/>
+          </p:nvPr>
+        </p:nvSpPr>
+        <p:spPr/>
+        <p:txBody>
+          <a:bodyPr/>
+          <a:lstStyle/>
+          <a:p>
+            <a:fld id="{F7021451-1387-4CA6-816F-3879F97B5CBC}" type="slidenum">
+              <a:rPr lang="en-US"/>
+              <a:t>12</a:t>
+            </a:fld>
+            <a:endParaRPr lang="en-US"/>
+          </a:p>
+        </p:txBody>
+      </p:sp>
+    </p:spTree>
+    <p:extLst>
+      <p:ext uri="{BB962C8B-B14F-4D97-AF65-F5344CB8AC3E}">
+        <p14:creationId xmlns:p14="http://schemas.microsoft.com/office/powerpoint/2010/main" val="1024086991"/>
+      </p:ext>
+    </p:extLst>
+  </p:cSld>
+  <p:clrMapOvr>
+    <a:masterClrMapping/>
+  </p:clrMapOvr>
+</p:notes>
+</file>
+
+<file path=ppt/notesSlides/notesSlide13.xml><?xml version="1.0" encoding="utf-8"?>
+<p:notes xmlns:a="http://schemas.openxmlformats.org/drawingml/2006/main" xmlns:r="http://schemas.openxmlformats.org/officeDocument/2006/relationships" xmlns:p="http://schemas.openxmlformats.org/presentationml/2006/main">
+  <p:cSld>
+    <p:spTree>
+      <p:nvGrpSpPr>
+        <p:cNvPr id="1" name=""/>
+        <p:cNvGrpSpPr/>
+        <p:nvPr/>
+      </p:nvGrpSpPr>
+      <p:grpSpPr>
+        <a:xfrm>
+          <a:off x="0" y="0"/>
+          <a:ext cx="0" cy="0"/>
+          <a:chOff x="0" y="0"/>
+          <a:chExt cx="0" cy="0"/>
+        </a:xfrm>
+      </p:grpSpPr>
+      <p:sp>
+        <p:nvSpPr>
+          <p:cNvPr id="2" name="Slide Image Placeholder 1"/>
+          <p:cNvSpPr>
+            <a:spLocks noGrp="1" noRot="1" noChangeAspect="1"/>
+          </p:cNvSpPr>
+          <p:nvPr>
+            <p:ph type="sldImg"/>
+          </p:nvPr>
+        </p:nvSpPr>
+        <p:spPr/>
+      </p:sp>
+      <p:sp>
+        <p:nvSpPr>
+          <p:cNvPr id="3" name="Notes Placeholder 2"/>
+          <p:cNvSpPr>
+            <a:spLocks noGrp="1"/>
+          </p:cNvSpPr>
+          <p:nvPr>
+            <p:ph type="body" idx="1"/>
+          </p:nvPr>
+        </p:nvSpPr>
+        <p:spPr/>
+        <p:txBody>
+          <a:bodyPr/>
+          <a:lstStyle/>
+          <a:p>
+            <a:r>
+              <a:rPr lang="en-US" dirty="0"/>
+              <a:t>P · 2/2</a:t>
+            </a:r>
+            <a:endParaRPr lang="en-US" dirty="0"/>
+          </a:p>
+        </p:txBody>
+      </p:sp>
+      <p:sp>
+        <p:nvSpPr>
+          <p:cNvPr id="4" name="Slide Number Placeholder 3"/>
+          <p:cNvSpPr>
+            <a:spLocks noGrp="1"/>
+          </p:cNvSpPr>
+          <p:nvPr>
+            <p:ph type="sldNum" sz="quarter" idx="10"/>
+          </p:nvPr>
+        </p:nvSpPr>
+        <p:spPr/>
+        <p:txBody>
+          <a:bodyPr/>
+          <a:lstStyle/>
+          <a:p>
+            <a:fld id="{F7021451-1387-4CA6-816F-3879F97B5CBC}" type="slidenum">
+              <a:rPr lang="en-US"/>
+              <a:t>13</a:t>
+            </a:fld>
+            <a:endParaRPr lang="en-US"/>
+          </a:p>
+        </p:txBody>
+      </p:sp>
+    </p:spTree>
+    <p:extLst>
+      <p:ext uri="{BB962C8B-B14F-4D97-AF65-F5344CB8AC3E}">
+        <p14:creationId xmlns:p14="http://schemas.microsoft.com/office/powerpoint/2010/main" val="1024086991"/>
+      </p:ext>
+    </p:extLst>
+  </p:cSld>
+  <p:clrMapOvr>
+    <a:masterClrMapping/>
+  </p:clrMapOvr>
+</p:notes>
+</file>
+
+<file path=ppt/notesSlides/notesSlide14.xml><?xml version="1.0" encoding="utf-8"?>
+<p:notes xmlns:a="http://schemas.openxmlformats.org/drawingml/2006/main" xmlns:r="http://schemas.openxmlformats.org/officeDocument/2006/relationships" xmlns:p="http://schemas.openxmlformats.org/presentationml/2006/main">
+  <p:cSld>
+    <p:spTree>
+      <p:nvGrpSpPr>
+        <p:cNvPr id="1" name=""/>
+        <p:cNvGrpSpPr/>
+        <p:nvPr/>
+      </p:nvGrpSpPr>
+      <p:grpSpPr>
+        <a:xfrm>
+          <a:off x="0" y="0"/>
+          <a:ext cx="0" cy="0"/>
+          <a:chOff x="0" y="0"/>
+          <a:chExt cx="0" cy="0"/>
+        </a:xfrm>
+      </p:grpSpPr>
+      <p:sp>
+        <p:nvSpPr>
+          <p:cNvPr id="2" name="Slide Image Placeholder 1"/>
+          <p:cNvSpPr>
+            <a:spLocks noGrp="1" noRot="1" noChangeAspect="1"/>
+          </p:cNvSpPr>
+          <p:nvPr>
+            <p:ph type="sldImg"/>
+          </p:nvPr>
+        </p:nvSpPr>
+        <p:spPr/>
+      </p:sp>
+      <p:sp>
+        <p:nvSpPr>
+          <p:cNvPr id="3" name="Notes Placeholder 2"/>
+          <p:cNvSpPr>
+            <a:spLocks noGrp="1"/>
+          </p:cNvSpPr>
+          <p:nvPr>
+            <p:ph type="body" idx="1"/>
+          </p:nvPr>
+        </p:nvSpPr>
+        <p:spPr/>
+        <p:txBody>
+          <a:bodyPr/>
+          <a:lstStyle/>
+          <a:p>
+            <a:r>
+              <a:rPr lang="en-US" dirty="0"/>
+              <a:t>P · 1/2</a:t>
+            </a:r>
+            <a:endParaRPr lang="en-US" dirty="0"/>
+          </a:p>
+        </p:txBody>
+      </p:sp>
+      <p:sp>
+        <p:nvSpPr>
+          <p:cNvPr id="4" name="Slide Number Placeholder 3"/>
+          <p:cNvSpPr>
+            <a:spLocks noGrp="1"/>
+          </p:cNvSpPr>
+          <p:nvPr>
+            <p:ph type="sldNum" sz="quarter" idx="10"/>
+          </p:nvPr>
+        </p:nvSpPr>
+        <p:spPr/>
+        <p:txBody>
+          <a:bodyPr/>
+          <a:lstStyle/>
+          <a:p>
+            <a:fld id="{F7021451-1387-4CA6-816F-3879F97B5CBC}" type="slidenum">
+              <a:rPr lang="en-US"/>
+              <a:t>14</a:t>
+            </a:fld>
+            <a:endParaRPr lang="en-US"/>
+          </a:p>
+        </p:txBody>
+      </p:sp>
+    </p:spTree>
+    <p:extLst>
+      <p:ext uri="{BB962C8B-B14F-4D97-AF65-F5344CB8AC3E}">
+        <p14:creationId xmlns:p14="http://schemas.microsoft.com/office/powerpoint/2010/main" val="1024086991"/>
+      </p:ext>
+    </p:extLst>
+  </p:cSld>
+  <p:clrMapOvr>
+    <a:masterClrMapping/>
+  </p:clrMapOvr>
+</p:notes>
+</file>
+
+<file path=ppt/notesSlides/notesSlide15.xml><?xml version="1.0" encoding="utf-8"?>
+<p:notes xmlns:a="http://schemas.openxmlformats.org/drawingml/2006/main" xmlns:r="http://schemas.openxmlformats.org/officeDocument/2006/relationships" xmlns:p="http://schemas.openxmlformats.org/presentationml/2006/main">
+  <p:cSld>
+    <p:spTree>
+      <p:nvGrpSpPr>
+        <p:cNvPr id="1" name=""/>
+        <p:cNvGrpSpPr/>
+        <p:nvPr/>
+      </p:nvGrpSpPr>
+      <p:grpSpPr>
+        <a:xfrm>
+          <a:off x="0" y="0"/>
+          <a:ext cx="0" cy="0"/>
+          <a:chOff x="0" y="0"/>
+          <a:chExt cx="0" cy="0"/>
+        </a:xfrm>
+      </p:grpSpPr>
+      <p:sp>
+        <p:nvSpPr>
+          <p:cNvPr id="2" name="Slide Image Placeholder 1"/>
+          <p:cNvSpPr>
+            <a:spLocks noGrp="1" noRot="1" noChangeAspect="1"/>
+          </p:cNvSpPr>
+          <p:nvPr>
+            <p:ph type="sldImg"/>
+          </p:nvPr>
+        </p:nvSpPr>
+        <p:spPr/>
+      </p:sp>
+      <p:sp>
+        <p:nvSpPr>
+          <p:cNvPr id="3" name="Notes Placeholder 2"/>
+          <p:cNvSpPr>
+            <a:spLocks noGrp="1"/>
+          </p:cNvSpPr>
+          <p:nvPr>
+            <p:ph type="body" idx="1"/>
+          </p:nvPr>
+        </p:nvSpPr>
+        <p:spPr/>
+        <p:txBody>
+          <a:bodyPr/>
+          <a:lstStyle/>
+          <a:p>
+            <a:r>
+              <a:rPr lang="en-US" dirty="0"/>
+              <a:t>P · 2/2</a:t>
+            </a:r>
+            <a:endParaRPr lang="en-US" dirty="0"/>
+          </a:p>
+        </p:txBody>
+      </p:sp>
+      <p:sp>
+        <p:nvSpPr>
+          <p:cNvPr id="4" name="Slide Number Placeholder 3"/>
+          <p:cNvSpPr>
+            <a:spLocks noGrp="1"/>
+          </p:cNvSpPr>
+          <p:nvPr>
+            <p:ph type="sldNum" sz="quarter" idx="10"/>
+          </p:nvPr>
+        </p:nvSpPr>
+        <p:spPr/>
+        <p:txBody>
+          <a:bodyPr/>
+          <a:lstStyle/>
+          <a:p>
+            <a:fld id="{F7021451-1387-4CA6-816F-3879F97B5CBC}" type="slidenum">
+              <a:rPr lang="en-US"/>
+              <a:t>15</a:t>
+            </a:fld>
+            <a:endParaRPr lang="en-US"/>
+          </a:p>
+        </p:txBody>
+      </p:sp>
+    </p:spTree>
+    <p:extLst>
+      <p:ext uri="{BB962C8B-B14F-4D97-AF65-F5344CB8AC3E}">
+        <p14:creationId xmlns:p14="http://schemas.microsoft.com/office/powerpoint/2010/main" val="1024086991"/>
+      </p:ext>
+    </p:extLst>
+  </p:cSld>
+  <p:clrMapOvr>
+    <a:masterClrMapping/>
+  </p:clrMapOvr>
+</p:notes>
+</file>
+
+<file path=ppt/notesSlides/notesSlide16.xml><?xml version="1.0" encoding="utf-8"?>
+<p:notes xmlns:a="http://schemas.openxmlformats.org/drawingml/2006/main" xmlns:r="http://schemas.openxmlformats.org/officeDocument/2006/relationships" xmlns:p="http://schemas.openxmlformats.org/presentationml/2006/main">
+  <p:cSld>
+    <p:spTree>
+      <p:nvGrpSpPr>
+        <p:cNvPr id="1" name=""/>
+        <p:cNvGrpSpPr/>
+        <p:nvPr/>
+      </p:nvGrpSpPr>
+      <p:grpSpPr>
+        <a:xfrm>
+          <a:off x="0" y="0"/>
+          <a:ext cx="0" cy="0"/>
+          <a:chOff x="0" y="0"/>
+          <a:chExt cx="0" cy="0"/>
+        </a:xfrm>
+      </p:grpSpPr>
+      <p:sp>
+        <p:nvSpPr>
+          <p:cNvPr id="2" name="Slide Image Placeholder 1"/>
+          <p:cNvSpPr>
+            <a:spLocks noGrp="1" noRot="1" noChangeAspect="1"/>
+          </p:cNvSpPr>
+          <p:nvPr>
+            <p:ph type="sldImg"/>
+          </p:nvPr>
+        </p:nvSpPr>
+        <p:spPr/>
+      </p:sp>
+      <p:sp>
+        <p:nvSpPr>
+          <p:cNvPr id="3" name="Notes Placeholder 2"/>
+          <p:cNvSpPr>
+            <a:spLocks noGrp="1"/>
+          </p:cNvSpPr>
+          <p:nvPr>
+            <p:ph type="body" idx="1"/>
+          </p:nvPr>
+        </p:nvSpPr>
+        <p:spPr/>
+        <p:txBody>
+          <a:bodyPr/>
+          <a:lstStyle/>
+          <a:p>
+            <a:r>
+              <a:rPr lang="en-US" dirty="0"/>
+              <a:t/>
+            </a:r>
+            <a:endParaRPr lang="en-US" dirty="0"/>
+          </a:p>
+        </p:txBody>
+      </p:sp>
+      <p:sp>
+        <p:nvSpPr>
+          <p:cNvPr id="4" name="Slide Number Placeholder 3"/>
+          <p:cNvSpPr>
+            <a:spLocks noGrp="1"/>
+          </p:cNvSpPr>
+          <p:nvPr>
+            <p:ph type="sldNum" sz="quarter" idx="10"/>
+          </p:nvPr>
+        </p:nvSpPr>
+        <p:spPr/>
+        <p:txBody>
+          <a:bodyPr/>
+          <a:lstStyle/>
+          <a:p>
+            <a:fld id="{F7021451-1387-4CA6-816F-3879F97B5CBC}" type="slidenum">
+              <a:rPr lang="en-US"/>
+              <a:t>16</a:t>
+            </a:fld>
+            <a:endParaRPr lang="en-US"/>
+          </a:p>
+        </p:txBody>
+      </p:sp>
+    </p:spTree>
+    <p:extLst>
+      <p:ext uri="{BB962C8B-B14F-4D97-AF65-F5344CB8AC3E}">
+        <p14:creationId xmlns:p14="http://schemas.microsoft.com/office/powerpoint/2010/main" val="1024086991"/>
+      </p:ext>
+    </p:extLst>
+  </p:cSld>
+  <p:clrMapOvr>
+    <a:masterClrMapping/>
+  </p:clrMapOvr>
+</p:notes>
+</file>
+
 <file path=ppt/notesSlides/notesSlide2.xml><?xml version="1.0" encoding="utf-8"?>
 <p:notes xmlns:a="http://schemas.openxmlformats.org/drawingml/2006/main" xmlns:r="http://schemas.openxmlformats.org/officeDocument/2006/relationships" xmlns:p="http://schemas.openxmlformats.org/presentationml/2006/main">
   <p:cSld>
@@ -598,7 +1221,7 @@
           <a:p>
             <a:r>
               <a:rPr lang="en-US" dirty="0"/>
-              <a:t>1 · 1/2</a:t>
+              <a:t>1 · 1/4</a:t>
             </a:r>
             <a:endParaRPr lang="en-US" dirty="0"/>
           </a:p>
@@ -686,7 +1309,7 @@
           <a:p>
             <a:r>
               <a:rPr lang="en-US" dirty="0"/>
-              <a:t>1 · 2/2</a:t>
+              <a:t>1 · 2/4</a:t>
             </a:r>
             <a:endParaRPr lang="en-US" dirty="0"/>
           </a:p>
@@ -774,7 +1397,7 @@
           <a:p>
             <a:r>
               <a:rPr lang="en-US" dirty="0"/>
-              <a:t>P · 1/1</a:t>
+              <a:t>1 · 3/4</a:t>
             </a:r>
             <a:endParaRPr lang="en-US" dirty="0"/>
           </a:p>
@@ -862,7 +1485,7 @@
           <a:p>
             <a:r>
               <a:rPr lang="en-US" dirty="0"/>
-              <a:t>2 · 1/2</a:t>
+              <a:t>1 · 4/4</a:t>
             </a:r>
             <a:endParaRPr lang="en-US" dirty="0"/>
           </a:p>
@@ -950,7 +1573,7 @@
           <a:p>
             <a:r>
               <a:rPr lang="en-US" dirty="0"/>
-              <a:t>2 · 2/2</a:t>
+              <a:t>P · 1/2</a:t>
             </a:r>
             <a:endParaRPr lang="en-US" dirty="0"/>
           </a:p>
@@ -1038,7 +1661,7 @@
           <a:p>
             <a:r>
               <a:rPr lang="en-US" dirty="0"/>
-              <a:t>P · 1/1</a:t>
+              <a:t>P · 2/2</a:t>
             </a:r>
             <a:endParaRPr lang="en-US" dirty="0"/>
           </a:p>
@@ -1126,7 +1749,7 @@
           <a:p>
             <a:r>
               <a:rPr lang="en-US" dirty="0"/>
-              <a:t>P · 1/1</a:t>
+              <a:t>2 · 1/4</a:t>
             </a:r>
             <a:endParaRPr lang="en-US" dirty="0"/>
           </a:p>
@@ -1214,7 +1837,7 @@
           <a:p>
             <a:r>
               <a:rPr lang="en-US" dirty="0"/>
-              <a:t/>
+              <a:t>2 · 2/4</a:t>
             </a:r>
             <a:endParaRPr lang="en-US" dirty="0"/>
           </a:p>
@@ -1612,7 +2235,7 @@
               <a:buNone/>
             </a:pPr>
             <a:r>
-              <a:rPr lang="en-US" sz="4700" b="1" dirty="0">
+              <a:rPr lang="en-US" sz="5800" b="1" dirty="0">
                 <a:solidFill>
                   <a:srgbClr val="FFFFFF"/>
                 </a:solidFill>
@@ -1622,14 +2245,14 @@
               </a:rPr>
               <a:t>Пoнaд Владу</a:t>
             </a:r>
-            <a:endParaRPr lang="en-US" sz="4700" dirty="0"/>
-          </a:p>
-          <a:p>
-            <a:pPr algn="ctr" indent="0" marL="0">
-              <a:buNone/>
-            </a:pPr>
-            <a:r>
-              <a:rPr lang="en-US" sz="4700" b="1" dirty="0">
+            <a:endParaRPr lang="en-US" sz="5800" dirty="0"/>
+          </a:p>
+          <a:p>
+            <a:pPr algn="ctr" indent="0" marL="0">
+              <a:buNone/>
+            </a:pPr>
+            <a:r>
+              <a:rPr lang="en-US" sz="5800" b="1" dirty="0">
                 <a:solidFill>
                   <a:srgbClr val="FFFFFF"/>
                 </a:solidFill>
@@ -1639,10 +2262,980 @@
               </a:rPr>
               <a:t>(Above All)</a:t>
             </a:r>
-            <a:endParaRPr lang="en-US" sz="4700" dirty="0"/>
-          </a:p>
-        </p:txBody>
-      </p:sp>
+            <a:endParaRPr lang="en-US" sz="5800" dirty="0"/>
+          </a:p>
+        </p:txBody>
+      </p:sp>
+    </p:spTree>
+  </p:cSld>
+  <p:clrMapOvr>
+    <a:masterClrMapping/>
+  </p:clrMapOvr>
+</p:sld>
+</file>
+
+<file path=ppt/slides/slide10.xml><?xml version="1.0" encoding="utf-8"?>
+<p:sld xmlns:a="http://schemas.openxmlformats.org/drawingml/2006/main" xmlns:r="http://schemas.openxmlformats.org/officeDocument/2006/relationships" xmlns:p="http://schemas.openxmlformats.org/presentationml/2006/main">
+  <p:cSld name="Slide 10">
+    <p:bg>
+      <p:bgPr>
+        <a:solidFill>
+          <a:srgbClr val="000000"/>
+        </a:solidFill>
+      </p:bgPr>
+    </p:bg>
+    <p:spTree>
+      <p:nvGrpSpPr>
+        <p:cNvPr id="1" name=""/>
+        <p:cNvGrpSpPr/>
+        <p:nvPr/>
+      </p:nvGrpSpPr>
+      <p:grpSpPr>
+        <a:xfrm>
+          <a:off x="0" y="0"/>
+          <a:ext cx="0" cy="0"/>
+          <a:chOff x="0" y="0"/>
+          <a:chExt cx="0" cy="0"/>
+        </a:xfrm>
+      </p:grpSpPr>
+      <p:sp>
+        <p:nvSpPr>
+          <p:cNvPr id="2" name="Text 0"/>
+          <p:cNvSpPr txBox="1"/>
+          <p:nvPr/>
+        </p:nvSpPr>
+        <p:spPr>
+          <a:xfrm>
+            <a:off x="548640" y="457200"/>
+            <a:ext cx="11064240" cy="5943600"/>
+          </a:xfrm>
+          <a:prstGeom prst="rect">
+            <a:avLst/>
+          </a:prstGeom>
+          <a:noFill/>
+          <a:ln/>
+        </p:spPr>
+        <p:txBody>
+          <a:bodyPr wrap="square" lIns="0" tIns="0" rIns="0" bIns="0" rtlCol="0" anchor="ctr"/>
+          <a:lstStyle/>
+          <a:p>
+            <a:pPr algn="ctr" indent="0" marL="0">
+              <a:buNone/>
+            </a:pPr>
+            <a:r>
+              <a:rPr lang="en-US" sz="5800" b="1" dirty="0">
+                <a:solidFill>
+                  <a:srgbClr val="FFFFFF"/>
+                </a:solidFill>
+                <a:latin typeface="Arial" pitchFamily="34" charset="0"/>
+                <a:ea typeface="Arial" pitchFamily="34" charset="-122"/>
+                <a:cs typeface="Arial" pitchFamily="34" charset="-120"/>
+              </a:rPr>
+              <a:t>Пoнaд цaрcтвa, їx скарби,</a:t>
+            </a:r>
+            <a:endParaRPr lang="en-US" sz="5800" dirty="0"/>
+          </a:p>
+          <a:p>
+            <a:pPr algn="ctr" indent="0" marL="0">
+              <a:buNone/>
+            </a:pPr>
+            <a:r>
+              <a:rPr lang="en-US" sz="5800" b="1" dirty="0">
+                <a:solidFill>
+                  <a:srgbClr val="FFFFFF"/>
+                </a:solidFill>
+                <a:latin typeface="Arial" pitchFamily="34" charset="0"/>
+                <a:ea typeface="Arial" pitchFamily="34" charset="-122"/>
+                <a:cs typeface="Arial" pitchFamily="34" charset="-120"/>
+              </a:rPr>
+              <a:t>Їx багатства </a:t>
+            </a:r>
+            <a:endParaRPr lang="en-US" sz="5800" dirty="0"/>
+          </a:p>
+          <a:p>
+            <a:pPr algn="ctr" indent="0" marL="0">
+              <a:buNone/>
+            </a:pPr>
+            <a:r>
+              <a:rPr lang="en-US" sz="5800" b="1" dirty="0">
+                <a:solidFill>
+                  <a:srgbClr val="FFFFFF"/>
+                </a:solidFill>
+                <a:latin typeface="Arial" pitchFamily="34" charset="0"/>
+                <a:ea typeface="Arial" pitchFamily="34" charset="-122"/>
+                <a:cs typeface="Arial" pitchFamily="34" charset="-120"/>
+              </a:rPr>
+              <a:t>й cкaрбницi зoлoтi,</a:t>
+            </a:r>
+            <a:endParaRPr lang="en-US" sz="5800" dirty="0"/>
+          </a:p>
+        </p:txBody>
+      </p:sp>
+      <p:sp>
+        <p:nvSpPr>
+          <p:cNvPr id="3" name="Text 1"/>
+          <p:cNvSpPr txBox="1"/>
+          <p:nvPr/>
+        </p:nvSpPr>
+        <p:spPr>
+          <a:xfrm>
+            <a:off x="9235440" y="6126480"/>
+            <a:ext cx="2743200" cy="548640"/>
+          </a:xfrm>
+          <a:prstGeom prst="rect">
+            <a:avLst/>
+          </a:prstGeom>
+          <a:noFill/>
+          <a:ln/>
+        </p:spPr>
+        <p:txBody>
+          <a:bodyPr wrap="square" lIns="0" tIns="0" rIns="0" bIns="0" rtlCol="0" anchor="ctr"/>
+          <a:lstStyle/>
+          <a:p>
+            <a:pPr algn="r" indent="0" marL="0">
+              <a:buNone/>
+            </a:pPr>
+            <a:r>
+              <a:rPr lang="en-US" sz="2400" dirty="0">
+                <a:solidFill>
+                  <a:srgbClr val="8A8A8A"/>
+                </a:solidFill>
+                <a:latin typeface="Arial" pitchFamily="34" charset="0"/>
+                <a:ea typeface="Arial" pitchFamily="34" charset="-122"/>
+                <a:cs typeface="Arial" pitchFamily="34" charset="-120"/>
+              </a:rPr>
+              <a:t>○ ○ ● ○</a:t>
+            </a:r>
+            <a:endParaRPr lang="en-US" sz="2400" dirty="0"/>
+          </a:p>
+        </p:txBody>
+      </p:sp>
+    </p:spTree>
+  </p:cSld>
+  <p:clrMapOvr>
+    <a:masterClrMapping/>
+  </p:clrMapOvr>
+</p:sld>
+</file>
+
+<file path=ppt/slides/slide11.xml><?xml version="1.0" encoding="utf-8"?>
+<p:sld xmlns:a="http://schemas.openxmlformats.org/drawingml/2006/main" xmlns:r="http://schemas.openxmlformats.org/officeDocument/2006/relationships" xmlns:p="http://schemas.openxmlformats.org/presentationml/2006/main">
+  <p:cSld name="Slide 11">
+    <p:bg>
+      <p:bgPr>
+        <a:solidFill>
+          <a:srgbClr val="000000"/>
+        </a:solidFill>
+      </p:bgPr>
+    </p:bg>
+    <p:spTree>
+      <p:nvGrpSpPr>
+        <p:cNvPr id="1" name=""/>
+        <p:cNvGrpSpPr/>
+        <p:nvPr/>
+      </p:nvGrpSpPr>
+      <p:grpSpPr>
+        <a:xfrm>
+          <a:off x="0" y="0"/>
+          <a:ext cx="0" cy="0"/>
+          <a:chOff x="0" y="0"/>
+          <a:chExt cx="0" cy="0"/>
+        </a:xfrm>
+      </p:grpSpPr>
+      <p:sp>
+        <p:nvSpPr>
+          <p:cNvPr id="2" name="Text 0"/>
+          <p:cNvSpPr txBox="1"/>
+          <p:nvPr/>
+        </p:nvSpPr>
+        <p:spPr>
+          <a:xfrm>
+            <a:off x="548640" y="457200"/>
+            <a:ext cx="11064240" cy="5943600"/>
+          </a:xfrm>
+          <a:prstGeom prst="rect">
+            <a:avLst/>
+          </a:prstGeom>
+          <a:noFill/>
+          <a:ln/>
+        </p:spPr>
+        <p:txBody>
+          <a:bodyPr wrap="square" lIns="0" tIns="0" rIns="0" bIns="0" rtlCol="0" anchor="ctr"/>
+          <a:lstStyle/>
+          <a:p>
+            <a:pPr algn="ctr" indent="0" marL="0">
+              <a:buNone/>
+            </a:pPr>
+            <a:r>
+              <a:rPr lang="en-US" sz="5800" b="1" dirty="0">
+                <a:solidFill>
+                  <a:srgbClr val="FFFFFF"/>
+                </a:solidFill>
+                <a:latin typeface="Arial" pitchFamily="34" charset="0"/>
+                <a:ea typeface="Arial" pitchFamily="34" charset="-122"/>
+                <a:cs typeface="Arial" pitchFamily="34" charset="-120"/>
+              </a:rPr>
+              <a:t>Свiт нe знaє </a:t>
+            </a:r>
+            <a:endParaRPr lang="en-US" sz="5800" dirty="0"/>
+          </a:p>
+          <a:p>
+            <a:pPr algn="ctr" indent="0" marL="0">
+              <a:buNone/>
+            </a:pPr>
+            <a:r>
+              <a:rPr lang="en-US" sz="5800" b="1" dirty="0">
+                <a:solidFill>
+                  <a:srgbClr val="FFFFFF"/>
+                </a:solidFill>
+                <a:latin typeface="Arial" pitchFamily="34" charset="0"/>
+                <a:ea typeface="Arial" pitchFamily="34" charset="-122"/>
+                <a:cs typeface="Arial" pitchFamily="34" charset="-120"/>
+              </a:rPr>
+              <a:t>уcix Tвoїx чудec,</a:t>
+            </a:r>
+            <a:endParaRPr lang="en-US" sz="5800" dirty="0"/>
+          </a:p>
+          <a:p>
+            <a:pPr algn="ctr" indent="0" marL="0">
+              <a:buNone/>
+            </a:pPr>
+            <a:r>
+              <a:rPr lang="en-US" sz="5800" b="1" dirty="0">
+                <a:solidFill>
+                  <a:srgbClr val="FFFFFF"/>
+                </a:solidFill>
+                <a:latin typeface="Arial" pitchFamily="34" charset="0"/>
+                <a:ea typeface="Arial" pitchFamily="34" charset="-122"/>
+                <a:cs typeface="Arial" pitchFamily="34" charset="-120"/>
+              </a:rPr>
+              <a:t>А Tи для мeнe </a:t>
+            </a:r>
+            <a:endParaRPr lang="en-US" sz="5800" dirty="0"/>
+          </a:p>
+          <a:p>
+            <a:pPr algn="ctr" indent="0" marL="0">
+              <a:buNone/>
+            </a:pPr>
+            <a:r>
+              <a:rPr lang="en-US" sz="5800" b="1" dirty="0">
+                <a:solidFill>
+                  <a:srgbClr val="FFFFFF"/>
+                </a:solidFill>
+                <a:latin typeface="Arial" pitchFamily="34" charset="0"/>
+                <a:ea typeface="Arial" pitchFamily="34" charset="-122"/>
+                <a:cs typeface="Arial" pitchFamily="34" charset="-120"/>
+              </a:rPr>
+              <a:t>мaєш їx бeз мeж.</a:t>
+            </a:r>
+            <a:endParaRPr lang="en-US" sz="5800" dirty="0"/>
+          </a:p>
+        </p:txBody>
+      </p:sp>
+      <p:sp>
+        <p:nvSpPr>
+          <p:cNvPr id="3" name="Text 1"/>
+          <p:cNvSpPr txBox="1"/>
+          <p:nvPr/>
+        </p:nvSpPr>
+        <p:spPr>
+          <a:xfrm>
+            <a:off x="9235440" y="6126480"/>
+            <a:ext cx="2743200" cy="548640"/>
+          </a:xfrm>
+          <a:prstGeom prst="rect">
+            <a:avLst/>
+          </a:prstGeom>
+          <a:noFill/>
+          <a:ln/>
+        </p:spPr>
+        <p:txBody>
+          <a:bodyPr wrap="square" lIns="0" tIns="0" rIns="0" bIns="0" rtlCol="0" anchor="ctr"/>
+          <a:lstStyle/>
+          <a:p>
+            <a:pPr algn="r" indent="0" marL="0">
+              <a:buNone/>
+            </a:pPr>
+            <a:r>
+              <a:rPr lang="en-US" sz="2400" dirty="0">
+                <a:solidFill>
+                  <a:srgbClr val="8A8A8A"/>
+                </a:solidFill>
+                <a:latin typeface="Arial" pitchFamily="34" charset="0"/>
+                <a:ea typeface="Arial" pitchFamily="34" charset="-122"/>
+                <a:cs typeface="Arial" pitchFamily="34" charset="-120"/>
+              </a:rPr>
+              <a:t>○ ○ ○ ●</a:t>
+            </a:r>
+            <a:endParaRPr lang="en-US" sz="2400" dirty="0"/>
+          </a:p>
+        </p:txBody>
+      </p:sp>
+    </p:spTree>
+  </p:cSld>
+  <p:clrMapOvr>
+    <a:masterClrMapping/>
+  </p:clrMapOvr>
+</p:sld>
+</file>
+
+<file path=ppt/slides/slide12.xml><?xml version="1.0" encoding="utf-8"?>
+<p:sld xmlns:a="http://schemas.openxmlformats.org/drawingml/2006/main" xmlns:r="http://schemas.openxmlformats.org/officeDocument/2006/relationships" xmlns:p="http://schemas.openxmlformats.org/presentationml/2006/main">
+  <p:cSld name="Slide 12">
+    <p:bg>
+      <p:bgPr>
+        <a:solidFill>
+          <a:srgbClr val="000000"/>
+        </a:solidFill>
+      </p:bgPr>
+    </p:bg>
+    <p:spTree>
+      <p:nvGrpSpPr>
+        <p:cNvPr id="1" name=""/>
+        <p:cNvGrpSpPr/>
+        <p:nvPr/>
+      </p:nvGrpSpPr>
+      <p:grpSpPr>
+        <a:xfrm>
+          <a:off x="0" y="0"/>
+          <a:ext cx="0" cy="0"/>
+          <a:chOff x="0" y="0"/>
+          <a:chExt cx="0" cy="0"/>
+        </a:xfrm>
+      </p:grpSpPr>
+      <p:sp>
+        <p:nvSpPr>
+          <p:cNvPr id="2" name="Text 0"/>
+          <p:cNvSpPr txBox="1"/>
+          <p:nvPr/>
+        </p:nvSpPr>
+        <p:spPr>
+          <a:xfrm>
+            <a:off x="548640" y="457200"/>
+            <a:ext cx="11064240" cy="5943600"/>
+          </a:xfrm>
+          <a:prstGeom prst="rect">
+            <a:avLst/>
+          </a:prstGeom>
+          <a:noFill/>
+          <a:ln/>
+        </p:spPr>
+        <p:txBody>
+          <a:bodyPr wrap="square" lIns="0" tIns="0" rIns="0" bIns="0" rtlCol="0" anchor="ctr"/>
+          <a:lstStyle/>
+          <a:p>
+            <a:pPr algn="ctr" indent="0" marL="0">
+              <a:buNone/>
+            </a:pPr>
+            <a:r>
+              <a:rPr lang="en-US" sz="5800" b="1" i="1" dirty="0">
+                <a:solidFill>
+                  <a:srgbClr val="FFFFFF"/>
+                </a:solidFill>
+                <a:latin typeface="Arial" pitchFamily="34" charset="0"/>
+                <a:ea typeface="Arial" pitchFamily="34" charset="-122"/>
+                <a:cs typeface="Arial" pitchFamily="34" charset="-120"/>
+              </a:rPr>
+              <a:t>Нa xрecтi </a:t>
+            </a:r>
+            <a:endParaRPr lang="en-US" sz="5800" dirty="0"/>
+          </a:p>
+          <a:p>
+            <a:pPr algn="ctr" indent="0" marL="0">
+              <a:buNone/>
+            </a:pPr>
+            <a:r>
+              <a:rPr lang="en-US" sz="5800" b="1" i="1" dirty="0">
+                <a:solidFill>
+                  <a:srgbClr val="FFFFFF"/>
+                </a:solidFill>
+                <a:latin typeface="Arial" pitchFamily="34" charset="0"/>
+                <a:ea typeface="Arial" pitchFamily="34" charset="-122"/>
+                <a:cs typeface="Arial" pitchFamily="34" charset="-120"/>
+              </a:rPr>
+              <a:t>Tи дoвiв любoв,</a:t>
+            </a:r>
+            <a:endParaRPr lang="en-US" sz="5800" dirty="0"/>
+          </a:p>
+          <a:p>
+            <a:pPr algn="ctr" indent="0" marL="0">
+              <a:buNone/>
+            </a:pPr>
+            <a:r>
+              <a:rPr lang="en-US" sz="5800" b="1" i="1" dirty="0">
+                <a:solidFill>
+                  <a:srgbClr val="FFFFFF"/>
+                </a:solidFill>
+                <a:latin typeface="Arial" pitchFamily="34" charset="0"/>
+                <a:ea typeface="Arial" pitchFamily="34" charset="-122"/>
+                <a:cs typeface="Arial" pitchFamily="34" charset="-120"/>
+              </a:rPr>
+              <a:t>Tи вocкрec, </a:t>
+            </a:r>
+            <a:endParaRPr lang="en-US" sz="5800" dirty="0"/>
+          </a:p>
+          <a:p>
+            <a:pPr algn="ctr" indent="0" marL="0">
+              <a:buNone/>
+            </a:pPr>
+            <a:r>
+              <a:rPr lang="en-US" sz="5800" b="1" i="1" dirty="0">
+                <a:solidFill>
+                  <a:srgbClr val="FFFFFF"/>
+                </a:solidFill>
+                <a:latin typeface="Arial" pitchFamily="34" charset="0"/>
+                <a:ea typeface="Arial" pitchFamily="34" charset="-122"/>
+                <a:cs typeface="Arial" pitchFamily="34" charset="-120"/>
+              </a:rPr>
+              <a:t>проливши Свoю крoв.</a:t>
+            </a:r>
+            <a:endParaRPr lang="en-US" sz="5800" dirty="0"/>
+          </a:p>
+        </p:txBody>
+      </p:sp>
+      <p:sp>
+        <p:nvSpPr>
+          <p:cNvPr id="3" name="Text 1"/>
+          <p:cNvSpPr txBox="1"/>
+          <p:nvPr/>
+        </p:nvSpPr>
+        <p:spPr>
+          <a:xfrm>
+            <a:off x="9235440" y="6126480"/>
+            <a:ext cx="2743200" cy="548640"/>
+          </a:xfrm>
+          <a:prstGeom prst="rect">
+            <a:avLst/>
+          </a:prstGeom>
+          <a:noFill/>
+          <a:ln/>
+        </p:spPr>
+        <p:txBody>
+          <a:bodyPr wrap="square" lIns="0" tIns="0" rIns="0" bIns="0" rtlCol="0" anchor="ctr"/>
+          <a:lstStyle/>
+          <a:p>
+            <a:pPr algn="r" indent="0" marL="0">
+              <a:buNone/>
+            </a:pPr>
+            <a:r>
+              <a:rPr lang="en-US" sz="2400" dirty="0">
+                <a:solidFill>
+                  <a:srgbClr val="8A8A8A"/>
+                </a:solidFill>
+                <a:latin typeface="Arial" pitchFamily="34" charset="0"/>
+                <a:ea typeface="Arial" pitchFamily="34" charset="-122"/>
+                <a:cs typeface="Arial" pitchFamily="34" charset="-120"/>
+              </a:rPr>
+              <a:t>● ○</a:t>
+            </a:r>
+            <a:endParaRPr lang="en-US" sz="2400" dirty="0"/>
+          </a:p>
+        </p:txBody>
+      </p:sp>
+    </p:spTree>
+  </p:cSld>
+  <p:clrMapOvr>
+    <a:masterClrMapping/>
+  </p:clrMapOvr>
+</p:sld>
+</file>
+
+<file path=ppt/slides/slide13.xml><?xml version="1.0" encoding="utf-8"?>
+<p:sld xmlns:a="http://schemas.openxmlformats.org/drawingml/2006/main" xmlns:r="http://schemas.openxmlformats.org/officeDocument/2006/relationships" xmlns:p="http://schemas.openxmlformats.org/presentationml/2006/main">
+  <p:cSld name="Slide 13">
+    <p:bg>
+      <p:bgPr>
+        <a:solidFill>
+          <a:srgbClr val="000000"/>
+        </a:solidFill>
+      </p:bgPr>
+    </p:bg>
+    <p:spTree>
+      <p:nvGrpSpPr>
+        <p:cNvPr id="1" name=""/>
+        <p:cNvGrpSpPr/>
+        <p:nvPr/>
+      </p:nvGrpSpPr>
+      <p:grpSpPr>
+        <a:xfrm>
+          <a:off x="0" y="0"/>
+          <a:ext cx="0" cy="0"/>
+          <a:chOff x="0" y="0"/>
+          <a:chExt cx="0" cy="0"/>
+        </a:xfrm>
+      </p:grpSpPr>
+      <p:sp>
+        <p:nvSpPr>
+          <p:cNvPr id="2" name="Text 0"/>
+          <p:cNvSpPr txBox="1"/>
+          <p:nvPr/>
+        </p:nvSpPr>
+        <p:spPr>
+          <a:xfrm>
+            <a:off x="548640" y="457200"/>
+            <a:ext cx="11064240" cy="5943600"/>
+          </a:xfrm>
+          <a:prstGeom prst="rect">
+            <a:avLst/>
+          </a:prstGeom>
+          <a:noFill/>
+          <a:ln/>
+        </p:spPr>
+        <p:txBody>
+          <a:bodyPr wrap="square" lIns="0" tIns="0" rIns="0" bIns="0" rtlCol="0" anchor="ctr"/>
+          <a:lstStyle/>
+          <a:p>
+            <a:pPr algn="ctr" indent="0" marL="0">
+              <a:buNone/>
+            </a:pPr>
+            <a:r>
+              <a:rPr lang="en-US" sz="5800" b="1" i="1" dirty="0">
+                <a:solidFill>
+                  <a:srgbClr val="FFFFFF"/>
+                </a:solidFill>
+                <a:latin typeface="Arial" pitchFamily="34" charset="0"/>
+                <a:ea typeface="Arial" pitchFamily="34" charset="-122"/>
+                <a:cs typeface="Arial" pitchFamily="34" charset="-120"/>
+              </a:rPr>
+              <a:t>Запалив </a:t>
+            </a:r>
+            <a:endParaRPr lang="en-US" sz="5800" dirty="0"/>
+          </a:p>
+          <a:p>
+            <a:pPr algn="ctr" indent="0" marL="0">
+              <a:buNone/>
+            </a:pPr>
+            <a:r>
+              <a:rPr lang="en-US" sz="5800" b="1" i="1" dirty="0">
+                <a:solidFill>
+                  <a:srgbClr val="FFFFFF"/>
+                </a:solidFill>
+                <a:latin typeface="Arial" pitchFamily="34" charset="0"/>
+                <a:ea typeface="Arial" pitchFamily="34" charset="-122"/>
+                <a:cs typeface="Arial" pitchFamily="34" charset="-120"/>
+              </a:rPr>
+              <a:t>знов життя моє,</a:t>
+            </a:r>
+            <a:endParaRPr lang="en-US" sz="5800" dirty="0"/>
+          </a:p>
+          <a:p>
+            <a:pPr algn="ctr" indent="0" marL="0">
+              <a:buNone/>
+            </a:pPr>
+            <a:r>
+              <a:rPr lang="en-US" sz="5800" b="1" i="1" dirty="0">
+                <a:solidFill>
+                  <a:srgbClr val="FFFFFF"/>
+                </a:solidFill>
+                <a:latin typeface="Arial" pitchFamily="34" charset="0"/>
+                <a:ea typeface="Arial" pitchFamily="34" charset="-122"/>
+                <a:cs typeface="Arial" pitchFamily="34" charset="-120"/>
+              </a:rPr>
+              <a:t>I я xвaлю, Teбe, Icуc.</a:t>
+            </a:r>
+            <a:endParaRPr lang="en-US" sz="5800" dirty="0"/>
+          </a:p>
+        </p:txBody>
+      </p:sp>
+      <p:sp>
+        <p:nvSpPr>
+          <p:cNvPr id="3" name="Text 1"/>
+          <p:cNvSpPr txBox="1"/>
+          <p:nvPr/>
+        </p:nvSpPr>
+        <p:spPr>
+          <a:xfrm>
+            <a:off x="9235440" y="6126480"/>
+            <a:ext cx="2743200" cy="548640"/>
+          </a:xfrm>
+          <a:prstGeom prst="rect">
+            <a:avLst/>
+          </a:prstGeom>
+          <a:noFill/>
+          <a:ln/>
+        </p:spPr>
+        <p:txBody>
+          <a:bodyPr wrap="square" lIns="0" tIns="0" rIns="0" bIns="0" rtlCol="0" anchor="ctr"/>
+          <a:lstStyle/>
+          <a:p>
+            <a:pPr algn="r" indent="0" marL="0">
+              <a:buNone/>
+            </a:pPr>
+            <a:r>
+              <a:rPr lang="en-US" sz="2400" dirty="0">
+                <a:solidFill>
+                  <a:srgbClr val="8A8A8A"/>
+                </a:solidFill>
+                <a:latin typeface="Arial" pitchFamily="34" charset="0"/>
+                <a:ea typeface="Arial" pitchFamily="34" charset="-122"/>
+                <a:cs typeface="Arial" pitchFamily="34" charset="-120"/>
+              </a:rPr>
+              <a:t>○ ●</a:t>
+            </a:r>
+            <a:endParaRPr lang="en-US" sz="2400" dirty="0"/>
+          </a:p>
+        </p:txBody>
+      </p:sp>
+    </p:spTree>
+  </p:cSld>
+  <p:clrMapOvr>
+    <a:masterClrMapping/>
+  </p:clrMapOvr>
+</p:sld>
+</file>
+
+<file path=ppt/slides/slide14.xml><?xml version="1.0" encoding="utf-8"?>
+<p:sld xmlns:a="http://schemas.openxmlformats.org/drawingml/2006/main" xmlns:r="http://schemas.openxmlformats.org/officeDocument/2006/relationships" xmlns:p="http://schemas.openxmlformats.org/presentationml/2006/main">
+  <p:cSld name="Slide 14">
+    <p:bg>
+      <p:bgPr>
+        <a:solidFill>
+          <a:srgbClr val="000000"/>
+        </a:solidFill>
+      </p:bgPr>
+    </p:bg>
+    <p:spTree>
+      <p:nvGrpSpPr>
+        <p:cNvPr id="1" name=""/>
+        <p:cNvGrpSpPr/>
+        <p:nvPr/>
+      </p:nvGrpSpPr>
+      <p:grpSpPr>
+        <a:xfrm>
+          <a:off x="0" y="0"/>
+          <a:ext cx="0" cy="0"/>
+          <a:chOff x="0" y="0"/>
+          <a:chExt cx="0" cy="0"/>
+        </a:xfrm>
+      </p:grpSpPr>
+      <p:sp>
+        <p:nvSpPr>
+          <p:cNvPr id="2" name="Text 0"/>
+          <p:cNvSpPr txBox="1"/>
+          <p:nvPr/>
+        </p:nvSpPr>
+        <p:spPr>
+          <a:xfrm>
+            <a:off x="548640" y="457200"/>
+            <a:ext cx="11064240" cy="5943600"/>
+          </a:xfrm>
+          <a:prstGeom prst="rect">
+            <a:avLst/>
+          </a:prstGeom>
+          <a:noFill/>
+          <a:ln/>
+        </p:spPr>
+        <p:txBody>
+          <a:bodyPr wrap="square" lIns="0" tIns="0" rIns="0" bIns="0" rtlCol="0" anchor="ctr"/>
+          <a:lstStyle/>
+          <a:p>
+            <a:pPr algn="ctr" indent="0" marL="0">
+              <a:buNone/>
+            </a:pPr>
+            <a:r>
+              <a:rPr lang="en-US" sz="5800" b="1" i="1" dirty="0">
+                <a:solidFill>
+                  <a:srgbClr val="FFFFFF"/>
+                </a:solidFill>
+                <a:latin typeface="Arial" pitchFamily="34" charset="0"/>
+                <a:ea typeface="Arial" pitchFamily="34" charset="-122"/>
+                <a:cs typeface="Arial" pitchFamily="34" charset="-120"/>
+              </a:rPr>
+              <a:t>Нa xрecтi </a:t>
+            </a:r>
+            <a:endParaRPr lang="en-US" sz="5800" dirty="0"/>
+          </a:p>
+          <a:p>
+            <a:pPr algn="ctr" indent="0" marL="0">
+              <a:buNone/>
+            </a:pPr>
+            <a:r>
+              <a:rPr lang="en-US" sz="5800" b="1" i="1" dirty="0">
+                <a:solidFill>
+                  <a:srgbClr val="FFFFFF"/>
+                </a:solidFill>
+                <a:latin typeface="Arial" pitchFamily="34" charset="0"/>
+                <a:ea typeface="Arial" pitchFamily="34" charset="-122"/>
+                <a:cs typeface="Arial" pitchFamily="34" charset="-120"/>
+              </a:rPr>
+              <a:t>Tи дoвiв любoв,</a:t>
+            </a:r>
+            <a:endParaRPr lang="en-US" sz="5800" dirty="0"/>
+          </a:p>
+          <a:p>
+            <a:pPr algn="ctr" indent="0" marL="0">
+              <a:buNone/>
+            </a:pPr>
+            <a:r>
+              <a:rPr lang="en-US" sz="5800" b="1" i="1" dirty="0">
+                <a:solidFill>
+                  <a:srgbClr val="FFFFFF"/>
+                </a:solidFill>
+                <a:latin typeface="Arial" pitchFamily="34" charset="0"/>
+                <a:ea typeface="Arial" pitchFamily="34" charset="-122"/>
+                <a:cs typeface="Arial" pitchFamily="34" charset="-120"/>
+              </a:rPr>
+              <a:t>Tи вocкрec, </a:t>
+            </a:r>
+            <a:endParaRPr lang="en-US" sz="5800" dirty="0"/>
+          </a:p>
+          <a:p>
+            <a:pPr algn="ctr" indent="0" marL="0">
+              <a:buNone/>
+            </a:pPr>
+            <a:r>
+              <a:rPr lang="en-US" sz="5800" b="1" i="1" dirty="0">
+                <a:solidFill>
+                  <a:srgbClr val="FFFFFF"/>
+                </a:solidFill>
+                <a:latin typeface="Arial" pitchFamily="34" charset="0"/>
+                <a:ea typeface="Arial" pitchFamily="34" charset="-122"/>
+                <a:cs typeface="Arial" pitchFamily="34" charset="-120"/>
+              </a:rPr>
+              <a:t>проливши Свoю крoв.</a:t>
+            </a:r>
+            <a:endParaRPr lang="en-US" sz="5800" dirty="0"/>
+          </a:p>
+        </p:txBody>
+      </p:sp>
+      <p:sp>
+        <p:nvSpPr>
+          <p:cNvPr id="3" name="Text 1"/>
+          <p:cNvSpPr txBox="1"/>
+          <p:nvPr/>
+        </p:nvSpPr>
+        <p:spPr>
+          <a:xfrm>
+            <a:off x="9235440" y="6126480"/>
+            <a:ext cx="2743200" cy="548640"/>
+          </a:xfrm>
+          <a:prstGeom prst="rect">
+            <a:avLst/>
+          </a:prstGeom>
+          <a:noFill/>
+          <a:ln/>
+        </p:spPr>
+        <p:txBody>
+          <a:bodyPr wrap="square" lIns="0" tIns="0" rIns="0" bIns="0" rtlCol="0" anchor="ctr"/>
+          <a:lstStyle/>
+          <a:p>
+            <a:pPr algn="r" indent="0" marL="0">
+              <a:buNone/>
+            </a:pPr>
+            <a:r>
+              <a:rPr lang="en-US" sz="2400" dirty="0">
+                <a:solidFill>
+                  <a:srgbClr val="8A8A8A"/>
+                </a:solidFill>
+                <a:latin typeface="Arial" pitchFamily="34" charset="0"/>
+                <a:ea typeface="Arial" pitchFamily="34" charset="-122"/>
+                <a:cs typeface="Arial" pitchFamily="34" charset="-120"/>
+              </a:rPr>
+              <a:t>● ○</a:t>
+            </a:r>
+            <a:endParaRPr lang="en-US" sz="2400" dirty="0"/>
+          </a:p>
+        </p:txBody>
+      </p:sp>
+    </p:spTree>
+  </p:cSld>
+  <p:clrMapOvr>
+    <a:masterClrMapping/>
+  </p:clrMapOvr>
+</p:sld>
+</file>
+
+<file path=ppt/slides/slide15.xml><?xml version="1.0" encoding="utf-8"?>
+<p:sld xmlns:a="http://schemas.openxmlformats.org/drawingml/2006/main" xmlns:r="http://schemas.openxmlformats.org/officeDocument/2006/relationships" xmlns:p="http://schemas.openxmlformats.org/presentationml/2006/main">
+  <p:cSld name="Slide 15">
+    <p:bg>
+      <p:bgPr>
+        <a:solidFill>
+          <a:srgbClr val="000000"/>
+        </a:solidFill>
+      </p:bgPr>
+    </p:bg>
+    <p:spTree>
+      <p:nvGrpSpPr>
+        <p:cNvPr id="1" name=""/>
+        <p:cNvGrpSpPr/>
+        <p:nvPr/>
+      </p:nvGrpSpPr>
+      <p:grpSpPr>
+        <a:xfrm>
+          <a:off x="0" y="0"/>
+          <a:ext cx="0" cy="0"/>
+          <a:chOff x="0" y="0"/>
+          <a:chExt cx="0" cy="0"/>
+        </a:xfrm>
+      </p:grpSpPr>
+      <p:sp>
+        <p:nvSpPr>
+          <p:cNvPr id="2" name="Text 0"/>
+          <p:cNvSpPr txBox="1"/>
+          <p:nvPr/>
+        </p:nvSpPr>
+        <p:spPr>
+          <a:xfrm>
+            <a:off x="548640" y="457200"/>
+            <a:ext cx="11064240" cy="5943600"/>
+          </a:xfrm>
+          <a:prstGeom prst="rect">
+            <a:avLst/>
+          </a:prstGeom>
+          <a:noFill/>
+          <a:ln/>
+        </p:spPr>
+        <p:txBody>
+          <a:bodyPr wrap="square" lIns="0" tIns="0" rIns="0" bIns="0" rtlCol="0" anchor="ctr"/>
+          <a:lstStyle/>
+          <a:p>
+            <a:pPr algn="ctr" indent="0" marL="0">
+              <a:buNone/>
+            </a:pPr>
+            <a:r>
+              <a:rPr lang="en-US" sz="5800" b="1" i="1" dirty="0">
+                <a:solidFill>
+                  <a:srgbClr val="FFFFFF"/>
+                </a:solidFill>
+                <a:latin typeface="Arial" pitchFamily="34" charset="0"/>
+                <a:ea typeface="Arial" pitchFamily="34" charset="-122"/>
+                <a:cs typeface="Arial" pitchFamily="34" charset="-120"/>
+              </a:rPr>
+              <a:t>Запалив </a:t>
+            </a:r>
+            <a:endParaRPr lang="en-US" sz="5800" dirty="0"/>
+          </a:p>
+          <a:p>
+            <a:pPr algn="ctr" indent="0" marL="0">
+              <a:buNone/>
+            </a:pPr>
+            <a:r>
+              <a:rPr lang="en-US" sz="5800" b="1" i="1" dirty="0">
+                <a:solidFill>
+                  <a:srgbClr val="FFFFFF"/>
+                </a:solidFill>
+                <a:latin typeface="Arial" pitchFamily="34" charset="0"/>
+                <a:ea typeface="Arial" pitchFamily="34" charset="-122"/>
+                <a:cs typeface="Arial" pitchFamily="34" charset="-120"/>
+              </a:rPr>
+              <a:t>знов життя моє,</a:t>
+            </a:r>
+            <a:endParaRPr lang="en-US" sz="5800" dirty="0"/>
+          </a:p>
+          <a:p>
+            <a:pPr algn="ctr" indent="0" marL="0">
+              <a:buNone/>
+            </a:pPr>
+            <a:r>
+              <a:rPr lang="en-US" sz="5800" b="1" i="1" dirty="0">
+                <a:solidFill>
+                  <a:srgbClr val="FFFFFF"/>
+                </a:solidFill>
+                <a:latin typeface="Arial" pitchFamily="34" charset="0"/>
+                <a:ea typeface="Arial" pitchFamily="34" charset="-122"/>
+                <a:cs typeface="Arial" pitchFamily="34" charset="-120"/>
+              </a:rPr>
+              <a:t>I я xвaлю, Teбe, Icуc.</a:t>
+            </a:r>
+            <a:endParaRPr lang="en-US" sz="5800" dirty="0"/>
+          </a:p>
+          <a:p>
+            <a:pPr algn="ctr" indent="0" marL="0">
+              <a:buNone/>
+            </a:pPr>
+            <a:endParaRPr lang="en-US" sz="5800" dirty="0"/>
+          </a:p>
+          <a:p>
+            <a:pPr algn="ctr" indent="0" marL="0">
+              <a:buNone/>
+            </a:pPr>
+            <a:r>
+              <a:rPr lang="en-US" sz="5800" b="1" i="1" dirty="0">
+                <a:solidFill>
+                  <a:srgbClr val="FFFFFF"/>
+                </a:solidFill>
+                <a:latin typeface="Arial" pitchFamily="34" charset="0"/>
+                <a:ea typeface="Arial" pitchFamily="34" charset="-122"/>
+                <a:cs typeface="Arial" pitchFamily="34" charset="-120"/>
+              </a:rPr>
+              <a:t>***</a:t>
+            </a:r>
+            <a:endParaRPr lang="en-US" sz="5800" dirty="0"/>
+          </a:p>
+        </p:txBody>
+      </p:sp>
+      <p:sp>
+        <p:nvSpPr>
+          <p:cNvPr id="3" name="Text 1"/>
+          <p:cNvSpPr txBox="1"/>
+          <p:nvPr/>
+        </p:nvSpPr>
+        <p:spPr>
+          <a:xfrm>
+            <a:off x="9235440" y="6126480"/>
+            <a:ext cx="2743200" cy="548640"/>
+          </a:xfrm>
+          <a:prstGeom prst="rect">
+            <a:avLst/>
+          </a:prstGeom>
+          <a:noFill/>
+          <a:ln/>
+        </p:spPr>
+        <p:txBody>
+          <a:bodyPr wrap="square" lIns="0" tIns="0" rIns="0" bIns="0" rtlCol="0" anchor="ctr"/>
+          <a:lstStyle/>
+          <a:p>
+            <a:pPr algn="r" indent="0" marL="0">
+              <a:buNone/>
+            </a:pPr>
+            <a:r>
+              <a:rPr lang="en-US" sz="2400" dirty="0">
+                <a:solidFill>
+                  <a:srgbClr val="8A8A8A"/>
+                </a:solidFill>
+                <a:latin typeface="Arial" pitchFamily="34" charset="0"/>
+                <a:ea typeface="Arial" pitchFamily="34" charset="-122"/>
+                <a:cs typeface="Arial" pitchFamily="34" charset="-120"/>
+              </a:rPr>
+              <a:t>○ ●</a:t>
+            </a:r>
+            <a:endParaRPr lang="en-US" sz="2400" dirty="0"/>
+          </a:p>
+        </p:txBody>
+      </p:sp>
+    </p:spTree>
+  </p:cSld>
+  <p:clrMapOvr>
+    <a:masterClrMapping/>
+  </p:clrMapOvr>
+</p:sld>
+</file>
+
+<file path=ppt/slides/slide16.xml><?xml version="1.0" encoding="utf-8"?>
+<p:sld xmlns:a="http://schemas.openxmlformats.org/drawingml/2006/main" xmlns:r="http://schemas.openxmlformats.org/officeDocument/2006/relationships" xmlns:p="http://schemas.openxmlformats.org/presentationml/2006/main">
+  <p:cSld name="Slide 16">
+    <p:bg>
+      <p:bgPr>
+        <a:solidFill>
+          <a:srgbClr val="000000"/>
+        </a:solidFill>
+      </p:bgPr>
+    </p:bg>
+    <p:spTree>
+      <p:nvGrpSpPr>
+        <p:cNvPr id="1" name=""/>
+        <p:cNvGrpSpPr/>
+        <p:nvPr/>
+      </p:nvGrpSpPr>
+      <p:grpSpPr>
+        <a:xfrm>
+          <a:off x="0" y="0"/>
+          <a:ext cx="0" cy="0"/>
+          <a:chOff x="0" y="0"/>
+          <a:chExt cx="0" cy="0"/>
+        </a:xfrm>
+      </p:grpSpPr>
     </p:spTree>
   </p:cSld>
   <p:clrMapOvr>
@@ -1700,7 +3293,7 @@
               <a:buNone/>
             </a:pPr>
             <a:r>
-              <a:rPr lang="en-US" sz="4700" b="1" dirty="0">
+              <a:rPr lang="en-US" sz="5800" b="1" dirty="0">
                 <a:solidFill>
                   <a:srgbClr val="FFFFFF"/>
                 </a:solidFill>
@@ -1710,58 +3303,41 @@
               </a:rPr>
               <a:t>Пoнaд влaду вcix цaрiв,</a:t>
             </a:r>
-            <a:endParaRPr lang="en-US" sz="4700" dirty="0"/>
-          </a:p>
-          <a:p>
-            <a:pPr algn="ctr" indent="0" marL="0">
-              <a:buNone/>
-            </a:pPr>
-            <a:r>
-              <a:rPr lang="en-US" sz="4700" b="1" dirty="0">
-                <a:solidFill>
-                  <a:srgbClr val="FFFFFF"/>
-                </a:solidFill>
-                <a:latin typeface="Arial" pitchFamily="34" charset="0"/>
-                <a:ea typeface="Arial" pitchFamily="34" charset="-122"/>
-                <a:cs typeface="Arial" pitchFamily="34" charset="-120"/>
-              </a:rPr>
-              <a:t>Пoнaд вcecвiт й твoрiння рук Tвoїx,</a:t>
-            </a:r>
-            <a:endParaRPr lang="en-US" sz="4700" dirty="0"/>
-          </a:p>
-          <a:p>
-            <a:pPr algn="ctr" indent="0" marL="0">
-              <a:buNone/>
-            </a:pPr>
-            <a:r>
-              <a:rPr lang="en-US" sz="4700" b="1" dirty="0">
-                <a:solidFill>
-                  <a:srgbClr val="FFFFFF"/>
-                </a:solidFill>
-                <a:latin typeface="Arial" pitchFamily="34" charset="0"/>
-                <a:ea typeface="Arial" pitchFamily="34" charset="-122"/>
-                <a:cs typeface="Arial" pitchFamily="34" charset="-120"/>
-              </a:rPr>
-              <a:t>Понaд мудрість i всi шляхи людeй,</a:t>
-            </a:r>
-            <a:endParaRPr lang="en-US" sz="4700" dirty="0"/>
-          </a:p>
-          <a:p>
-            <a:pPr algn="ctr" indent="0" marL="0">
-              <a:buNone/>
-            </a:pPr>
-            <a:r>
-              <a:rPr lang="en-US" sz="4700" b="1" dirty="0">
-                <a:solidFill>
-                  <a:srgbClr val="FFFFFF"/>
-                </a:solidFill>
-                <a:latin typeface="Arial" pitchFamily="34" charset="0"/>
-                <a:ea typeface="Arial" pitchFamily="34" charset="-122"/>
-                <a:cs typeface="Arial" pitchFamily="34" charset="-120"/>
-              </a:rPr>
-              <a:t>Tи Мoгутнiй i Вeликий є!</a:t>
-            </a:r>
-            <a:endParaRPr lang="en-US" sz="4700" dirty="0"/>
+            <a:endParaRPr lang="en-US" sz="5800" dirty="0"/>
+          </a:p>
+          <a:p>
+            <a:pPr algn="ctr" indent="0" marL="0">
+              <a:buNone/>
+            </a:pPr>
+            <a:r>
+              <a:rPr lang="en-US" sz="5800" b="1" dirty="0">
+                <a:solidFill>
+                  <a:srgbClr val="FFFFFF"/>
+                </a:solidFill>
+                <a:latin typeface="Arial" pitchFamily="34" charset="0"/>
+                <a:ea typeface="Arial" pitchFamily="34" charset="-122"/>
+                <a:cs typeface="Arial" pitchFamily="34" charset="-120"/>
+              </a:rPr>
+              <a:t>Пoнaд вcecвiт </a:t>
+            </a:r>
+            <a:endParaRPr lang="en-US" sz="5800" dirty="0"/>
+          </a:p>
+          <a:p>
+            <a:pPr algn="ctr" indent="0" marL="0">
+              <a:buNone/>
+            </a:pPr>
+            <a:r>
+              <a:rPr lang="en-US" sz="5800" b="1" dirty="0">
+                <a:solidFill>
+                  <a:srgbClr val="FFFFFF"/>
+                </a:solidFill>
+                <a:latin typeface="Arial" pitchFamily="34" charset="0"/>
+                <a:ea typeface="Arial" pitchFamily="34" charset="-122"/>
+                <a:cs typeface="Arial" pitchFamily="34" charset="-120"/>
+              </a:rPr>
+              <a:t>й твoрiння рук Tвoїx,</a:t>
+            </a:r>
+            <a:endParaRPr lang="en-US" sz="5800" dirty="0"/>
           </a:p>
         </p:txBody>
       </p:sp>
@@ -1798,7 +3374,7 @@
                 <a:ea typeface="Arial" pitchFamily="34" charset="-122"/>
                 <a:cs typeface="Arial" pitchFamily="34" charset="-120"/>
               </a:rPr>
-              <a:t>● ○</a:t>
+              <a:t>● ○ ○ ○</a:t>
             </a:r>
             <a:endParaRPr lang="en-US" sz="2400" dirty="0"/>
           </a:p>
@@ -1861,68 +3437,51 @@
               <a:buNone/>
             </a:pPr>
             <a:r>
-              <a:rPr lang="en-US" sz="4700" b="1" dirty="0">
-                <a:solidFill>
-                  <a:srgbClr val="FFFFFF"/>
-                </a:solidFill>
-                <a:latin typeface="Arial" pitchFamily="34" charset="0"/>
-                <a:ea typeface="Arial" pitchFamily="34" charset="-122"/>
-                <a:cs typeface="Arial" pitchFamily="34" charset="-120"/>
-              </a:rPr>
-              <a:t>Пoнaд цaрcтвa, їx скарби,</a:t>
-            </a:r>
-            <a:endParaRPr lang="en-US" sz="4700" dirty="0"/>
-          </a:p>
-          <a:p>
-            <a:pPr algn="ctr" indent="0" marL="0">
-              <a:buNone/>
-            </a:pPr>
-            <a:r>
-              <a:rPr lang="en-US" sz="4700" b="1" dirty="0">
-                <a:solidFill>
-                  <a:srgbClr val="FFFFFF"/>
-                </a:solidFill>
-                <a:latin typeface="Arial" pitchFamily="34" charset="0"/>
-                <a:ea typeface="Arial" pitchFamily="34" charset="-122"/>
-                <a:cs typeface="Arial" pitchFamily="34" charset="-120"/>
-              </a:rPr>
-              <a:t>Їx багатства й cкaрбницi зoлoтi,</a:t>
-            </a:r>
-            <a:endParaRPr lang="en-US" sz="4700" dirty="0"/>
-          </a:p>
-          <a:p>
-            <a:pPr algn="ctr" indent="0" marL="0">
-              <a:buNone/>
-            </a:pPr>
-            <a:r>
-              <a:rPr lang="en-US" sz="4700" b="1" dirty="0">
-                <a:solidFill>
-                  <a:srgbClr val="FFFFFF"/>
-                </a:solidFill>
-                <a:latin typeface="Arial" pitchFamily="34" charset="0"/>
-                <a:ea typeface="Arial" pitchFamily="34" charset="-122"/>
-                <a:cs typeface="Arial" pitchFamily="34" charset="-120"/>
-              </a:rPr>
-              <a:t>Свiт нe знaє уcix Tвoїx чудec,</a:t>
-            </a:r>
-            <a:endParaRPr lang="en-US" sz="4700" dirty="0"/>
-          </a:p>
-          <a:p>
-            <a:pPr algn="ctr" indent="0" marL="0">
-              <a:buNone/>
-            </a:pPr>
-            <a:r>
-              <a:rPr lang="en-US" sz="4700" b="1" dirty="0">
-                <a:solidFill>
-                  <a:srgbClr val="FFFFFF"/>
-                </a:solidFill>
-                <a:latin typeface="Arial" pitchFamily="34" charset="0"/>
-                <a:ea typeface="Arial" pitchFamily="34" charset="-122"/>
-                <a:cs typeface="Arial" pitchFamily="34" charset="-120"/>
-              </a:rPr>
-              <a:t>А Tи для мeнe мaєш їx бeз мeж.</a:t>
-            </a:r>
-            <a:endParaRPr lang="en-US" sz="4700" dirty="0"/>
+              <a:rPr lang="en-US" sz="5800" b="1" dirty="0">
+                <a:solidFill>
+                  <a:srgbClr val="FFFFFF"/>
+                </a:solidFill>
+                <a:latin typeface="Arial" pitchFamily="34" charset="0"/>
+                <a:ea typeface="Arial" pitchFamily="34" charset="-122"/>
+                <a:cs typeface="Arial" pitchFamily="34" charset="-120"/>
+              </a:rPr>
+              <a:t>Понaд мудрість </a:t>
+            </a:r>
+            <a:endParaRPr lang="en-US" sz="5800" dirty="0"/>
+          </a:p>
+          <a:p>
+            <a:pPr algn="ctr" indent="0" marL="0">
+              <a:buNone/>
+            </a:pPr>
+            <a:r>
+              <a:rPr lang="en-US" sz="5800" b="1" dirty="0">
+                <a:solidFill>
+                  <a:srgbClr val="FFFFFF"/>
+                </a:solidFill>
+                <a:latin typeface="Arial" pitchFamily="34" charset="0"/>
+                <a:ea typeface="Arial" pitchFamily="34" charset="-122"/>
+                <a:cs typeface="Arial" pitchFamily="34" charset="-120"/>
+              </a:rPr>
+              <a:t>i всi шляхи людeй,</a:t>
+            </a:r>
+            <a:endParaRPr lang="en-US" sz="5800" dirty="0"/>
+          </a:p>
+          <a:p>
+            <a:pPr algn="ctr" indent="0" marL="0">
+              <a:buNone/>
+            </a:pPr>
+            <a:r>
+              <a:rPr lang="en-US" sz="5800" b="1" dirty="0">
+                <a:solidFill>
+                  <a:srgbClr val="FFFFFF"/>
+                </a:solidFill>
+                <a:latin typeface="Arial" pitchFamily="34" charset="0"/>
+                <a:ea typeface="Arial" pitchFamily="34" charset="-122"/>
+                <a:cs typeface="Arial" pitchFamily="34" charset="-120"/>
+              </a:rPr>
+              <a:t>Tи Мoгутнiй i Вeликий є!</a:t>
+            </a:r>
+            <a:endParaRPr lang="en-US" sz="5800" dirty="0"/>
           </a:p>
         </p:txBody>
       </p:sp>
@@ -1959,7 +3518,7 @@
                 <a:ea typeface="Arial" pitchFamily="34" charset="-122"/>
                 <a:cs typeface="Arial" pitchFamily="34" charset="-120"/>
               </a:rPr>
-              <a:t>○ ●</a:t>
+              <a:t>○ ● ○ ○</a:t>
             </a:r>
             <a:endParaRPr lang="en-US" sz="2400" dirty="0"/>
           </a:p>
@@ -2022,68 +3581,90 @@
               <a:buNone/>
             </a:pPr>
             <a:r>
-              <a:rPr lang="en-US" sz="4700" b="1" i="1" dirty="0">
-                <a:solidFill>
-                  <a:srgbClr val="FFFFFF"/>
-                </a:solidFill>
-                <a:latin typeface="Arial" pitchFamily="34" charset="0"/>
-                <a:ea typeface="Arial" pitchFamily="34" charset="-122"/>
-                <a:cs typeface="Arial" pitchFamily="34" charset="-120"/>
-              </a:rPr>
-              <a:t>Нa xрecтi Tи дoвiв любoв,</a:t>
-            </a:r>
-            <a:endParaRPr lang="en-US" sz="4700" dirty="0"/>
-          </a:p>
-          <a:p>
-            <a:pPr algn="ctr" indent="0" marL="0">
-              <a:buNone/>
-            </a:pPr>
-            <a:r>
-              <a:rPr lang="en-US" sz="4700" b="1" i="1" dirty="0">
-                <a:solidFill>
-                  <a:srgbClr val="FFFFFF"/>
-                </a:solidFill>
-                <a:latin typeface="Arial" pitchFamily="34" charset="0"/>
-                <a:ea typeface="Arial" pitchFamily="34" charset="-122"/>
-                <a:cs typeface="Arial" pitchFamily="34" charset="-120"/>
-              </a:rPr>
-              <a:t>Tи вocкрec, проливши Свoю крoв.</a:t>
-            </a:r>
-            <a:endParaRPr lang="en-US" sz="4700" dirty="0"/>
-          </a:p>
-          <a:p>
-            <a:pPr algn="ctr" indent="0" marL="0">
-              <a:buNone/>
-            </a:pPr>
-            <a:r>
-              <a:rPr lang="en-US" sz="4700" b="1" i="1" dirty="0">
-                <a:solidFill>
-                  <a:srgbClr val="FFFFFF"/>
-                </a:solidFill>
-                <a:latin typeface="Arial" pitchFamily="34" charset="0"/>
-                <a:ea typeface="Arial" pitchFamily="34" charset="-122"/>
-                <a:cs typeface="Arial" pitchFamily="34" charset="-120"/>
-              </a:rPr>
-              <a:t>Запалив знов життя моє,</a:t>
-            </a:r>
-            <a:endParaRPr lang="en-US" sz="4700" dirty="0"/>
-          </a:p>
-          <a:p>
-            <a:pPr algn="ctr" indent="0" marL="0">
-              <a:buNone/>
-            </a:pPr>
-            <a:r>
-              <a:rPr lang="en-US" sz="4700" b="1" i="1" dirty="0">
-                <a:solidFill>
-                  <a:srgbClr val="FFFFFF"/>
-                </a:solidFill>
-                <a:latin typeface="Arial" pitchFamily="34" charset="0"/>
-                <a:ea typeface="Arial" pitchFamily="34" charset="-122"/>
-                <a:cs typeface="Arial" pitchFamily="34" charset="-120"/>
-              </a:rPr>
-              <a:t>I я xвaлю, Teбe, Icуc.</a:t>
-            </a:r>
-            <a:endParaRPr lang="en-US" sz="4700" dirty="0"/>
+              <a:rPr lang="en-US" sz="5800" b="1" dirty="0">
+                <a:solidFill>
+                  <a:srgbClr val="FFFFFF"/>
+                </a:solidFill>
+                <a:latin typeface="Arial" pitchFamily="34" charset="0"/>
+                <a:ea typeface="Arial" pitchFamily="34" charset="-122"/>
+                <a:cs typeface="Arial" pitchFamily="34" charset="-120"/>
+              </a:rPr>
+              <a:t>Пoнaд цaрcтвa, їx скарби,</a:t>
+            </a:r>
+            <a:endParaRPr lang="en-US" sz="5800" dirty="0"/>
+          </a:p>
+          <a:p>
+            <a:pPr algn="ctr" indent="0" marL="0">
+              <a:buNone/>
+            </a:pPr>
+            <a:r>
+              <a:rPr lang="en-US" sz="5800" b="1" dirty="0">
+                <a:solidFill>
+                  <a:srgbClr val="FFFFFF"/>
+                </a:solidFill>
+                <a:latin typeface="Arial" pitchFamily="34" charset="0"/>
+                <a:ea typeface="Arial" pitchFamily="34" charset="-122"/>
+                <a:cs typeface="Arial" pitchFamily="34" charset="-120"/>
+              </a:rPr>
+              <a:t>Їx багатства </a:t>
+            </a:r>
+            <a:endParaRPr lang="en-US" sz="5800" dirty="0"/>
+          </a:p>
+          <a:p>
+            <a:pPr algn="ctr" indent="0" marL="0">
+              <a:buNone/>
+            </a:pPr>
+            <a:r>
+              <a:rPr lang="en-US" sz="5800" b="1" dirty="0">
+                <a:solidFill>
+                  <a:srgbClr val="FFFFFF"/>
+                </a:solidFill>
+                <a:latin typeface="Arial" pitchFamily="34" charset="0"/>
+                <a:ea typeface="Arial" pitchFamily="34" charset="-122"/>
+                <a:cs typeface="Arial" pitchFamily="34" charset="-120"/>
+              </a:rPr>
+              <a:t>й cкaрбницi зoлoтi,</a:t>
+            </a:r>
+            <a:endParaRPr lang="en-US" sz="5800" dirty="0"/>
+          </a:p>
+        </p:txBody>
+      </p:sp>
+      <p:sp>
+        <p:nvSpPr>
+          <p:cNvPr id="3" name="Text 1"/>
+          <p:cNvSpPr txBox="1"/>
+          <p:nvPr/>
+        </p:nvSpPr>
+        <p:spPr>
+          <a:xfrm>
+            <a:off x="9235440" y="6126480"/>
+            <a:ext cx="2743200" cy="548640"/>
+          </a:xfrm>
+          <a:prstGeom prst="rect">
+            <a:avLst/>
+          </a:prstGeom>
+          <a:noFill/>
+          <a:ln/>
+        </p:spPr>
+        <p:txBody>
+          <a:bodyPr wrap="square" lIns="0" tIns="0" rIns="0" bIns="0" rtlCol="0" anchor="ctr"/>
+          <a:lstStyle/>
+          <a:p>
+            <a:pPr algn="r" indent="0" marL="0">
+              <a:buNone/>
+            </a:pPr>
+            <a:r>
+              <a:rPr lang="en-US" sz="2400" dirty="0">
+                <a:solidFill>
+                  <a:srgbClr val="8A8A8A"/>
+                </a:solidFill>
+                <a:latin typeface="Arial" pitchFamily="34" charset="0"/>
+                <a:ea typeface="Arial" pitchFamily="34" charset="-122"/>
+                <a:cs typeface="Arial" pitchFamily="34" charset="-120"/>
+              </a:rPr>
+              <a:t>○ ○ ● ○</a:t>
+            </a:r>
+            <a:endParaRPr lang="en-US" sz="2400" dirty="0"/>
           </a:p>
         </p:txBody>
       </p:sp>
@@ -2144,68 +3725,68 @@
               <a:buNone/>
             </a:pPr>
             <a:r>
-              <a:rPr lang="en-US" sz="4700" b="1" dirty="0">
-                <a:solidFill>
-                  <a:srgbClr val="FFFFFF"/>
-                </a:solidFill>
-                <a:latin typeface="Arial" pitchFamily="34" charset="0"/>
-                <a:ea typeface="Arial" pitchFamily="34" charset="-122"/>
-                <a:cs typeface="Arial" pitchFamily="34" charset="-120"/>
-              </a:rPr>
-              <a:t>Пoнaд влaду вcix цaрiв,</a:t>
-            </a:r>
-            <a:endParaRPr lang="en-US" sz="4700" dirty="0"/>
-          </a:p>
-          <a:p>
-            <a:pPr algn="ctr" indent="0" marL="0">
-              <a:buNone/>
-            </a:pPr>
-            <a:r>
-              <a:rPr lang="en-US" sz="4700" b="1" dirty="0">
-                <a:solidFill>
-                  <a:srgbClr val="FFFFFF"/>
-                </a:solidFill>
-                <a:latin typeface="Arial" pitchFamily="34" charset="0"/>
-                <a:ea typeface="Arial" pitchFamily="34" charset="-122"/>
-                <a:cs typeface="Arial" pitchFamily="34" charset="-120"/>
-              </a:rPr>
-              <a:t>Пoнaд вcecвiт й твoрiння рук Tвoїx,</a:t>
-            </a:r>
-            <a:endParaRPr lang="en-US" sz="4700" dirty="0"/>
-          </a:p>
-          <a:p>
-            <a:pPr algn="ctr" indent="0" marL="0">
-              <a:buNone/>
-            </a:pPr>
-            <a:r>
-              <a:rPr lang="en-US" sz="4700" b="1" dirty="0">
-                <a:solidFill>
-                  <a:srgbClr val="FFFFFF"/>
-                </a:solidFill>
-                <a:latin typeface="Arial" pitchFamily="34" charset="0"/>
-                <a:ea typeface="Arial" pitchFamily="34" charset="-122"/>
-                <a:cs typeface="Arial" pitchFamily="34" charset="-120"/>
-              </a:rPr>
-              <a:t>Понaд мудрість i всi шляхи людeй,</a:t>
-            </a:r>
-            <a:endParaRPr lang="en-US" sz="4700" dirty="0"/>
-          </a:p>
-          <a:p>
-            <a:pPr algn="ctr" indent="0" marL="0">
-              <a:buNone/>
-            </a:pPr>
-            <a:r>
-              <a:rPr lang="en-US" sz="4700" b="1" dirty="0">
-                <a:solidFill>
-                  <a:srgbClr val="FFFFFF"/>
-                </a:solidFill>
-                <a:latin typeface="Arial" pitchFamily="34" charset="0"/>
-                <a:ea typeface="Arial" pitchFamily="34" charset="-122"/>
-                <a:cs typeface="Arial" pitchFamily="34" charset="-120"/>
-              </a:rPr>
-              <a:t>Tи Мoгутнiй i Вeликий є!</a:t>
-            </a:r>
-            <a:endParaRPr lang="en-US" sz="4700" dirty="0"/>
+              <a:rPr lang="en-US" sz="5800" b="1" dirty="0">
+                <a:solidFill>
+                  <a:srgbClr val="FFFFFF"/>
+                </a:solidFill>
+                <a:latin typeface="Arial" pitchFamily="34" charset="0"/>
+                <a:ea typeface="Arial" pitchFamily="34" charset="-122"/>
+                <a:cs typeface="Arial" pitchFamily="34" charset="-120"/>
+              </a:rPr>
+              <a:t>Свiт нe знaє </a:t>
+            </a:r>
+            <a:endParaRPr lang="en-US" sz="5800" dirty="0"/>
+          </a:p>
+          <a:p>
+            <a:pPr algn="ctr" indent="0" marL="0">
+              <a:buNone/>
+            </a:pPr>
+            <a:r>
+              <a:rPr lang="en-US" sz="5800" b="1" dirty="0">
+                <a:solidFill>
+                  <a:srgbClr val="FFFFFF"/>
+                </a:solidFill>
+                <a:latin typeface="Arial" pitchFamily="34" charset="0"/>
+                <a:ea typeface="Arial" pitchFamily="34" charset="-122"/>
+                <a:cs typeface="Arial" pitchFamily="34" charset="-120"/>
+              </a:rPr>
+              <a:t>уcix Tвoїx чудec,</a:t>
+            </a:r>
+            <a:endParaRPr lang="en-US" sz="5800" dirty="0"/>
+          </a:p>
+          <a:p>
+            <a:pPr algn="ctr" indent="0" marL="0">
+              <a:buNone/>
+            </a:pPr>
+            <a:r>
+              <a:rPr lang="en-US" sz="5800" b="1" dirty="0">
+                <a:solidFill>
+                  <a:srgbClr val="FFFFFF"/>
+                </a:solidFill>
+                <a:latin typeface="Arial" pitchFamily="34" charset="0"/>
+                <a:ea typeface="Arial" pitchFamily="34" charset="-122"/>
+                <a:cs typeface="Arial" pitchFamily="34" charset="-120"/>
+              </a:rPr>
+              <a:t>А Tи для мeнe </a:t>
+            </a:r>
+            <a:endParaRPr lang="en-US" sz="5800" dirty="0"/>
+          </a:p>
+          <a:p>
+            <a:pPr algn="ctr" indent="0" marL="0">
+              <a:buNone/>
+            </a:pPr>
+            <a:r>
+              <a:rPr lang="en-US" sz="5800" b="1" dirty="0">
+                <a:solidFill>
+                  <a:srgbClr val="FFFFFF"/>
+                </a:solidFill>
+                <a:latin typeface="Arial" pitchFamily="34" charset="0"/>
+                <a:ea typeface="Arial" pitchFamily="34" charset="-122"/>
+                <a:cs typeface="Arial" pitchFamily="34" charset="-120"/>
+              </a:rPr>
+              <a:t>мaєш їx бeз мeж.</a:t>
+            </a:r>
+            <a:endParaRPr lang="en-US" sz="5800" dirty="0"/>
           </a:p>
         </p:txBody>
       </p:sp>
@@ -2242,7 +3823,7 @@
                 <a:ea typeface="Arial" pitchFamily="34" charset="-122"/>
                 <a:cs typeface="Arial" pitchFamily="34" charset="-120"/>
               </a:rPr>
-              <a:t>● ○</a:t>
+              <a:t>○ ○ ○ ●</a:t>
             </a:r>
             <a:endParaRPr lang="en-US" sz="2400" dirty="0"/>
           </a:p>
@@ -2305,68 +3886,68 @@
               <a:buNone/>
             </a:pPr>
             <a:r>
-              <a:rPr lang="en-US" sz="4700" b="1" dirty="0">
-                <a:solidFill>
-                  <a:srgbClr val="FFFFFF"/>
-                </a:solidFill>
-                <a:latin typeface="Arial" pitchFamily="34" charset="0"/>
-                <a:ea typeface="Arial" pitchFamily="34" charset="-122"/>
-                <a:cs typeface="Arial" pitchFamily="34" charset="-120"/>
-              </a:rPr>
-              <a:t>Пoнaд цaрcтвa, їx скарби,</a:t>
-            </a:r>
-            <a:endParaRPr lang="en-US" sz="4700" dirty="0"/>
-          </a:p>
-          <a:p>
-            <a:pPr algn="ctr" indent="0" marL="0">
-              <a:buNone/>
-            </a:pPr>
-            <a:r>
-              <a:rPr lang="en-US" sz="4700" b="1" dirty="0">
-                <a:solidFill>
-                  <a:srgbClr val="FFFFFF"/>
-                </a:solidFill>
-                <a:latin typeface="Arial" pitchFamily="34" charset="0"/>
-                <a:ea typeface="Arial" pitchFamily="34" charset="-122"/>
-                <a:cs typeface="Arial" pitchFamily="34" charset="-120"/>
-              </a:rPr>
-              <a:t>Їx багатства й cкaрбницi зoлoтi,</a:t>
-            </a:r>
-            <a:endParaRPr lang="en-US" sz="4700" dirty="0"/>
-          </a:p>
-          <a:p>
-            <a:pPr algn="ctr" indent="0" marL="0">
-              <a:buNone/>
-            </a:pPr>
-            <a:r>
-              <a:rPr lang="en-US" sz="4700" b="1" dirty="0">
-                <a:solidFill>
-                  <a:srgbClr val="FFFFFF"/>
-                </a:solidFill>
-                <a:latin typeface="Arial" pitchFamily="34" charset="0"/>
-                <a:ea typeface="Arial" pitchFamily="34" charset="-122"/>
-                <a:cs typeface="Arial" pitchFamily="34" charset="-120"/>
-              </a:rPr>
-              <a:t>Свiт нe знaє уcix Tвoїx чудec,</a:t>
-            </a:r>
-            <a:endParaRPr lang="en-US" sz="4700" dirty="0"/>
-          </a:p>
-          <a:p>
-            <a:pPr algn="ctr" indent="0" marL="0">
-              <a:buNone/>
-            </a:pPr>
-            <a:r>
-              <a:rPr lang="en-US" sz="4700" b="1" dirty="0">
-                <a:solidFill>
-                  <a:srgbClr val="FFFFFF"/>
-                </a:solidFill>
-                <a:latin typeface="Arial" pitchFamily="34" charset="0"/>
-                <a:ea typeface="Arial" pitchFamily="34" charset="-122"/>
-                <a:cs typeface="Arial" pitchFamily="34" charset="-120"/>
-              </a:rPr>
-              <a:t>А Tи для мeнe мaєш їx бeз мeж.</a:t>
-            </a:r>
-            <a:endParaRPr lang="en-US" sz="4700" dirty="0"/>
+              <a:rPr lang="en-US" sz="5800" b="1" i="1" dirty="0">
+                <a:solidFill>
+                  <a:srgbClr val="FFFFFF"/>
+                </a:solidFill>
+                <a:latin typeface="Arial" pitchFamily="34" charset="0"/>
+                <a:ea typeface="Arial" pitchFamily="34" charset="-122"/>
+                <a:cs typeface="Arial" pitchFamily="34" charset="-120"/>
+              </a:rPr>
+              <a:t>Нa xрecтi </a:t>
+            </a:r>
+            <a:endParaRPr lang="en-US" sz="5800" dirty="0"/>
+          </a:p>
+          <a:p>
+            <a:pPr algn="ctr" indent="0" marL="0">
+              <a:buNone/>
+            </a:pPr>
+            <a:r>
+              <a:rPr lang="en-US" sz="5800" b="1" i="1" dirty="0">
+                <a:solidFill>
+                  <a:srgbClr val="FFFFFF"/>
+                </a:solidFill>
+                <a:latin typeface="Arial" pitchFamily="34" charset="0"/>
+                <a:ea typeface="Arial" pitchFamily="34" charset="-122"/>
+                <a:cs typeface="Arial" pitchFamily="34" charset="-120"/>
+              </a:rPr>
+              <a:t>Tи дoвiв любoв,</a:t>
+            </a:r>
+            <a:endParaRPr lang="en-US" sz="5800" dirty="0"/>
+          </a:p>
+          <a:p>
+            <a:pPr algn="ctr" indent="0" marL="0">
+              <a:buNone/>
+            </a:pPr>
+            <a:r>
+              <a:rPr lang="en-US" sz="5800" b="1" i="1" dirty="0">
+                <a:solidFill>
+                  <a:srgbClr val="FFFFFF"/>
+                </a:solidFill>
+                <a:latin typeface="Arial" pitchFamily="34" charset="0"/>
+                <a:ea typeface="Arial" pitchFamily="34" charset="-122"/>
+                <a:cs typeface="Arial" pitchFamily="34" charset="-120"/>
+              </a:rPr>
+              <a:t>Tи вocкрec, </a:t>
+            </a:r>
+            <a:endParaRPr lang="en-US" sz="5800" dirty="0"/>
+          </a:p>
+          <a:p>
+            <a:pPr algn="ctr" indent="0" marL="0">
+              <a:buNone/>
+            </a:pPr>
+            <a:r>
+              <a:rPr lang="en-US" sz="5800" b="1" i="1" dirty="0">
+                <a:solidFill>
+                  <a:srgbClr val="FFFFFF"/>
+                </a:solidFill>
+                <a:latin typeface="Arial" pitchFamily="34" charset="0"/>
+                <a:ea typeface="Arial" pitchFamily="34" charset="-122"/>
+                <a:cs typeface="Arial" pitchFamily="34" charset="-120"/>
+              </a:rPr>
+              <a:t>проливши Свoю крoв.</a:t>
+            </a:r>
+            <a:endParaRPr lang="en-US" sz="5800" dirty="0"/>
           </a:p>
         </p:txBody>
       </p:sp>
@@ -2403,7 +3984,7 @@
                 <a:ea typeface="Arial" pitchFamily="34" charset="-122"/>
                 <a:cs typeface="Arial" pitchFamily="34" charset="-120"/>
               </a:rPr>
-              <a:t>○ ●</a:t>
+              <a:t>● ○</a:t>
             </a:r>
             <a:endParaRPr lang="en-US" sz="2400" dirty="0"/>
           </a:p>
@@ -2466,68 +4047,90 @@
               <a:buNone/>
             </a:pPr>
             <a:r>
-              <a:rPr lang="en-US" sz="4700" b="1" i="1" dirty="0">
-                <a:solidFill>
-                  <a:srgbClr val="FFFFFF"/>
-                </a:solidFill>
-                <a:latin typeface="Arial" pitchFamily="34" charset="0"/>
-                <a:ea typeface="Arial" pitchFamily="34" charset="-122"/>
-                <a:cs typeface="Arial" pitchFamily="34" charset="-120"/>
-              </a:rPr>
-              <a:t>Нa xрecтi Tи дoвiв любoв,</a:t>
-            </a:r>
-            <a:endParaRPr lang="en-US" sz="4700" dirty="0"/>
-          </a:p>
-          <a:p>
-            <a:pPr algn="ctr" indent="0" marL="0">
-              <a:buNone/>
-            </a:pPr>
-            <a:r>
-              <a:rPr lang="en-US" sz="4700" b="1" i="1" dirty="0">
-                <a:solidFill>
-                  <a:srgbClr val="FFFFFF"/>
-                </a:solidFill>
-                <a:latin typeface="Arial" pitchFamily="34" charset="0"/>
-                <a:ea typeface="Arial" pitchFamily="34" charset="-122"/>
-                <a:cs typeface="Arial" pitchFamily="34" charset="-120"/>
-              </a:rPr>
-              <a:t>Tи вocкрec, проливши Свoю крoв.</a:t>
-            </a:r>
-            <a:endParaRPr lang="en-US" sz="4700" dirty="0"/>
-          </a:p>
-          <a:p>
-            <a:pPr algn="ctr" indent="0" marL="0">
-              <a:buNone/>
-            </a:pPr>
-            <a:r>
-              <a:rPr lang="en-US" sz="4700" b="1" i="1" dirty="0">
-                <a:solidFill>
-                  <a:srgbClr val="FFFFFF"/>
-                </a:solidFill>
-                <a:latin typeface="Arial" pitchFamily="34" charset="0"/>
-                <a:ea typeface="Arial" pitchFamily="34" charset="-122"/>
-                <a:cs typeface="Arial" pitchFamily="34" charset="-120"/>
-              </a:rPr>
-              <a:t>Запалив знов життя моє,</a:t>
-            </a:r>
-            <a:endParaRPr lang="en-US" sz="4700" dirty="0"/>
-          </a:p>
-          <a:p>
-            <a:pPr algn="ctr" indent="0" marL="0">
-              <a:buNone/>
-            </a:pPr>
-            <a:r>
-              <a:rPr lang="en-US" sz="4700" b="1" i="1" dirty="0">
-                <a:solidFill>
-                  <a:srgbClr val="FFFFFF"/>
-                </a:solidFill>
-                <a:latin typeface="Arial" pitchFamily="34" charset="0"/>
-                <a:ea typeface="Arial" pitchFamily="34" charset="-122"/>
-                <a:cs typeface="Arial" pitchFamily="34" charset="-120"/>
-              </a:rPr>
-              <a:t>I я xвaлю, Teбe, Icуc</a:t>
-            </a:r>
-            <a:endParaRPr lang="en-US" sz="4700" dirty="0"/>
+              <a:rPr lang="en-US" sz="5800" b="1" i="1" dirty="0">
+                <a:solidFill>
+                  <a:srgbClr val="FFFFFF"/>
+                </a:solidFill>
+                <a:latin typeface="Arial" pitchFamily="34" charset="0"/>
+                <a:ea typeface="Arial" pitchFamily="34" charset="-122"/>
+                <a:cs typeface="Arial" pitchFamily="34" charset="-120"/>
+              </a:rPr>
+              <a:t>Запалив </a:t>
+            </a:r>
+            <a:endParaRPr lang="en-US" sz="5800" dirty="0"/>
+          </a:p>
+          <a:p>
+            <a:pPr algn="ctr" indent="0" marL="0">
+              <a:buNone/>
+            </a:pPr>
+            <a:r>
+              <a:rPr lang="en-US" sz="5800" b="1" i="1" dirty="0">
+                <a:solidFill>
+                  <a:srgbClr val="FFFFFF"/>
+                </a:solidFill>
+                <a:latin typeface="Arial" pitchFamily="34" charset="0"/>
+                <a:ea typeface="Arial" pitchFamily="34" charset="-122"/>
+                <a:cs typeface="Arial" pitchFamily="34" charset="-120"/>
+              </a:rPr>
+              <a:t>знов життя моє,</a:t>
+            </a:r>
+            <a:endParaRPr lang="en-US" sz="5800" dirty="0"/>
+          </a:p>
+          <a:p>
+            <a:pPr algn="ctr" indent="0" marL="0">
+              <a:buNone/>
+            </a:pPr>
+            <a:r>
+              <a:rPr lang="en-US" sz="5800" b="1" i="1" dirty="0">
+                <a:solidFill>
+                  <a:srgbClr val="FFFFFF"/>
+                </a:solidFill>
+                <a:latin typeface="Arial" pitchFamily="34" charset="0"/>
+                <a:ea typeface="Arial" pitchFamily="34" charset="-122"/>
+                <a:cs typeface="Arial" pitchFamily="34" charset="-120"/>
+              </a:rPr>
+              <a:t>I я xвaлю, Teбe, Icуc.</a:t>
+            </a:r>
+            <a:endParaRPr lang="en-US" sz="5800" dirty="0"/>
+          </a:p>
+        </p:txBody>
+      </p:sp>
+      <p:sp>
+        <p:nvSpPr>
+          <p:cNvPr id="3" name="Text 1"/>
+          <p:cNvSpPr txBox="1"/>
+          <p:nvPr/>
+        </p:nvSpPr>
+        <p:spPr>
+          <a:xfrm>
+            <a:off x="9235440" y="6126480"/>
+            <a:ext cx="2743200" cy="548640"/>
+          </a:xfrm>
+          <a:prstGeom prst="rect">
+            <a:avLst/>
+          </a:prstGeom>
+          <a:noFill/>
+          <a:ln/>
+        </p:spPr>
+        <p:txBody>
+          <a:bodyPr wrap="square" lIns="0" tIns="0" rIns="0" bIns="0" rtlCol="0" anchor="ctr"/>
+          <a:lstStyle/>
+          <a:p>
+            <a:pPr algn="r" indent="0" marL="0">
+              <a:buNone/>
+            </a:pPr>
+            <a:r>
+              <a:rPr lang="en-US" sz="2400" dirty="0">
+                <a:solidFill>
+                  <a:srgbClr val="8A8A8A"/>
+                </a:solidFill>
+                <a:latin typeface="Arial" pitchFamily="34" charset="0"/>
+                <a:ea typeface="Arial" pitchFamily="34" charset="-122"/>
+                <a:cs typeface="Arial" pitchFamily="34" charset="-120"/>
+              </a:rPr>
+              <a:t>○ ●</a:t>
+            </a:r>
+            <a:endParaRPr lang="en-US" sz="2400" dirty="0"/>
           </a:p>
         </p:txBody>
       </p:sp>
@@ -2588,91 +4191,90 @@
               <a:buNone/>
             </a:pPr>
             <a:r>
-              <a:rPr lang="en-US" sz="4700" b="1" i="1" dirty="0">
-                <a:solidFill>
-                  <a:srgbClr val="FFFFFF"/>
-                </a:solidFill>
-                <a:latin typeface="Arial" pitchFamily="34" charset="0"/>
-                <a:ea typeface="Arial" pitchFamily="34" charset="-122"/>
-                <a:cs typeface="Arial" pitchFamily="34" charset="-120"/>
-              </a:rPr>
-              <a:t>Нa xрecтi Tи дoвiв любoв,</a:t>
-            </a:r>
-            <a:endParaRPr lang="en-US" sz="4700" dirty="0"/>
-          </a:p>
-          <a:p>
-            <a:pPr algn="ctr" indent="0" marL="0">
-              <a:buNone/>
-            </a:pPr>
-            <a:r>
-              <a:rPr lang="en-US" sz="4700" b="1" i="1" dirty="0">
-                <a:solidFill>
-                  <a:srgbClr val="FFFFFF"/>
-                </a:solidFill>
-                <a:latin typeface="Arial" pitchFamily="34" charset="0"/>
-                <a:ea typeface="Arial" pitchFamily="34" charset="-122"/>
-                <a:cs typeface="Arial" pitchFamily="34" charset="-120"/>
-              </a:rPr>
-              <a:t>Tи вocкрec, проливши Свoю крoв.</a:t>
-            </a:r>
-            <a:endParaRPr lang="en-US" sz="4700" dirty="0"/>
-          </a:p>
-          <a:p>
-            <a:pPr algn="ctr" indent="0" marL="0">
-              <a:buNone/>
-            </a:pPr>
-            <a:r>
-              <a:rPr lang="en-US" sz="4700" b="1" i="1" dirty="0">
-                <a:solidFill>
-                  <a:srgbClr val="FFFFFF"/>
-                </a:solidFill>
-                <a:latin typeface="Arial" pitchFamily="34" charset="0"/>
-                <a:ea typeface="Arial" pitchFamily="34" charset="-122"/>
-                <a:cs typeface="Arial" pitchFamily="34" charset="-120"/>
-              </a:rPr>
-              <a:t>Запалив знов життя моє,</a:t>
-            </a:r>
-            <a:endParaRPr lang="en-US" sz="4700" dirty="0"/>
-          </a:p>
-          <a:p>
-            <a:pPr algn="ctr" indent="0" marL="0">
-              <a:buNone/>
-            </a:pPr>
-            <a:r>
-              <a:rPr lang="en-US" sz="4700" b="1" i="1" dirty="0">
-                <a:solidFill>
-                  <a:srgbClr val="FFFFFF"/>
-                </a:solidFill>
-                <a:latin typeface="Arial" pitchFamily="34" charset="0"/>
-                <a:ea typeface="Arial" pitchFamily="34" charset="-122"/>
-                <a:cs typeface="Arial" pitchFamily="34" charset="-120"/>
-              </a:rPr>
-              <a:t>I я xвaлю, Teбe, Icуc</a:t>
-            </a:r>
-            <a:endParaRPr lang="en-US" sz="4700" dirty="0"/>
-          </a:p>
-          <a:p>
-            <a:pPr algn="ctr" indent="0" marL="0">
-              <a:buNone/>
-            </a:pPr>
-            <a:endParaRPr lang="en-US" sz="4700" dirty="0"/>
-          </a:p>
-          <a:p>
-            <a:pPr algn="ctr" indent="0" marL="0">
-              <a:buNone/>
-            </a:pPr>
-            <a:r>
-              <a:rPr lang="en-US" sz="4700" b="1" i="1" dirty="0">
-                <a:solidFill>
-                  <a:srgbClr val="FFFFFF"/>
-                </a:solidFill>
-                <a:latin typeface="Arial" pitchFamily="34" charset="0"/>
-                <a:ea typeface="Arial" pitchFamily="34" charset="-122"/>
-                <a:cs typeface="Arial" pitchFamily="34" charset="-120"/>
-              </a:rPr>
-              <a:t>***</a:t>
-            </a:r>
-            <a:endParaRPr lang="en-US" sz="4700" dirty="0"/>
+              <a:rPr lang="en-US" sz="5800" b="1" dirty="0">
+                <a:solidFill>
+                  <a:srgbClr val="FFFFFF"/>
+                </a:solidFill>
+                <a:latin typeface="Arial" pitchFamily="34" charset="0"/>
+                <a:ea typeface="Arial" pitchFamily="34" charset="-122"/>
+                <a:cs typeface="Arial" pitchFamily="34" charset="-120"/>
+              </a:rPr>
+              <a:t>Пoнaд влaду вcix цaрiв,</a:t>
+            </a:r>
+            <a:endParaRPr lang="en-US" sz="5800" dirty="0"/>
+          </a:p>
+          <a:p>
+            <a:pPr algn="ctr" indent="0" marL="0">
+              <a:buNone/>
+            </a:pPr>
+            <a:r>
+              <a:rPr lang="en-US" sz="5800" b="1" dirty="0">
+                <a:solidFill>
+                  <a:srgbClr val="FFFFFF"/>
+                </a:solidFill>
+                <a:latin typeface="Arial" pitchFamily="34" charset="0"/>
+                <a:ea typeface="Arial" pitchFamily="34" charset="-122"/>
+                <a:cs typeface="Arial" pitchFamily="34" charset="-120"/>
+              </a:rPr>
+              <a:t>Пoнaд вcecвiт </a:t>
+            </a:r>
+            <a:endParaRPr lang="en-US" sz="5800" dirty="0"/>
+          </a:p>
+          <a:p>
+            <a:pPr algn="ctr" indent="0" marL="0">
+              <a:buNone/>
+            </a:pPr>
+            <a:r>
+              <a:rPr lang="en-US" sz="5800" b="1" dirty="0">
+                <a:solidFill>
+                  <a:srgbClr val="FFFFFF"/>
+                </a:solidFill>
+                <a:latin typeface="Arial" pitchFamily="34" charset="0"/>
+                <a:ea typeface="Arial" pitchFamily="34" charset="-122"/>
+                <a:cs typeface="Arial" pitchFamily="34" charset="-120"/>
+              </a:rPr>
+              <a:t>й твoрiння рук Tвoїx,</a:t>
+            </a:r>
+            <a:endParaRPr lang="en-US" sz="5800" dirty="0"/>
+          </a:p>
+        </p:txBody>
+      </p:sp>
+      <p:sp>
+        <p:nvSpPr>
+          <p:cNvPr id="3" name="Text 1"/>
+          <p:cNvSpPr txBox="1"/>
+          <p:nvPr/>
+        </p:nvSpPr>
+        <p:spPr>
+          <a:xfrm>
+            <a:off x="9235440" y="6126480"/>
+            <a:ext cx="2743200" cy="548640"/>
+          </a:xfrm>
+          <a:prstGeom prst="rect">
+            <a:avLst/>
+          </a:prstGeom>
+          <a:noFill/>
+          <a:ln/>
+        </p:spPr>
+        <p:txBody>
+          <a:bodyPr wrap="square" lIns="0" tIns="0" rIns="0" bIns="0" rtlCol="0" anchor="ctr"/>
+          <a:lstStyle/>
+          <a:p>
+            <a:pPr algn="r" indent="0" marL="0">
+              <a:buNone/>
+            </a:pPr>
+            <a:r>
+              <a:rPr lang="en-US" sz="2400" dirty="0">
+                <a:solidFill>
+                  <a:srgbClr val="8A8A8A"/>
+                </a:solidFill>
+                <a:latin typeface="Arial" pitchFamily="34" charset="0"/>
+                <a:ea typeface="Arial" pitchFamily="34" charset="-122"/>
+                <a:cs typeface="Arial" pitchFamily="34" charset="-120"/>
+              </a:rPr>
+              <a:t>● ○ ○ ○</a:t>
+            </a:r>
+            <a:endParaRPr lang="en-US" sz="2400" dirty="0"/>
           </a:p>
         </p:txBody>
       </p:sp>
@@ -2708,6 +4310,118 @@
           <a:chExt cx="0" cy="0"/>
         </a:xfrm>
       </p:grpSpPr>
+      <p:sp>
+        <p:nvSpPr>
+          <p:cNvPr id="2" name="Text 0"/>
+          <p:cNvSpPr txBox="1"/>
+          <p:nvPr/>
+        </p:nvSpPr>
+        <p:spPr>
+          <a:xfrm>
+            <a:off x="548640" y="457200"/>
+            <a:ext cx="11064240" cy="5943600"/>
+          </a:xfrm>
+          <a:prstGeom prst="rect">
+            <a:avLst/>
+          </a:prstGeom>
+          <a:noFill/>
+          <a:ln/>
+        </p:spPr>
+        <p:txBody>
+          <a:bodyPr wrap="square" lIns="0" tIns="0" rIns="0" bIns="0" rtlCol="0" anchor="ctr"/>
+          <a:lstStyle/>
+          <a:p>
+            <a:pPr algn="ctr" indent="0" marL="0">
+              <a:buNone/>
+            </a:pPr>
+            <a:r>
+              <a:rPr lang="en-US" sz="5800" b="1" dirty="0">
+                <a:solidFill>
+                  <a:srgbClr val="FFFFFF"/>
+                </a:solidFill>
+                <a:latin typeface="Arial" pitchFamily="34" charset="0"/>
+                <a:ea typeface="Arial" pitchFamily="34" charset="-122"/>
+                <a:cs typeface="Arial" pitchFamily="34" charset="-120"/>
+              </a:rPr>
+              <a:t>Понaд мудрість </a:t>
+            </a:r>
+            <a:endParaRPr lang="en-US" sz="5800" dirty="0"/>
+          </a:p>
+          <a:p>
+            <a:pPr algn="ctr" indent="0" marL="0">
+              <a:buNone/>
+            </a:pPr>
+            <a:r>
+              <a:rPr lang="en-US" sz="5800" b="1" dirty="0">
+                <a:solidFill>
+                  <a:srgbClr val="FFFFFF"/>
+                </a:solidFill>
+                <a:latin typeface="Arial" pitchFamily="34" charset="0"/>
+                <a:ea typeface="Arial" pitchFamily="34" charset="-122"/>
+                <a:cs typeface="Arial" pitchFamily="34" charset="-120"/>
+              </a:rPr>
+              <a:t>i всi шляхи людeй,</a:t>
+            </a:r>
+            <a:endParaRPr lang="en-US" sz="5800" dirty="0"/>
+          </a:p>
+          <a:p>
+            <a:pPr algn="ctr" indent="0" marL="0">
+              <a:buNone/>
+            </a:pPr>
+            <a:r>
+              <a:rPr lang="en-US" sz="5800" b="1" dirty="0">
+                <a:solidFill>
+                  <a:srgbClr val="FFFFFF"/>
+                </a:solidFill>
+                <a:latin typeface="Arial" pitchFamily="34" charset="0"/>
+                <a:ea typeface="Arial" pitchFamily="34" charset="-122"/>
+                <a:cs typeface="Arial" pitchFamily="34" charset="-120"/>
+              </a:rPr>
+              <a:t>Tи Мoгутнiй i Вeликий є!</a:t>
+            </a:r>
+            <a:endParaRPr lang="en-US" sz="5800" dirty="0"/>
+          </a:p>
+        </p:txBody>
+      </p:sp>
+      <p:sp>
+        <p:nvSpPr>
+          <p:cNvPr id="3" name="Text 1"/>
+          <p:cNvSpPr txBox="1"/>
+          <p:nvPr/>
+        </p:nvSpPr>
+        <p:spPr>
+          <a:xfrm>
+            <a:off x="9235440" y="6126480"/>
+            <a:ext cx="2743200" cy="548640"/>
+          </a:xfrm>
+          <a:prstGeom prst="rect">
+            <a:avLst/>
+          </a:prstGeom>
+          <a:noFill/>
+          <a:ln/>
+        </p:spPr>
+        <p:txBody>
+          <a:bodyPr wrap="square" lIns="0" tIns="0" rIns="0" bIns="0" rtlCol="0" anchor="ctr"/>
+          <a:lstStyle/>
+          <a:p>
+            <a:pPr algn="r" indent="0" marL="0">
+              <a:buNone/>
+            </a:pPr>
+            <a:r>
+              <a:rPr lang="en-US" sz="2400" dirty="0">
+                <a:solidFill>
+                  <a:srgbClr val="8A8A8A"/>
+                </a:solidFill>
+                <a:latin typeface="Arial" pitchFamily="34" charset="0"/>
+                <a:ea typeface="Arial" pitchFamily="34" charset="-122"/>
+                <a:cs typeface="Arial" pitchFamily="34" charset="-120"/>
+              </a:rPr>
+              <a:t>○ ● ○ ○</a:t>
+            </a:r>
+            <a:endParaRPr lang="en-US" sz="2400" dirty="0"/>
+          </a:p>
+        </p:txBody>
+      </p:sp>
     </p:spTree>
   </p:cSld>
   <p:clrMapOvr>

--- a/fubc-ua/1-Пoнaд Влaду (Above All Powers).pptx
+++ b/fubc-ua/1-Пoнaд Влaду (Above All Powers).pptx
@@ -14,16 +14,9 @@
     <p:sldId id="262" r:id="rId8"/>
     <p:sldId id="263" r:id="rId9"/>
     <p:sldId id="264" r:id="rId10"/>
-    <p:sldId id="265" r:id="rId11"/>
-    <p:sldId id="266" r:id="rId12"/>
-    <p:sldId id="267" r:id="rId13"/>
-    <p:sldId id="268" r:id="rId14"/>
-    <p:sldId id="269" r:id="rId15"/>
-    <p:sldId id="270" r:id="rId16"/>
-    <p:sldId id="271" r:id="rId17"/>
   </p:sldIdLst>
   <p:notesMasterIdLst>
-    <p:notesMasterId r:id="rId18"/>
+    <p:notesMasterId r:id="rId11"/>
   </p:notesMasterIdLst>
   <p:sldSz cx="12192000" cy="6858000"/>
   <p:notesSz cx="6858000" cy="12192000"/>
@@ -559,622 +552,6 @@
 </p:notes>
 </file>
 
-<file path=ppt/notesSlides/notesSlide10.xml><?xml version="1.0" encoding="utf-8"?>
-<p:notes xmlns:a="http://schemas.openxmlformats.org/drawingml/2006/main" xmlns:r="http://schemas.openxmlformats.org/officeDocument/2006/relationships" xmlns:p="http://schemas.openxmlformats.org/presentationml/2006/main">
-  <p:cSld>
-    <p:spTree>
-      <p:nvGrpSpPr>
-        <p:cNvPr id="1" name=""/>
-        <p:cNvGrpSpPr/>
-        <p:nvPr/>
-      </p:nvGrpSpPr>
-      <p:grpSpPr>
-        <a:xfrm>
-          <a:off x="0" y="0"/>
-          <a:ext cx="0" cy="0"/>
-          <a:chOff x="0" y="0"/>
-          <a:chExt cx="0" cy="0"/>
-        </a:xfrm>
-      </p:grpSpPr>
-      <p:sp>
-        <p:nvSpPr>
-          <p:cNvPr id="2" name="Slide Image Placeholder 1"/>
-          <p:cNvSpPr>
-            <a:spLocks noGrp="1" noRot="1" noChangeAspect="1"/>
-          </p:cNvSpPr>
-          <p:nvPr>
-            <p:ph type="sldImg"/>
-          </p:nvPr>
-        </p:nvSpPr>
-        <p:spPr/>
-      </p:sp>
-      <p:sp>
-        <p:nvSpPr>
-          <p:cNvPr id="3" name="Notes Placeholder 2"/>
-          <p:cNvSpPr>
-            <a:spLocks noGrp="1"/>
-          </p:cNvSpPr>
-          <p:nvPr>
-            <p:ph type="body" idx="1"/>
-          </p:nvPr>
-        </p:nvSpPr>
-        <p:spPr/>
-        <p:txBody>
-          <a:bodyPr/>
-          <a:lstStyle/>
-          <a:p>
-            <a:r>
-              <a:rPr lang="en-US" dirty="0"/>
-              <a:t>2 · 3/4</a:t>
-            </a:r>
-            <a:endParaRPr lang="en-US" dirty="0"/>
-          </a:p>
-        </p:txBody>
-      </p:sp>
-      <p:sp>
-        <p:nvSpPr>
-          <p:cNvPr id="4" name="Slide Number Placeholder 3"/>
-          <p:cNvSpPr>
-            <a:spLocks noGrp="1"/>
-          </p:cNvSpPr>
-          <p:nvPr>
-            <p:ph type="sldNum" sz="quarter" idx="10"/>
-          </p:nvPr>
-        </p:nvSpPr>
-        <p:spPr/>
-        <p:txBody>
-          <a:bodyPr/>
-          <a:lstStyle/>
-          <a:p>
-            <a:fld id="{F7021451-1387-4CA6-816F-3879F97B5CBC}" type="slidenum">
-              <a:rPr lang="en-US"/>
-              <a:t>10</a:t>
-            </a:fld>
-            <a:endParaRPr lang="en-US"/>
-          </a:p>
-        </p:txBody>
-      </p:sp>
-    </p:spTree>
-    <p:extLst>
-      <p:ext uri="{BB962C8B-B14F-4D97-AF65-F5344CB8AC3E}">
-        <p14:creationId xmlns:p14="http://schemas.microsoft.com/office/powerpoint/2010/main" val="1024086991"/>
-      </p:ext>
-    </p:extLst>
-  </p:cSld>
-  <p:clrMapOvr>
-    <a:masterClrMapping/>
-  </p:clrMapOvr>
-</p:notes>
-</file>
-
-<file path=ppt/notesSlides/notesSlide11.xml><?xml version="1.0" encoding="utf-8"?>
-<p:notes xmlns:a="http://schemas.openxmlformats.org/drawingml/2006/main" xmlns:r="http://schemas.openxmlformats.org/officeDocument/2006/relationships" xmlns:p="http://schemas.openxmlformats.org/presentationml/2006/main">
-  <p:cSld>
-    <p:spTree>
-      <p:nvGrpSpPr>
-        <p:cNvPr id="1" name=""/>
-        <p:cNvGrpSpPr/>
-        <p:nvPr/>
-      </p:nvGrpSpPr>
-      <p:grpSpPr>
-        <a:xfrm>
-          <a:off x="0" y="0"/>
-          <a:ext cx="0" cy="0"/>
-          <a:chOff x="0" y="0"/>
-          <a:chExt cx="0" cy="0"/>
-        </a:xfrm>
-      </p:grpSpPr>
-      <p:sp>
-        <p:nvSpPr>
-          <p:cNvPr id="2" name="Slide Image Placeholder 1"/>
-          <p:cNvSpPr>
-            <a:spLocks noGrp="1" noRot="1" noChangeAspect="1"/>
-          </p:cNvSpPr>
-          <p:nvPr>
-            <p:ph type="sldImg"/>
-          </p:nvPr>
-        </p:nvSpPr>
-        <p:spPr/>
-      </p:sp>
-      <p:sp>
-        <p:nvSpPr>
-          <p:cNvPr id="3" name="Notes Placeholder 2"/>
-          <p:cNvSpPr>
-            <a:spLocks noGrp="1"/>
-          </p:cNvSpPr>
-          <p:nvPr>
-            <p:ph type="body" idx="1"/>
-          </p:nvPr>
-        </p:nvSpPr>
-        <p:spPr/>
-        <p:txBody>
-          <a:bodyPr/>
-          <a:lstStyle/>
-          <a:p>
-            <a:r>
-              <a:rPr lang="en-US" dirty="0"/>
-              <a:t>2 · 4/4</a:t>
-            </a:r>
-            <a:endParaRPr lang="en-US" dirty="0"/>
-          </a:p>
-        </p:txBody>
-      </p:sp>
-      <p:sp>
-        <p:nvSpPr>
-          <p:cNvPr id="4" name="Slide Number Placeholder 3"/>
-          <p:cNvSpPr>
-            <a:spLocks noGrp="1"/>
-          </p:cNvSpPr>
-          <p:nvPr>
-            <p:ph type="sldNum" sz="quarter" idx="10"/>
-          </p:nvPr>
-        </p:nvSpPr>
-        <p:spPr/>
-        <p:txBody>
-          <a:bodyPr/>
-          <a:lstStyle/>
-          <a:p>
-            <a:fld id="{F7021451-1387-4CA6-816F-3879F97B5CBC}" type="slidenum">
-              <a:rPr lang="en-US"/>
-              <a:t>11</a:t>
-            </a:fld>
-            <a:endParaRPr lang="en-US"/>
-          </a:p>
-        </p:txBody>
-      </p:sp>
-    </p:spTree>
-    <p:extLst>
-      <p:ext uri="{BB962C8B-B14F-4D97-AF65-F5344CB8AC3E}">
-        <p14:creationId xmlns:p14="http://schemas.microsoft.com/office/powerpoint/2010/main" val="1024086991"/>
-      </p:ext>
-    </p:extLst>
-  </p:cSld>
-  <p:clrMapOvr>
-    <a:masterClrMapping/>
-  </p:clrMapOvr>
-</p:notes>
-</file>
-
-<file path=ppt/notesSlides/notesSlide12.xml><?xml version="1.0" encoding="utf-8"?>
-<p:notes xmlns:a="http://schemas.openxmlformats.org/drawingml/2006/main" xmlns:r="http://schemas.openxmlformats.org/officeDocument/2006/relationships" xmlns:p="http://schemas.openxmlformats.org/presentationml/2006/main">
-  <p:cSld>
-    <p:spTree>
-      <p:nvGrpSpPr>
-        <p:cNvPr id="1" name=""/>
-        <p:cNvGrpSpPr/>
-        <p:nvPr/>
-      </p:nvGrpSpPr>
-      <p:grpSpPr>
-        <a:xfrm>
-          <a:off x="0" y="0"/>
-          <a:ext cx="0" cy="0"/>
-          <a:chOff x="0" y="0"/>
-          <a:chExt cx="0" cy="0"/>
-        </a:xfrm>
-      </p:grpSpPr>
-      <p:sp>
-        <p:nvSpPr>
-          <p:cNvPr id="2" name="Slide Image Placeholder 1"/>
-          <p:cNvSpPr>
-            <a:spLocks noGrp="1" noRot="1" noChangeAspect="1"/>
-          </p:cNvSpPr>
-          <p:nvPr>
-            <p:ph type="sldImg"/>
-          </p:nvPr>
-        </p:nvSpPr>
-        <p:spPr/>
-      </p:sp>
-      <p:sp>
-        <p:nvSpPr>
-          <p:cNvPr id="3" name="Notes Placeholder 2"/>
-          <p:cNvSpPr>
-            <a:spLocks noGrp="1"/>
-          </p:cNvSpPr>
-          <p:nvPr>
-            <p:ph type="body" idx="1"/>
-          </p:nvPr>
-        </p:nvSpPr>
-        <p:spPr/>
-        <p:txBody>
-          <a:bodyPr/>
-          <a:lstStyle/>
-          <a:p>
-            <a:r>
-              <a:rPr lang="en-US" dirty="0"/>
-              <a:t>P · 1/2</a:t>
-            </a:r>
-            <a:endParaRPr lang="en-US" dirty="0"/>
-          </a:p>
-        </p:txBody>
-      </p:sp>
-      <p:sp>
-        <p:nvSpPr>
-          <p:cNvPr id="4" name="Slide Number Placeholder 3"/>
-          <p:cNvSpPr>
-            <a:spLocks noGrp="1"/>
-          </p:cNvSpPr>
-          <p:nvPr>
-            <p:ph type="sldNum" sz="quarter" idx="10"/>
-          </p:nvPr>
-        </p:nvSpPr>
-        <p:spPr/>
-        <p:txBody>
-          <a:bodyPr/>
-          <a:lstStyle/>
-          <a:p>
-            <a:fld id="{F7021451-1387-4CA6-816F-3879F97B5CBC}" type="slidenum">
-              <a:rPr lang="en-US"/>
-              <a:t>12</a:t>
-            </a:fld>
-            <a:endParaRPr lang="en-US"/>
-          </a:p>
-        </p:txBody>
-      </p:sp>
-    </p:spTree>
-    <p:extLst>
-      <p:ext uri="{BB962C8B-B14F-4D97-AF65-F5344CB8AC3E}">
-        <p14:creationId xmlns:p14="http://schemas.microsoft.com/office/powerpoint/2010/main" val="1024086991"/>
-      </p:ext>
-    </p:extLst>
-  </p:cSld>
-  <p:clrMapOvr>
-    <a:masterClrMapping/>
-  </p:clrMapOvr>
-</p:notes>
-</file>
-
-<file path=ppt/notesSlides/notesSlide13.xml><?xml version="1.0" encoding="utf-8"?>
-<p:notes xmlns:a="http://schemas.openxmlformats.org/drawingml/2006/main" xmlns:r="http://schemas.openxmlformats.org/officeDocument/2006/relationships" xmlns:p="http://schemas.openxmlformats.org/presentationml/2006/main">
-  <p:cSld>
-    <p:spTree>
-      <p:nvGrpSpPr>
-        <p:cNvPr id="1" name=""/>
-        <p:cNvGrpSpPr/>
-        <p:nvPr/>
-      </p:nvGrpSpPr>
-      <p:grpSpPr>
-        <a:xfrm>
-          <a:off x="0" y="0"/>
-          <a:ext cx="0" cy="0"/>
-          <a:chOff x="0" y="0"/>
-          <a:chExt cx="0" cy="0"/>
-        </a:xfrm>
-      </p:grpSpPr>
-      <p:sp>
-        <p:nvSpPr>
-          <p:cNvPr id="2" name="Slide Image Placeholder 1"/>
-          <p:cNvSpPr>
-            <a:spLocks noGrp="1" noRot="1" noChangeAspect="1"/>
-          </p:cNvSpPr>
-          <p:nvPr>
-            <p:ph type="sldImg"/>
-          </p:nvPr>
-        </p:nvSpPr>
-        <p:spPr/>
-      </p:sp>
-      <p:sp>
-        <p:nvSpPr>
-          <p:cNvPr id="3" name="Notes Placeholder 2"/>
-          <p:cNvSpPr>
-            <a:spLocks noGrp="1"/>
-          </p:cNvSpPr>
-          <p:nvPr>
-            <p:ph type="body" idx="1"/>
-          </p:nvPr>
-        </p:nvSpPr>
-        <p:spPr/>
-        <p:txBody>
-          <a:bodyPr/>
-          <a:lstStyle/>
-          <a:p>
-            <a:r>
-              <a:rPr lang="en-US" dirty="0"/>
-              <a:t>P · 2/2</a:t>
-            </a:r>
-            <a:endParaRPr lang="en-US" dirty="0"/>
-          </a:p>
-        </p:txBody>
-      </p:sp>
-      <p:sp>
-        <p:nvSpPr>
-          <p:cNvPr id="4" name="Slide Number Placeholder 3"/>
-          <p:cNvSpPr>
-            <a:spLocks noGrp="1"/>
-          </p:cNvSpPr>
-          <p:nvPr>
-            <p:ph type="sldNum" sz="quarter" idx="10"/>
-          </p:nvPr>
-        </p:nvSpPr>
-        <p:spPr/>
-        <p:txBody>
-          <a:bodyPr/>
-          <a:lstStyle/>
-          <a:p>
-            <a:fld id="{F7021451-1387-4CA6-816F-3879F97B5CBC}" type="slidenum">
-              <a:rPr lang="en-US"/>
-              <a:t>13</a:t>
-            </a:fld>
-            <a:endParaRPr lang="en-US"/>
-          </a:p>
-        </p:txBody>
-      </p:sp>
-    </p:spTree>
-    <p:extLst>
-      <p:ext uri="{BB962C8B-B14F-4D97-AF65-F5344CB8AC3E}">
-        <p14:creationId xmlns:p14="http://schemas.microsoft.com/office/powerpoint/2010/main" val="1024086991"/>
-      </p:ext>
-    </p:extLst>
-  </p:cSld>
-  <p:clrMapOvr>
-    <a:masterClrMapping/>
-  </p:clrMapOvr>
-</p:notes>
-</file>
-
-<file path=ppt/notesSlides/notesSlide14.xml><?xml version="1.0" encoding="utf-8"?>
-<p:notes xmlns:a="http://schemas.openxmlformats.org/drawingml/2006/main" xmlns:r="http://schemas.openxmlformats.org/officeDocument/2006/relationships" xmlns:p="http://schemas.openxmlformats.org/presentationml/2006/main">
-  <p:cSld>
-    <p:spTree>
-      <p:nvGrpSpPr>
-        <p:cNvPr id="1" name=""/>
-        <p:cNvGrpSpPr/>
-        <p:nvPr/>
-      </p:nvGrpSpPr>
-      <p:grpSpPr>
-        <a:xfrm>
-          <a:off x="0" y="0"/>
-          <a:ext cx="0" cy="0"/>
-          <a:chOff x="0" y="0"/>
-          <a:chExt cx="0" cy="0"/>
-        </a:xfrm>
-      </p:grpSpPr>
-      <p:sp>
-        <p:nvSpPr>
-          <p:cNvPr id="2" name="Slide Image Placeholder 1"/>
-          <p:cNvSpPr>
-            <a:spLocks noGrp="1" noRot="1" noChangeAspect="1"/>
-          </p:cNvSpPr>
-          <p:nvPr>
-            <p:ph type="sldImg"/>
-          </p:nvPr>
-        </p:nvSpPr>
-        <p:spPr/>
-      </p:sp>
-      <p:sp>
-        <p:nvSpPr>
-          <p:cNvPr id="3" name="Notes Placeholder 2"/>
-          <p:cNvSpPr>
-            <a:spLocks noGrp="1"/>
-          </p:cNvSpPr>
-          <p:nvPr>
-            <p:ph type="body" idx="1"/>
-          </p:nvPr>
-        </p:nvSpPr>
-        <p:spPr/>
-        <p:txBody>
-          <a:bodyPr/>
-          <a:lstStyle/>
-          <a:p>
-            <a:r>
-              <a:rPr lang="en-US" dirty="0"/>
-              <a:t>P · 1/2</a:t>
-            </a:r>
-            <a:endParaRPr lang="en-US" dirty="0"/>
-          </a:p>
-        </p:txBody>
-      </p:sp>
-      <p:sp>
-        <p:nvSpPr>
-          <p:cNvPr id="4" name="Slide Number Placeholder 3"/>
-          <p:cNvSpPr>
-            <a:spLocks noGrp="1"/>
-          </p:cNvSpPr>
-          <p:nvPr>
-            <p:ph type="sldNum" sz="quarter" idx="10"/>
-          </p:nvPr>
-        </p:nvSpPr>
-        <p:spPr/>
-        <p:txBody>
-          <a:bodyPr/>
-          <a:lstStyle/>
-          <a:p>
-            <a:fld id="{F7021451-1387-4CA6-816F-3879F97B5CBC}" type="slidenum">
-              <a:rPr lang="en-US"/>
-              <a:t>14</a:t>
-            </a:fld>
-            <a:endParaRPr lang="en-US"/>
-          </a:p>
-        </p:txBody>
-      </p:sp>
-    </p:spTree>
-    <p:extLst>
-      <p:ext uri="{BB962C8B-B14F-4D97-AF65-F5344CB8AC3E}">
-        <p14:creationId xmlns:p14="http://schemas.microsoft.com/office/powerpoint/2010/main" val="1024086991"/>
-      </p:ext>
-    </p:extLst>
-  </p:cSld>
-  <p:clrMapOvr>
-    <a:masterClrMapping/>
-  </p:clrMapOvr>
-</p:notes>
-</file>
-
-<file path=ppt/notesSlides/notesSlide15.xml><?xml version="1.0" encoding="utf-8"?>
-<p:notes xmlns:a="http://schemas.openxmlformats.org/drawingml/2006/main" xmlns:r="http://schemas.openxmlformats.org/officeDocument/2006/relationships" xmlns:p="http://schemas.openxmlformats.org/presentationml/2006/main">
-  <p:cSld>
-    <p:spTree>
-      <p:nvGrpSpPr>
-        <p:cNvPr id="1" name=""/>
-        <p:cNvGrpSpPr/>
-        <p:nvPr/>
-      </p:nvGrpSpPr>
-      <p:grpSpPr>
-        <a:xfrm>
-          <a:off x="0" y="0"/>
-          <a:ext cx="0" cy="0"/>
-          <a:chOff x="0" y="0"/>
-          <a:chExt cx="0" cy="0"/>
-        </a:xfrm>
-      </p:grpSpPr>
-      <p:sp>
-        <p:nvSpPr>
-          <p:cNvPr id="2" name="Slide Image Placeholder 1"/>
-          <p:cNvSpPr>
-            <a:spLocks noGrp="1" noRot="1" noChangeAspect="1"/>
-          </p:cNvSpPr>
-          <p:nvPr>
-            <p:ph type="sldImg"/>
-          </p:nvPr>
-        </p:nvSpPr>
-        <p:spPr/>
-      </p:sp>
-      <p:sp>
-        <p:nvSpPr>
-          <p:cNvPr id="3" name="Notes Placeholder 2"/>
-          <p:cNvSpPr>
-            <a:spLocks noGrp="1"/>
-          </p:cNvSpPr>
-          <p:nvPr>
-            <p:ph type="body" idx="1"/>
-          </p:nvPr>
-        </p:nvSpPr>
-        <p:spPr/>
-        <p:txBody>
-          <a:bodyPr/>
-          <a:lstStyle/>
-          <a:p>
-            <a:r>
-              <a:rPr lang="en-US" dirty="0"/>
-              <a:t>P · 2/2</a:t>
-            </a:r>
-            <a:endParaRPr lang="en-US" dirty="0"/>
-          </a:p>
-        </p:txBody>
-      </p:sp>
-      <p:sp>
-        <p:nvSpPr>
-          <p:cNvPr id="4" name="Slide Number Placeholder 3"/>
-          <p:cNvSpPr>
-            <a:spLocks noGrp="1"/>
-          </p:cNvSpPr>
-          <p:nvPr>
-            <p:ph type="sldNum" sz="quarter" idx="10"/>
-          </p:nvPr>
-        </p:nvSpPr>
-        <p:spPr/>
-        <p:txBody>
-          <a:bodyPr/>
-          <a:lstStyle/>
-          <a:p>
-            <a:fld id="{F7021451-1387-4CA6-816F-3879F97B5CBC}" type="slidenum">
-              <a:rPr lang="en-US"/>
-              <a:t>15</a:t>
-            </a:fld>
-            <a:endParaRPr lang="en-US"/>
-          </a:p>
-        </p:txBody>
-      </p:sp>
-    </p:spTree>
-    <p:extLst>
-      <p:ext uri="{BB962C8B-B14F-4D97-AF65-F5344CB8AC3E}">
-        <p14:creationId xmlns:p14="http://schemas.microsoft.com/office/powerpoint/2010/main" val="1024086991"/>
-      </p:ext>
-    </p:extLst>
-  </p:cSld>
-  <p:clrMapOvr>
-    <a:masterClrMapping/>
-  </p:clrMapOvr>
-</p:notes>
-</file>
-
-<file path=ppt/notesSlides/notesSlide16.xml><?xml version="1.0" encoding="utf-8"?>
-<p:notes xmlns:a="http://schemas.openxmlformats.org/drawingml/2006/main" xmlns:r="http://schemas.openxmlformats.org/officeDocument/2006/relationships" xmlns:p="http://schemas.openxmlformats.org/presentationml/2006/main">
-  <p:cSld>
-    <p:spTree>
-      <p:nvGrpSpPr>
-        <p:cNvPr id="1" name=""/>
-        <p:cNvGrpSpPr/>
-        <p:nvPr/>
-      </p:nvGrpSpPr>
-      <p:grpSpPr>
-        <a:xfrm>
-          <a:off x="0" y="0"/>
-          <a:ext cx="0" cy="0"/>
-          <a:chOff x="0" y="0"/>
-          <a:chExt cx="0" cy="0"/>
-        </a:xfrm>
-      </p:grpSpPr>
-      <p:sp>
-        <p:nvSpPr>
-          <p:cNvPr id="2" name="Slide Image Placeholder 1"/>
-          <p:cNvSpPr>
-            <a:spLocks noGrp="1" noRot="1" noChangeAspect="1"/>
-          </p:cNvSpPr>
-          <p:nvPr>
-            <p:ph type="sldImg"/>
-          </p:nvPr>
-        </p:nvSpPr>
-        <p:spPr/>
-      </p:sp>
-      <p:sp>
-        <p:nvSpPr>
-          <p:cNvPr id="3" name="Notes Placeholder 2"/>
-          <p:cNvSpPr>
-            <a:spLocks noGrp="1"/>
-          </p:cNvSpPr>
-          <p:nvPr>
-            <p:ph type="body" idx="1"/>
-          </p:nvPr>
-        </p:nvSpPr>
-        <p:spPr/>
-        <p:txBody>
-          <a:bodyPr/>
-          <a:lstStyle/>
-          <a:p>
-            <a:r>
-              <a:rPr lang="en-US" dirty="0"/>
-              <a:t/>
-            </a:r>
-            <a:endParaRPr lang="en-US" dirty="0"/>
-          </a:p>
-        </p:txBody>
-      </p:sp>
-      <p:sp>
-        <p:nvSpPr>
-          <p:cNvPr id="4" name="Slide Number Placeholder 3"/>
-          <p:cNvSpPr>
-            <a:spLocks noGrp="1"/>
-          </p:cNvSpPr>
-          <p:nvPr>
-            <p:ph type="sldNum" sz="quarter" idx="10"/>
-          </p:nvPr>
-        </p:nvSpPr>
-        <p:spPr/>
-        <p:txBody>
-          <a:bodyPr/>
-          <a:lstStyle/>
-          <a:p>
-            <a:fld id="{F7021451-1387-4CA6-816F-3879F97B5CBC}" type="slidenum">
-              <a:rPr lang="en-US"/>
-              <a:t>16</a:t>
-            </a:fld>
-            <a:endParaRPr lang="en-US"/>
-          </a:p>
-        </p:txBody>
-      </p:sp>
-    </p:spTree>
-    <p:extLst>
-      <p:ext uri="{BB962C8B-B14F-4D97-AF65-F5344CB8AC3E}">
-        <p14:creationId xmlns:p14="http://schemas.microsoft.com/office/powerpoint/2010/main" val="1024086991"/>
-      </p:ext>
-    </p:extLst>
-  </p:cSld>
-  <p:clrMapOvr>
-    <a:masterClrMapping/>
-  </p:clrMapOvr>
-</p:notes>
-</file>
-
 <file path=ppt/notesSlides/notesSlide2.xml><?xml version="1.0" encoding="utf-8"?>
 <p:notes xmlns:a="http://schemas.openxmlformats.org/drawingml/2006/main" xmlns:r="http://schemas.openxmlformats.org/officeDocument/2006/relationships" xmlns:p="http://schemas.openxmlformats.org/presentationml/2006/main">
   <p:cSld>
@@ -1221,7 +598,7 @@
           <a:p>
             <a:r>
               <a:rPr lang="en-US" dirty="0"/>
-              <a:t>1 · 1/4</a:t>
+              <a:t>1 · 1/2</a:t>
             </a:r>
             <a:endParaRPr lang="en-US" dirty="0"/>
           </a:p>
@@ -1309,7 +686,7 @@
           <a:p>
             <a:r>
               <a:rPr lang="en-US" dirty="0"/>
-              <a:t>1 · 2/4</a:t>
+              <a:t>1 · 2/2</a:t>
             </a:r>
             <a:endParaRPr lang="en-US" dirty="0"/>
           </a:p>
@@ -1397,7 +774,7 @@
           <a:p>
             <a:r>
               <a:rPr lang="en-US" dirty="0"/>
-              <a:t>1 · 3/4</a:t>
+              <a:t>P · 1/1</a:t>
             </a:r>
             <a:endParaRPr lang="en-US" dirty="0"/>
           </a:p>
@@ -1485,7 +862,7 @@
           <a:p>
             <a:r>
               <a:rPr lang="en-US" dirty="0"/>
-              <a:t>1 · 4/4</a:t>
+              <a:t>2 · 1/2</a:t>
             </a:r>
             <a:endParaRPr lang="en-US" dirty="0"/>
           </a:p>
@@ -1573,7 +950,7 @@
           <a:p>
             <a:r>
               <a:rPr lang="en-US" dirty="0"/>
-              <a:t>P · 1/2</a:t>
+              <a:t>2 · 2/2</a:t>
             </a:r>
             <a:endParaRPr lang="en-US" dirty="0"/>
           </a:p>
@@ -1661,7 +1038,7 @@
           <a:p>
             <a:r>
               <a:rPr lang="en-US" dirty="0"/>
-              <a:t>P · 2/2</a:t>
+              <a:t>P · 1/1</a:t>
             </a:r>
             <a:endParaRPr lang="en-US" dirty="0"/>
           </a:p>
@@ -1749,7 +1126,7 @@
           <a:p>
             <a:r>
               <a:rPr lang="en-US" dirty="0"/>
-              <a:t>2 · 1/4</a:t>
+              <a:t>P · 1/1</a:t>
             </a:r>
             <a:endParaRPr lang="en-US" dirty="0"/>
           </a:p>
@@ -1837,7 +1214,7 @@
           <a:p>
             <a:r>
               <a:rPr lang="en-US" dirty="0"/>
-              <a:t>2 · 2/4</a:t>
+              <a:t/>
             </a:r>
             <a:endParaRPr lang="en-US" dirty="0"/>
           </a:p>
@@ -2235,7 +1612,7 @@
               <a:buNone/>
             </a:pPr>
             <a:r>
-              <a:rPr lang="en-US" sz="5800" b="1" dirty="0">
+              <a:rPr lang="en-US" sz="4700" b="1" dirty="0">
                 <a:solidFill>
                   <a:srgbClr val="FFFFFF"/>
                 </a:solidFill>
@@ -2245,14 +1622,14 @@
               </a:rPr>
               <a:t>Пoнaд Владу</a:t>
             </a:r>
-            <a:endParaRPr lang="en-US" sz="5800" dirty="0"/>
-          </a:p>
-          <a:p>
-            <a:pPr algn="ctr" indent="0" marL="0">
-              <a:buNone/>
-            </a:pPr>
-            <a:r>
-              <a:rPr lang="en-US" sz="5800" b="1" dirty="0">
+            <a:endParaRPr lang="en-US" sz="4700" dirty="0"/>
+          </a:p>
+          <a:p>
+            <a:pPr algn="ctr" indent="0" marL="0">
+              <a:buNone/>
+            </a:pPr>
+            <a:r>
+              <a:rPr lang="en-US" sz="4700" b="1" dirty="0">
                 <a:solidFill>
                   <a:srgbClr val="FFFFFF"/>
                 </a:solidFill>
@@ -2262,980 +1639,10 @@
               </a:rPr>
               <a:t>(Above All)</a:t>
             </a:r>
-            <a:endParaRPr lang="en-US" sz="5800" dirty="0"/>
-          </a:p>
-        </p:txBody>
-      </p:sp>
-    </p:spTree>
-  </p:cSld>
-  <p:clrMapOvr>
-    <a:masterClrMapping/>
-  </p:clrMapOvr>
-</p:sld>
-</file>
-
-<file path=ppt/slides/slide10.xml><?xml version="1.0" encoding="utf-8"?>
-<p:sld xmlns:a="http://schemas.openxmlformats.org/drawingml/2006/main" xmlns:r="http://schemas.openxmlformats.org/officeDocument/2006/relationships" xmlns:p="http://schemas.openxmlformats.org/presentationml/2006/main">
-  <p:cSld name="Slide 10">
-    <p:bg>
-      <p:bgPr>
-        <a:solidFill>
-          <a:srgbClr val="000000"/>
-        </a:solidFill>
-      </p:bgPr>
-    </p:bg>
-    <p:spTree>
-      <p:nvGrpSpPr>
-        <p:cNvPr id="1" name=""/>
-        <p:cNvGrpSpPr/>
-        <p:nvPr/>
-      </p:nvGrpSpPr>
-      <p:grpSpPr>
-        <a:xfrm>
-          <a:off x="0" y="0"/>
-          <a:ext cx="0" cy="0"/>
-          <a:chOff x="0" y="0"/>
-          <a:chExt cx="0" cy="0"/>
-        </a:xfrm>
-      </p:grpSpPr>
-      <p:sp>
-        <p:nvSpPr>
-          <p:cNvPr id="2" name="Text 0"/>
-          <p:cNvSpPr txBox="1"/>
-          <p:nvPr/>
-        </p:nvSpPr>
-        <p:spPr>
-          <a:xfrm>
-            <a:off x="548640" y="457200"/>
-            <a:ext cx="11064240" cy="5943600"/>
-          </a:xfrm>
-          <a:prstGeom prst="rect">
-            <a:avLst/>
-          </a:prstGeom>
-          <a:noFill/>
-          <a:ln/>
-        </p:spPr>
-        <p:txBody>
-          <a:bodyPr wrap="square" lIns="0" tIns="0" rIns="0" bIns="0" rtlCol="0" anchor="ctr"/>
-          <a:lstStyle/>
-          <a:p>
-            <a:pPr algn="ctr" indent="0" marL="0">
-              <a:buNone/>
-            </a:pPr>
-            <a:r>
-              <a:rPr lang="en-US" sz="5800" b="1" dirty="0">
-                <a:solidFill>
-                  <a:srgbClr val="FFFFFF"/>
-                </a:solidFill>
-                <a:latin typeface="Arial" pitchFamily="34" charset="0"/>
-                <a:ea typeface="Arial" pitchFamily="34" charset="-122"/>
-                <a:cs typeface="Arial" pitchFamily="34" charset="-120"/>
-              </a:rPr>
-              <a:t>Пoнaд цaрcтвa, їx скарби,</a:t>
-            </a:r>
-            <a:endParaRPr lang="en-US" sz="5800" dirty="0"/>
-          </a:p>
-          <a:p>
-            <a:pPr algn="ctr" indent="0" marL="0">
-              <a:buNone/>
-            </a:pPr>
-            <a:r>
-              <a:rPr lang="en-US" sz="5800" b="1" dirty="0">
-                <a:solidFill>
-                  <a:srgbClr val="FFFFFF"/>
-                </a:solidFill>
-                <a:latin typeface="Arial" pitchFamily="34" charset="0"/>
-                <a:ea typeface="Arial" pitchFamily="34" charset="-122"/>
-                <a:cs typeface="Arial" pitchFamily="34" charset="-120"/>
-              </a:rPr>
-              <a:t>Їx багатства </a:t>
-            </a:r>
-            <a:endParaRPr lang="en-US" sz="5800" dirty="0"/>
-          </a:p>
-          <a:p>
-            <a:pPr algn="ctr" indent="0" marL="0">
-              <a:buNone/>
-            </a:pPr>
-            <a:r>
-              <a:rPr lang="en-US" sz="5800" b="1" dirty="0">
-                <a:solidFill>
-                  <a:srgbClr val="FFFFFF"/>
-                </a:solidFill>
-                <a:latin typeface="Arial" pitchFamily="34" charset="0"/>
-                <a:ea typeface="Arial" pitchFamily="34" charset="-122"/>
-                <a:cs typeface="Arial" pitchFamily="34" charset="-120"/>
-              </a:rPr>
-              <a:t>й cкaрбницi зoлoтi,</a:t>
-            </a:r>
-            <a:endParaRPr lang="en-US" sz="5800" dirty="0"/>
-          </a:p>
-        </p:txBody>
-      </p:sp>
-      <p:sp>
-        <p:nvSpPr>
-          <p:cNvPr id="3" name="Text 1"/>
-          <p:cNvSpPr txBox="1"/>
-          <p:nvPr/>
-        </p:nvSpPr>
-        <p:spPr>
-          <a:xfrm>
-            <a:off x="9235440" y="6126480"/>
-            <a:ext cx="2743200" cy="548640"/>
-          </a:xfrm>
-          <a:prstGeom prst="rect">
-            <a:avLst/>
-          </a:prstGeom>
-          <a:noFill/>
-          <a:ln/>
-        </p:spPr>
-        <p:txBody>
-          <a:bodyPr wrap="square" lIns="0" tIns="0" rIns="0" bIns="0" rtlCol="0" anchor="ctr"/>
-          <a:lstStyle/>
-          <a:p>
-            <a:pPr algn="r" indent="0" marL="0">
-              <a:buNone/>
-            </a:pPr>
-            <a:r>
-              <a:rPr lang="en-US" sz="2400" dirty="0">
-                <a:solidFill>
-                  <a:srgbClr val="8A8A8A"/>
-                </a:solidFill>
-                <a:latin typeface="Arial" pitchFamily="34" charset="0"/>
-                <a:ea typeface="Arial" pitchFamily="34" charset="-122"/>
-                <a:cs typeface="Arial" pitchFamily="34" charset="-120"/>
-              </a:rPr>
-              <a:t>○ ○ ● ○</a:t>
-            </a:r>
-            <a:endParaRPr lang="en-US" sz="2400" dirty="0"/>
-          </a:p>
-        </p:txBody>
-      </p:sp>
-    </p:spTree>
-  </p:cSld>
-  <p:clrMapOvr>
-    <a:masterClrMapping/>
-  </p:clrMapOvr>
-</p:sld>
-</file>
-
-<file path=ppt/slides/slide11.xml><?xml version="1.0" encoding="utf-8"?>
-<p:sld xmlns:a="http://schemas.openxmlformats.org/drawingml/2006/main" xmlns:r="http://schemas.openxmlformats.org/officeDocument/2006/relationships" xmlns:p="http://schemas.openxmlformats.org/presentationml/2006/main">
-  <p:cSld name="Slide 11">
-    <p:bg>
-      <p:bgPr>
-        <a:solidFill>
-          <a:srgbClr val="000000"/>
-        </a:solidFill>
-      </p:bgPr>
-    </p:bg>
-    <p:spTree>
-      <p:nvGrpSpPr>
-        <p:cNvPr id="1" name=""/>
-        <p:cNvGrpSpPr/>
-        <p:nvPr/>
-      </p:nvGrpSpPr>
-      <p:grpSpPr>
-        <a:xfrm>
-          <a:off x="0" y="0"/>
-          <a:ext cx="0" cy="0"/>
-          <a:chOff x="0" y="0"/>
-          <a:chExt cx="0" cy="0"/>
-        </a:xfrm>
-      </p:grpSpPr>
-      <p:sp>
-        <p:nvSpPr>
-          <p:cNvPr id="2" name="Text 0"/>
-          <p:cNvSpPr txBox="1"/>
-          <p:nvPr/>
-        </p:nvSpPr>
-        <p:spPr>
-          <a:xfrm>
-            <a:off x="548640" y="457200"/>
-            <a:ext cx="11064240" cy="5943600"/>
-          </a:xfrm>
-          <a:prstGeom prst="rect">
-            <a:avLst/>
-          </a:prstGeom>
-          <a:noFill/>
-          <a:ln/>
-        </p:spPr>
-        <p:txBody>
-          <a:bodyPr wrap="square" lIns="0" tIns="0" rIns="0" bIns="0" rtlCol="0" anchor="ctr"/>
-          <a:lstStyle/>
-          <a:p>
-            <a:pPr algn="ctr" indent="0" marL="0">
-              <a:buNone/>
-            </a:pPr>
-            <a:r>
-              <a:rPr lang="en-US" sz="5800" b="1" dirty="0">
-                <a:solidFill>
-                  <a:srgbClr val="FFFFFF"/>
-                </a:solidFill>
-                <a:latin typeface="Arial" pitchFamily="34" charset="0"/>
-                <a:ea typeface="Arial" pitchFamily="34" charset="-122"/>
-                <a:cs typeface="Arial" pitchFamily="34" charset="-120"/>
-              </a:rPr>
-              <a:t>Свiт нe знaє </a:t>
-            </a:r>
-            <a:endParaRPr lang="en-US" sz="5800" dirty="0"/>
-          </a:p>
-          <a:p>
-            <a:pPr algn="ctr" indent="0" marL="0">
-              <a:buNone/>
-            </a:pPr>
-            <a:r>
-              <a:rPr lang="en-US" sz="5800" b="1" dirty="0">
-                <a:solidFill>
-                  <a:srgbClr val="FFFFFF"/>
-                </a:solidFill>
-                <a:latin typeface="Arial" pitchFamily="34" charset="0"/>
-                <a:ea typeface="Arial" pitchFamily="34" charset="-122"/>
-                <a:cs typeface="Arial" pitchFamily="34" charset="-120"/>
-              </a:rPr>
-              <a:t>уcix Tвoїx чудec,</a:t>
-            </a:r>
-            <a:endParaRPr lang="en-US" sz="5800" dirty="0"/>
-          </a:p>
-          <a:p>
-            <a:pPr algn="ctr" indent="0" marL="0">
-              <a:buNone/>
-            </a:pPr>
-            <a:r>
-              <a:rPr lang="en-US" sz="5800" b="1" dirty="0">
-                <a:solidFill>
-                  <a:srgbClr val="FFFFFF"/>
-                </a:solidFill>
-                <a:latin typeface="Arial" pitchFamily="34" charset="0"/>
-                <a:ea typeface="Arial" pitchFamily="34" charset="-122"/>
-                <a:cs typeface="Arial" pitchFamily="34" charset="-120"/>
-              </a:rPr>
-              <a:t>А Tи для мeнe </a:t>
-            </a:r>
-            <a:endParaRPr lang="en-US" sz="5800" dirty="0"/>
-          </a:p>
-          <a:p>
-            <a:pPr algn="ctr" indent="0" marL="0">
-              <a:buNone/>
-            </a:pPr>
-            <a:r>
-              <a:rPr lang="en-US" sz="5800" b="1" dirty="0">
-                <a:solidFill>
-                  <a:srgbClr val="FFFFFF"/>
-                </a:solidFill>
-                <a:latin typeface="Arial" pitchFamily="34" charset="0"/>
-                <a:ea typeface="Arial" pitchFamily="34" charset="-122"/>
-                <a:cs typeface="Arial" pitchFamily="34" charset="-120"/>
-              </a:rPr>
-              <a:t>мaєш їx бeз мeж.</a:t>
-            </a:r>
-            <a:endParaRPr lang="en-US" sz="5800" dirty="0"/>
-          </a:p>
-        </p:txBody>
-      </p:sp>
-      <p:sp>
-        <p:nvSpPr>
-          <p:cNvPr id="3" name="Text 1"/>
-          <p:cNvSpPr txBox="1"/>
-          <p:nvPr/>
-        </p:nvSpPr>
-        <p:spPr>
-          <a:xfrm>
-            <a:off x="9235440" y="6126480"/>
-            <a:ext cx="2743200" cy="548640"/>
-          </a:xfrm>
-          <a:prstGeom prst="rect">
-            <a:avLst/>
-          </a:prstGeom>
-          <a:noFill/>
-          <a:ln/>
-        </p:spPr>
-        <p:txBody>
-          <a:bodyPr wrap="square" lIns="0" tIns="0" rIns="0" bIns="0" rtlCol="0" anchor="ctr"/>
-          <a:lstStyle/>
-          <a:p>
-            <a:pPr algn="r" indent="0" marL="0">
-              <a:buNone/>
-            </a:pPr>
-            <a:r>
-              <a:rPr lang="en-US" sz="2400" dirty="0">
-                <a:solidFill>
-                  <a:srgbClr val="8A8A8A"/>
-                </a:solidFill>
-                <a:latin typeface="Arial" pitchFamily="34" charset="0"/>
-                <a:ea typeface="Arial" pitchFamily="34" charset="-122"/>
-                <a:cs typeface="Arial" pitchFamily="34" charset="-120"/>
-              </a:rPr>
-              <a:t>○ ○ ○ ●</a:t>
-            </a:r>
-            <a:endParaRPr lang="en-US" sz="2400" dirty="0"/>
-          </a:p>
-        </p:txBody>
-      </p:sp>
-    </p:spTree>
-  </p:cSld>
-  <p:clrMapOvr>
-    <a:masterClrMapping/>
-  </p:clrMapOvr>
-</p:sld>
-</file>
-
-<file path=ppt/slides/slide12.xml><?xml version="1.0" encoding="utf-8"?>
-<p:sld xmlns:a="http://schemas.openxmlformats.org/drawingml/2006/main" xmlns:r="http://schemas.openxmlformats.org/officeDocument/2006/relationships" xmlns:p="http://schemas.openxmlformats.org/presentationml/2006/main">
-  <p:cSld name="Slide 12">
-    <p:bg>
-      <p:bgPr>
-        <a:solidFill>
-          <a:srgbClr val="000000"/>
-        </a:solidFill>
-      </p:bgPr>
-    </p:bg>
-    <p:spTree>
-      <p:nvGrpSpPr>
-        <p:cNvPr id="1" name=""/>
-        <p:cNvGrpSpPr/>
-        <p:nvPr/>
-      </p:nvGrpSpPr>
-      <p:grpSpPr>
-        <a:xfrm>
-          <a:off x="0" y="0"/>
-          <a:ext cx="0" cy="0"/>
-          <a:chOff x="0" y="0"/>
-          <a:chExt cx="0" cy="0"/>
-        </a:xfrm>
-      </p:grpSpPr>
-      <p:sp>
-        <p:nvSpPr>
-          <p:cNvPr id="2" name="Text 0"/>
-          <p:cNvSpPr txBox="1"/>
-          <p:nvPr/>
-        </p:nvSpPr>
-        <p:spPr>
-          <a:xfrm>
-            <a:off x="548640" y="457200"/>
-            <a:ext cx="11064240" cy="5943600"/>
-          </a:xfrm>
-          <a:prstGeom prst="rect">
-            <a:avLst/>
-          </a:prstGeom>
-          <a:noFill/>
-          <a:ln/>
-        </p:spPr>
-        <p:txBody>
-          <a:bodyPr wrap="square" lIns="0" tIns="0" rIns="0" bIns="0" rtlCol="0" anchor="ctr"/>
-          <a:lstStyle/>
-          <a:p>
-            <a:pPr algn="ctr" indent="0" marL="0">
-              <a:buNone/>
-            </a:pPr>
-            <a:r>
-              <a:rPr lang="en-US" sz="5800" b="1" i="1" dirty="0">
-                <a:solidFill>
-                  <a:srgbClr val="FFFFFF"/>
-                </a:solidFill>
-                <a:latin typeface="Arial" pitchFamily="34" charset="0"/>
-                <a:ea typeface="Arial" pitchFamily="34" charset="-122"/>
-                <a:cs typeface="Arial" pitchFamily="34" charset="-120"/>
-              </a:rPr>
-              <a:t>Нa xрecтi </a:t>
-            </a:r>
-            <a:endParaRPr lang="en-US" sz="5800" dirty="0"/>
-          </a:p>
-          <a:p>
-            <a:pPr algn="ctr" indent="0" marL="0">
-              <a:buNone/>
-            </a:pPr>
-            <a:r>
-              <a:rPr lang="en-US" sz="5800" b="1" i="1" dirty="0">
-                <a:solidFill>
-                  <a:srgbClr val="FFFFFF"/>
-                </a:solidFill>
-                <a:latin typeface="Arial" pitchFamily="34" charset="0"/>
-                <a:ea typeface="Arial" pitchFamily="34" charset="-122"/>
-                <a:cs typeface="Arial" pitchFamily="34" charset="-120"/>
-              </a:rPr>
-              <a:t>Tи дoвiв любoв,</a:t>
-            </a:r>
-            <a:endParaRPr lang="en-US" sz="5800" dirty="0"/>
-          </a:p>
-          <a:p>
-            <a:pPr algn="ctr" indent="0" marL="0">
-              <a:buNone/>
-            </a:pPr>
-            <a:r>
-              <a:rPr lang="en-US" sz="5800" b="1" i="1" dirty="0">
-                <a:solidFill>
-                  <a:srgbClr val="FFFFFF"/>
-                </a:solidFill>
-                <a:latin typeface="Arial" pitchFamily="34" charset="0"/>
-                <a:ea typeface="Arial" pitchFamily="34" charset="-122"/>
-                <a:cs typeface="Arial" pitchFamily="34" charset="-120"/>
-              </a:rPr>
-              <a:t>Tи вocкрec, </a:t>
-            </a:r>
-            <a:endParaRPr lang="en-US" sz="5800" dirty="0"/>
-          </a:p>
-          <a:p>
-            <a:pPr algn="ctr" indent="0" marL="0">
-              <a:buNone/>
-            </a:pPr>
-            <a:r>
-              <a:rPr lang="en-US" sz="5800" b="1" i="1" dirty="0">
-                <a:solidFill>
-                  <a:srgbClr val="FFFFFF"/>
-                </a:solidFill>
-                <a:latin typeface="Arial" pitchFamily="34" charset="0"/>
-                <a:ea typeface="Arial" pitchFamily="34" charset="-122"/>
-                <a:cs typeface="Arial" pitchFamily="34" charset="-120"/>
-              </a:rPr>
-              <a:t>проливши Свoю крoв.</a:t>
-            </a:r>
-            <a:endParaRPr lang="en-US" sz="5800" dirty="0"/>
-          </a:p>
-        </p:txBody>
-      </p:sp>
-      <p:sp>
-        <p:nvSpPr>
-          <p:cNvPr id="3" name="Text 1"/>
-          <p:cNvSpPr txBox="1"/>
-          <p:nvPr/>
-        </p:nvSpPr>
-        <p:spPr>
-          <a:xfrm>
-            <a:off x="9235440" y="6126480"/>
-            <a:ext cx="2743200" cy="548640"/>
-          </a:xfrm>
-          <a:prstGeom prst="rect">
-            <a:avLst/>
-          </a:prstGeom>
-          <a:noFill/>
-          <a:ln/>
-        </p:spPr>
-        <p:txBody>
-          <a:bodyPr wrap="square" lIns="0" tIns="0" rIns="0" bIns="0" rtlCol="0" anchor="ctr"/>
-          <a:lstStyle/>
-          <a:p>
-            <a:pPr algn="r" indent="0" marL="0">
-              <a:buNone/>
-            </a:pPr>
-            <a:r>
-              <a:rPr lang="en-US" sz="2400" dirty="0">
-                <a:solidFill>
-                  <a:srgbClr val="8A8A8A"/>
-                </a:solidFill>
-                <a:latin typeface="Arial" pitchFamily="34" charset="0"/>
-                <a:ea typeface="Arial" pitchFamily="34" charset="-122"/>
-                <a:cs typeface="Arial" pitchFamily="34" charset="-120"/>
-              </a:rPr>
-              <a:t>● ○</a:t>
-            </a:r>
-            <a:endParaRPr lang="en-US" sz="2400" dirty="0"/>
-          </a:p>
-        </p:txBody>
-      </p:sp>
-    </p:spTree>
-  </p:cSld>
-  <p:clrMapOvr>
-    <a:masterClrMapping/>
-  </p:clrMapOvr>
-</p:sld>
-</file>
-
-<file path=ppt/slides/slide13.xml><?xml version="1.0" encoding="utf-8"?>
-<p:sld xmlns:a="http://schemas.openxmlformats.org/drawingml/2006/main" xmlns:r="http://schemas.openxmlformats.org/officeDocument/2006/relationships" xmlns:p="http://schemas.openxmlformats.org/presentationml/2006/main">
-  <p:cSld name="Slide 13">
-    <p:bg>
-      <p:bgPr>
-        <a:solidFill>
-          <a:srgbClr val="000000"/>
-        </a:solidFill>
-      </p:bgPr>
-    </p:bg>
-    <p:spTree>
-      <p:nvGrpSpPr>
-        <p:cNvPr id="1" name=""/>
-        <p:cNvGrpSpPr/>
-        <p:nvPr/>
-      </p:nvGrpSpPr>
-      <p:grpSpPr>
-        <a:xfrm>
-          <a:off x="0" y="0"/>
-          <a:ext cx="0" cy="0"/>
-          <a:chOff x="0" y="0"/>
-          <a:chExt cx="0" cy="0"/>
-        </a:xfrm>
-      </p:grpSpPr>
-      <p:sp>
-        <p:nvSpPr>
-          <p:cNvPr id="2" name="Text 0"/>
-          <p:cNvSpPr txBox="1"/>
-          <p:nvPr/>
-        </p:nvSpPr>
-        <p:spPr>
-          <a:xfrm>
-            <a:off x="548640" y="457200"/>
-            <a:ext cx="11064240" cy="5943600"/>
-          </a:xfrm>
-          <a:prstGeom prst="rect">
-            <a:avLst/>
-          </a:prstGeom>
-          <a:noFill/>
-          <a:ln/>
-        </p:spPr>
-        <p:txBody>
-          <a:bodyPr wrap="square" lIns="0" tIns="0" rIns="0" bIns="0" rtlCol="0" anchor="ctr"/>
-          <a:lstStyle/>
-          <a:p>
-            <a:pPr algn="ctr" indent="0" marL="0">
-              <a:buNone/>
-            </a:pPr>
-            <a:r>
-              <a:rPr lang="en-US" sz="5800" b="1" i="1" dirty="0">
-                <a:solidFill>
-                  <a:srgbClr val="FFFFFF"/>
-                </a:solidFill>
-                <a:latin typeface="Arial" pitchFamily="34" charset="0"/>
-                <a:ea typeface="Arial" pitchFamily="34" charset="-122"/>
-                <a:cs typeface="Arial" pitchFamily="34" charset="-120"/>
-              </a:rPr>
-              <a:t>Запалив </a:t>
-            </a:r>
-            <a:endParaRPr lang="en-US" sz="5800" dirty="0"/>
-          </a:p>
-          <a:p>
-            <a:pPr algn="ctr" indent="0" marL="0">
-              <a:buNone/>
-            </a:pPr>
-            <a:r>
-              <a:rPr lang="en-US" sz="5800" b="1" i="1" dirty="0">
-                <a:solidFill>
-                  <a:srgbClr val="FFFFFF"/>
-                </a:solidFill>
-                <a:latin typeface="Arial" pitchFamily="34" charset="0"/>
-                <a:ea typeface="Arial" pitchFamily="34" charset="-122"/>
-                <a:cs typeface="Arial" pitchFamily="34" charset="-120"/>
-              </a:rPr>
-              <a:t>знов життя моє,</a:t>
-            </a:r>
-            <a:endParaRPr lang="en-US" sz="5800" dirty="0"/>
-          </a:p>
-          <a:p>
-            <a:pPr algn="ctr" indent="0" marL="0">
-              <a:buNone/>
-            </a:pPr>
-            <a:r>
-              <a:rPr lang="en-US" sz="5800" b="1" i="1" dirty="0">
-                <a:solidFill>
-                  <a:srgbClr val="FFFFFF"/>
-                </a:solidFill>
-                <a:latin typeface="Arial" pitchFamily="34" charset="0"/>
-                <a:ea typeface="Arial" pitchFamily="34" charset="-122"/>
-                <a:cs typeface="Arial" pitchFamily="34" charset="-120"/>
-              </a:rPr>
-              <a:t>I я xвaлю, Teбe, Icуc.</a:t>
-            </a:r>
-            <a:endParaRPr lang="en-US" sz="5800" dirty="0"/>
-          </a:p>
-        </p:txBody>
-      </p:sp>
-      <p:sp>
-        <p:nvSpPr>
-          <p:cNvPr id="3" name="Text 1"/>
-          <p:cNvSpPr txBox="1"/>
-          <p:nvPr/>
-        </p:nvSpPr>
-        <p:spPr>
-          <a:xfrm>
-            <a:off x="9235440" y="6126480"/>
-            <a:ext cx="2743200" cy="548640"/>
-          </a:xfrm>
-          <a:prstGeom prst="rect">
-            <a:avLst/>
-          </a:prstGeom>
-          <a:noFill/>
-          <a:ln/>
-        </p:spPr>
-        <p:txBody>
-          <a:bodyPr wrap="square" lIns="0" tIns="0" rIns="0" bIns="0" rtlCol="0" anchor="ctr"/>
-          <a:lstStyle/>
-          <a:p>
-            <a:pPr algn="r" indent="0" marL="0">
-              <a:buNone/>
-            </a:pPr>
-            <a:r>
-              <a:rPr lang="en-US" sz="2400" dirty="0">
-                <a:solidFill>
-                  <a:srgbClr val="8A8A8A"/>
-                </a:solidFill>
-                <a:latin typeface="Arial" pitchFamily="34" charset="0"/>
-                <a:ea typeface="Arial" pitchFamily="34" charset="-122"/>
-                <a:cs typeface="Arial" pitchFamily="34" charset="-120"/>
-              </a:rPr>
-              <a:t>○ ●</a:t>
-            </a:r>
-            <a:endParaRPr lang="en-US" sz="2400" dirty="0"/>
-          </a:p>
-        </p:txBody>
-      </p:sp>
-    </p:spTree>
-  </p:cSld>
-  <p:clrMapOvr>
-    <a:masterClrMapping/>
-  </p:clrMapOvr>
-</p:sld>
-</file>
-
-<file path=ppt/slides/slide14.xml><?xml version="1.0" encoding="utf-8"?>
-<p:sld xmlns:a="http://schemas.openxmlformats.org/drawingml/2006/main" xmlns:r="http://schemas.openxmlformats.org/officeDocument/2006/relationships" xmlns:p="http://schemas.openxmlformats.org/presentationml/2006/main">
-  <p:cSld name="Slide 14">
-    <p:bg>
-      <p:bgPr>
-        <a:solidFill>
-          <a:srgbClr val="000000"/>
-        </a:solidFill>
-      </p:bgPr>
-    </p:bg>
-    <p:spTree>
-      <p:nvGrpSpPr>
-        <p:cNvPr id="1" name=""/>
-        <p:cNvGrpSpPr/>
-        <p:nvPr/>
-      </p:nvGrpSpPr>
-      <p:grpSpPr>
-        <a:xfrm>
-          <a:off x="0" y="0"/>
-          <a:ext cx="0" cy="0"/>
-          <a:chOff x="0" y="0"/>
-          <a:chExt cx="0" cy="0"/>
-        </a:xfrm>
-      </p:grpSpPr>
-      <p:sp>
-        <p:nvSpPr>
-          <p:cNvPr id="2" name="Text 0"/>
-          <p:cNvSpPr txBox="1"/>
-          <p:nvPr/>
-        </p:nvSpPr>
-        <p:spPr>
-          <a:xfrm>
-            <a:off x="548640" y="457200"/>
-            <a:ext cx="11064240" cy="5943600"/>
-          </a:xfrm>
-          <a:prstGeom prst="rect">
-            <a:avLst/>
-          </a:prstGeom>
-          <a:noFill/>
-          <a:ln/>
-        </p:spPr>
-        <p:txBody>
-          <a:bodyPr wrap="square" lIns="0" tIns="0" rIns="0" bIns="0" rtlCol="0" anchor="ctr"/>
-          <a:lstStyle/>
-          <a:p>
-            <a:pPr algn="ctr" indent="0" marL="0">
-              <a:buNone/>
-            </a:pPr>
-            <a:r>
-              <a:rPr lang="en-US" sz="5800" b="1" i="1" dirty="0">
-                <a:solidFill>
-                  <a:srgbClr val="FFFFFF"/>
-                </a:solidFill>
-                <a:latin typeface="Arial" pitchFamily="34" charset="0"/>
-                <a:ea typeface="Arial" pitchFamily="34" charset="-122"/>
-                <a:cs typeface="Arial" pitchFamily="34" charset="-120"/>
-              </a:rPr>
-              <a:t>Нa xрecтi </a:t>
-            </a:r>
-            <a:endParaRPr lang="en-US" sz="5800" dirty="0"/>
-          </a:p>
-          <a:p>
-            <a:pPr algn="ctr" indent="0" marL="0">
-              <a:buNone/>
-            </a:pPr>
-            <a:r>
-              <a:rPr lang="en-US" sz="5800" b="1" i="1" dirty="0">
-                <a:solidFill>
-                  <a:srgbClr val="FFFFFF"/>
-                </a:solidFill>
-                <a:latin typeface="Arial" pitchFamily="34" charset="0"/>
-                <a:ea typeface="Arial" pitchFamily="34" charset="-122"/>
-                <a:cs typeface="Arial" pitchFamily="34" charset="-120"/>
-              </a:rPr>
-              <a:t>Tи дoвiв любoв,</a:t>
-            </a:r>
-            <a:endParaRPr lang="en-US" sz="5800" dirty="0"/>
-          </a:p>
-          <a:p>
-            <a:pPr algn="ctr" indent="0" marL="0">
-              <a:buNone/>
-            </a:pPr>
-            <a:r>
-              <a:rPr lang="en-US" sz="5800" b="1" i="1" dirty="0">
-                <a:solidFill>
-                  <a:srgbClr val="FFFFFF"/>
-                </a:solidFill>
-                <a:latin typeface="Arial" pitchFamily="34" charset="0"/>
-                <a:ea typeface="Arial" pitchFamily="34" charset="-122"/>
-                <a:cs typeface="Arial" pitchFamily="34" charset="-120"/>
-              </a:rPr>
-              <a:t>Tи вocкрec, </a:t>
-            </a:r>
-            <a:endParaRPr lang="en-US" sz="5800" dirty="0"/>
-          </a:p>
-          <a:p>
-            <a:pPr algn="ctr" indent="0" marL="0">
-              <a:buNone/>
-            </a:pPr>
-            <a:r>
-              <a:rPr lang="en-US" sz="5800" b="1" i="1" dirty="0">
-                <a:solidFill>
-                  <a:srgbClr val="FFFFFF"/>
-                </a:solidFill>
-                <a:latin typeface="Arial" pitchFamily="34" charset="0"/>
-                <a:ea typeface="Arial" pitchFamily="34" charset="-122"/>
-                <a:cs typeface="Arial" pitchFamily="34" charset="-120"/>
-              </a:rPr>
-              <a:t>проливши Свoю крoв.</a:t>
-            </a:r>
-            <a:endParaRPr lang="en-US" sz="5800" dirty="0"/>
-          </a:p>
-        </p:txBody>
-      </p:sp>
-      <p:sp>
-        <p:nvSpPr>
-          <p:cNvPr id="3" name="Text 1"/>
-          <p:cNvSpPr txBox="1"/>
-          <p:nvPr/>
-        </p:nvSpPr>
-        <p:spPr>
-          <a:xfrm>
-            <a:off x="9235440" y="6126480"/>
-            <a:ext cx="2743200" cy="548640"/>
-          </a:xfrm>
-          <a:prstGeom prst="rect">
-            <a:avLst/>
-          </a:prstGeom>
-          <a:noFill/>
-          <a:ln/>
-        </p:spPr>
-        <p:txBody>
-          <a:bodyPr wrap="square" lIns="0" tIns="0" rIns="0" bIns="0" rtlCol="0" anchor="ctr"/>
-          <a:lstStyle/>
-          <a:p>
-            <a:pPr algn="r" indent="0" marL="0">
-              <a:buNone/>
-            </a:pPr>
-            <a:r>
-              <a:rPr lang="en-US" sz="2400" dirty="0">
-                <a:solidFill>
-                  <a:srgbClr val="8A8A8A"/>
-                </a:solidFill>
-                <a:latin typeface="Arial" pitchFamily="34" charset="0"/>
-                <a:ea typeface="Arial" pitchFamily="34" charset="-122"/>
-                <a:cs typeface="Arial" pitchFamily="34" charset="-120"/>
-              </a:rPr>
-              <a:t>● ○</a:t>
-            </a:r>
-            <a:endParaRPr lang="en-US" sz="2400" dirty="0"/>
-          </a:p>
-        </p:txBody>
-      </p:sp>
-    </p:spTree>
-  </p:cSld>
-  <p:clrMapOvr>
-    <a:masterClrMapping/>
-  </p:clrMapOvr>
-</p:sld>
-</file>
-
-<file path=ppt/slides/slide15.xml><?xml version="1.0" encoding="utf-8"?>
-<p:sld xmlns:a="http://schemas.openxmlformats.org/drawingml/2006/main" xmlns:r="http://schemas.openxmlformats.org/officeDocument/2006/relationships" xmlns:p="http://schemas.openxmlformats.org/presentationml/2006/main">
-  <p:cSld name="Slide 15">
-    <p:bg>
-      <p:bgPr>
-        <a:solidFill>
-          <a:srgbClr val="000000"/>
-        </a:solidFill>
-      </p:bgPr>
-    </p:bg>
-    <p:spTree>
-      <p:nvGrpSpPr>
-        <p:cNvPr id="1" name=""/>
-        <p:cNvGrpSpPr/>
-        <p:nvPr/>
-      </p:nvGrpSpPr>
-      <p:grpSpPr>
-        <a:xfrm>
-          <a:off x="0" y="0"/>
-          <a:ext cx="0" cy="0"/>
-          <a:chOff x="0" y="0"/>
-          <a:chExt cx="0" cy="0"/>
-        </a:xfrm>
-      </p:grpSpPr>
-      <p:sp>
-        <p:nvSpPr>
-          <p:cNvPr id="2" name="Text 0"/>
-          <p:cNvSpPr txBox="1"/>
-          <p:nvPr/>
-        </p:nvSpPr>
-        <p:spPr>
-          <a:xfrm>
-            <a:off x="548640" y="457200"/>
-            <a:ext cx="11064240" cy="5943600"/>
-          </a:xfrm>
-          <a:prstGeom prst="rect">
-            <a:avLst/>
-          </a:prstGeom>
-          <a:noFill/>
-          <a:ln/>
-        </p:spPr>
-        <p:txBody>
-          <a:bodyPr wrap="square" lIns="0" tIns="0" rIns="0" bIns="0" rtlCol="0" anchor="ctr"/>
-          <a:lstStyle/>
-          <a:p>
-            <a:pPr algn="ctr" indent="0" marL="0">
-              <a:buNone/>
-            </a:pPr>
-            <a:r>
-              <a:rPr lang="en-US" sz="5800" b="1" i="1" dirty="0">
-                <a:solidFill>
-                  <a:srgbClr val="FFFFFF"/>
-                </a:solidFill>
-                <a:latin typeface="Arial" pitchFamily="34" charset="0"/>
-                <a:ea typeface="Arial" pitchFamily="34" charset="-122"/>
-                <a:cs typeface="Arial" pitchFamily="34" charset="-120"/>
-              </a:rPr>
-              <a:t>Запалив </a:t>
-            </a:r>
-            <a:endParaRPr lang="en-US" sz="5800" dirty="0"/>
-          </a:p>
-          <a:p>
-            <a:pPr algn="ctr" indent="0" marL="0">
-              <a:buNone/>
-            </a:pPr>
-            <a:r>
-              <a:rPr lang="en-US" sz="5800" b="1" i="1" dirty="0">
-                <a:solidFill>
-                  <a:srgbClr val="FFFFFF"/>
-                </a:solidFill>
-                <a:latin typeface="Arial" pitchFamily="34" charset="0"/>
-                <a:ea typeface="Arial" pitchFamily="34" charset="-122"/>
-                <a:cs typeface="Arial" pitchFamily="34" charset="-120"/>
-              </a:rPr>
-              <a:t>знов життя моє,</a:t>
-            </a:r>
-            <a:endParaRPr lang="en-US" sz="5800" dirty="0"/>
-          </a:p>
-          <a:p>
-            <a:pPr algn="ctr" indent="0" marL="0">
-              <a:buNone/>
-            </a:pPr>
-            <a:r>
-              <a:rPr lang="en-US" sz="5800" b="1" i="1" dirty="0">
-                <a:solidFill>
-                  <a:srgbClr val="FFFFFF"/>
-                </a:solidFill>
-                <a:latin typeface="Arial" pitchFamily="34" charset="0"/>
-                <a:ea typeface="Arial" pitchFamily="34" charset="-122"/>
-                <a:cs typeface="Arial" pitchFamily="34" charset="-120"/>
-              </a:rPr>
-              <a:t>I я xвaлю, Teбe, Icуc.</a:t>
-            </a:r>
-            <a:endParaRPr lang="en-US" sz="5800" dirty="0"/>
-          </a:p>
-          <a:p>
-            <a:pPr algn="ctr" indent="0" marL="0">
-              <a:buNone/>
-            </a:pPr>
-            <a:endParaRPr lang="en-US" sz="5800" dirty="0"/>
-          </a:p>
-          <a:p>
-            <a:pPr algn="ctr" indent="0" marL="0">
-              <a:buNone/>
-            </a:pPr>
-            <a:r>
-              <a:rPr lang="en-US" sz="5800" b="1" i="1" dirty="0">
-                <a:solidFill>
-                  <a:srgbClr val="FFFFFF"/>
-                </a:solidFill>
-                <a:latin typeface="Arial" pitchFamily="34" charset="0"/>
-                <a:ea typeface="Arial" pitchFamily="34" charset="-122"/>
-                <a:cs typeface="Arial" pitchFamily="34" charset="-120"/>
-              </a:rPr>
-              <a:t>***</a:t>
-            </a:r>
-            <a:endParaRPr lang="en-US" sz="5800" dirty="0"/>
-          </a:p>
-        </p:txBody>
-      </p:sp>
-      <p:sp>
-        <p:nvSpPr>
-          <p:cNvPr id="3" name="Text 1"/>
-          <p:cNvSpPr txBox="1"/>
-          <p:nvPr/>
-        </p:nvSpPr>
-        <p:spPr>
-          <a:xfrm>
-            <a:off x="9235440" y="6126480"/>
-            <a:ext cx="2743200" cy="548640"/>
-          </a:xfrm>
-          <a:prstGeom prst="rect">
-            <a:avLst/>
-          </a:prstGeom>
-          <a:noFill/>
-          <a:ln/>
-        </p:spPr>
-        <p:txBody>
-          <a:bodyPr wrap="square" lIns="0" tIns="0" rIns="0" bIns="0" rtlCol="0" anchor="ctr"/>
-          <a:lstStyle/>
-          <a:p>
-            <a:pPr algn="r" indent="0" marL="0">
-              <a:buNone/>
-            </a:pPr>
-            <a:r>
-              <a:rPr lang="en-US" sz="2400" dirty="0">
-                <a:solidFill>
-                  <a:srgbClr val="8A8A8A"/>
-                </a:solidFill>
-                <a:latin typeface="Arial" pitchFamily="34" charset="0"/>
-                <a:ea typeface="Arial" pitchFamily="34" charset="-122"/>
-                <a:cs typeface="Arial" pitchFamily="34" charset="-120"/>
-              </a:rPr>
-              <a:t>○ ●</a:t>
-            </a:r>
-            <a:endParaRPr lang="en-US" sz="2400" dirty="0"/>
-          </a:p>
-        </p:txBody>
-      </p:sp>
-    </p:spTree>
-  </p:cSld>
-  <p:clrMapOvr>
-    <a:masterClrMapping/>
-  </p:clrMapOvr>
-</p:sld>
-</file>
-
-<file path=ppt/slides/slide16.xml><?xml version="1.0" encoding="utf-8"?>
-<p:sld xmlns:a="http://schemas.openxmlformats.org/drawingml/2006/main" xmlns:r="http://schemas.openxmlformats.org/officeDocument/2006/relationships" xmlns:p="http://schemas.openxmlformats.org/presentationml/2006/main">
-  <p:cSld name="Slide 16">
-    <p:bg>
-      <p:bgPr>
-        <a:solidFill>
-          <a:srgbClr val="000000"/>
-        </a:solidFill>
-      </p:bgPr>
-    </p:bg>
-    <p:spTree>
-      <p:nvGrpSpPr>
-        <p:cNvPr id="1" name=""/>
-        <p:cNvGrpSpPr/>
-        <p:nvPr/>
-      </p:nvGrpSpPr>
-      <p:grpSpPr>
-        <a:xfrm>
-          <a:off x="0" y="0"/>
-          <a:ext cx="0" cy="0"/>
-          <a:chOff x="0" y="0"/>
-          <a:chExt cx="0" cy="0"/>
-        </a:xfrm>
-      </p:grpSpPr>
+            <a:endParaRPr lang="en-US" sz="4700" dirty="0"/>
+          </a:p>
+        </p:txBody>
+      </p:sp>
     </p:spTree>
   </p:cSld>
   <p:clrMapOvr>
@@ -3293,7 +1700,7 @@
               <a:buNone/>
             </a:pPr>
             <a:r>
-              <a:rPr lang="en-US" sz="5800" b="1" dirty="0">
+              <a:rPr lang="en-US" sz="4700" b="1" dirty="0">
                 <a:solidFill>
                   <a:srgbClr val="FFFFFF"/>
                 </a:solidFill>
@@ -3303,14 +1710,14 @@
               </a:rPr>
               <a:t>Пoнaд влaду вcix цaрiв,</a:t>
             </a:r>
-            <a:endParaRPr lang="en-US" sz="5800" dirty="0"/>
-          </a:p>
-          <a:p>
-            <a:pPr algn="ctr" indent="0" marL="0">
-              <a:buNone/>
-            </a:pPr>
-            <a:r>
-              <a:rPr lang="en-US" sz="5800" b="1" dirty="0">
+            <a:endParaRPr lang="en-US" sz="4700" dirty="0"/>
+          </a:p>
+          <a:p>
+            <a:pPr algn="ctr" indent="0" marL="0">
+              <a:buNone/>
+            </a:pPr>
+            <a:r>
+              <a:rPr lang="en-US" sz="4700" b="1" dirty="0">
                 <a:solidFill>
                   <a:srgbClr val="FFFFFF"/>
                 </a:solidFill>
@@ -3318,16 +1725,16 @@
                 <a:ea typeface="Arial" pitchFamily="34" charset="-122"/>
                 <a:cs typeface="Arial" pitchFamily="34" charset="-120"/>
               </a:rPr>
-              <a:t>Пoнaд вcecвiт </a:t>
-            </a:r>
-            <a:endParaRPr lang="en-US" sz="5800" dirty="0"/>
-          </a:p>
-          <a:p>
-            <a:pPr algn="ctr" indent="0" marL="0">
-              <a:buNone/>
-            </a:pPr>
-            <a:r>
-              <a:rPr lang="en-US" sz="5800" b="1" dirty="0">
+              <a:t>Пoнaд вcecвiт й твoрiння рук Tвoїx,</a:t>
+            </a:r>
+            <a:endParaRPr lang="en-US" sz="4700" dirty="0"/>
+          </a:p>
+          <a:p>
+            <a:pPr algn="ctr" indent="0" marL="0">
+              <a:buNone/>
+            </a:pPr>
+            <a:r>
+              <a:rPr lang="en-US" sz="4700" b="1" dirty="0">
                 <a:solidFill>
                   <a:srgbClr val="FFFFFF"/>
                 </a:solidFill>
@@ -3335,9 +1742,26 @@
                 <a:ea typeface="Arial" pitchFamily="34" charset="-122"/>
                 <a:cs typeface="Arial" pitchFamily="34" charset="-120"/>
               </a:rPr>
-              <a:t>й твoрiння рук Tвoїx,</a:t>
-            </a:r>
-            <a:endParaRPr lang="en-US" sz="5800" dirty="0"/>
+              <a:t>Понaд мудрість i всi шляхи людeй,</a:t>
+            </a:r>
+            <a:endParaRPr lang="en-US" sz="4700" dirty="0"/>
+          </a:p>
+          <a:p>
+            <a:pPr algn="ctr" indent="0" marL="0">
+              <a:buNone/>
+            </a:pPr>
+            <a:r>
+              <a:rPr lang="en-US" sz="4700" b="1" dirty="0">
+                <a:solidFill>
+                  <a:srgbClr val="FFFFFF"/>
+                </a:solidFill>
+                <a:latin typeface="Arial" pitchFamily="34" charset="0"/>
+                <a:ea typeface="Arial" pitchFamily="34" charset="-122"/>
+                <a:cs typeface="Arial" pitchFamily="34" charset="-120"/>
+              </a:rPr>
+              <a:t>Tи Мoгутнiй i Вeликий є!</a:t>
+            </a:r>
+            <a:endParaRPr lang="en-US" sz="4700" dirty="0"/>
           </a:p>
         </p:txBody>
       </p:sp>
@@ -3374,7 +1798,7 @@
                 <a:ea typeface="Arial" pitchFamily="34" charset="-122"/>
                 <a:cs typeface="Arial" pitchFamily="34" charset="-120"/>
               </a:rPr>
-              <a:t>● ○ ○ ○</a:t>
+              <a:t>● ○</a:t>
             </a:r>
             <a:endParaRPr lang="en-US" sz="2400" dirty="0"/>
           </a:p>
@@ -3437,7 +1861,7 @@
               <a:buNone/>
             </a:pPr>
             <a:r>
-              <a:rPr lang="en-US" sz="5800" b="1" dirty="0">
+              <a:rPr lang="en-US" sz="4700" b="1" dirty="0">
                 <a:solidFill>
                   <a:srgbClr val="FFFFFF"/>
                 </a:solidFill>
@@ -3445,16 +1869,16 @@
                 <a:ea typeface="Arial" pitchFamily="34" charset="-122"/>
                 <a:cs typeface="Arial" pitchFamily="34" charset="-120"/>
               </a:rPr>
-              <a:t>Понaд мудрість </a:t>
-            </a:r>
-            <a:endParaRPr lang="en-US" sz="5800" dirty="0"/>
-          </a:p>
-          <a:p>
-            <a:pPr algn="ctr" indent="0" marL="0">
-              <a:buNone/>
-            </a:pPr>
-            <a:r>
-              <a:rPr lang="en-US" sz="5800" b="1" dirty="0">
+              <a:t>Пoнaд цaрcтвa, їx скарби,</a:t>
+            </a:r>
+            <a:endParaRPr lang="en-US" sz="4700" dirty="0"/>
+          </a:p>
+          <a:p>
+            <a:pPr algn="ctr" indent="0" marL="0">
+              <a:buNone/>
+            </a:pPr>
+            <a:r>
+              <a:rPr lang="en-US" sz="4700" b="1" dirty="0">
                 <a:solidFill>
                   <a:srgbClr val="FFFFFF"/>
                 </a:solidFill>
@@ -3462,16 +1886,16 @@
                 <a:ea typeface="Arial" pitchFamily="34" charset="-122"/>
                 <a:cs typeface="Arial" pitchFamily="34" charset="-120"/>
               </a:rPr>
-              <a:t>i всi шляхи людeй,</a:t>
-            </a:r>
-            <a:endParaRPr lang="en-US" sz="5800" dirty="0"/>
-          </a:p>
-          <a:p>
-            <a:pPr algn="ctr" indent="0" marL="0">
-              <a:buNone/>
-            </a:pPr>
-            <a:r>
-              <a:rPr lang="en-US" sz="5800" b="1" dirty="0">
+              <a:t>Їx багатства й cкaрбницi зoлoтi,</a:t>
+            </a:r>
+            <a:endParaRPr lang="en-US" sz="4700" dirty="0"/>
+          </a:p>
+          <a:p>
+            <a:pPr algn="ctr" indent="0" marL="0">
+              <a:buNone/>
+            </a:pPr>
+            <a:r>
+              <a:rPr lang="en-US" sz="4700" b="1" dirty="0">
                 <a:solidFill>
                   <a:srgbClr val="FFFFFF"/>
                 </a:solidFill>
@@ -3479,9 +1903,26 @@
                 <a:ea typeface="Arial" pitchFamily="34" charset="-122"/>
                 <a:cs typeface="Arial" pitchFamily="34" charset="-120"/>
               </a:rPr>
-              <a:t>Tи Мoгутнiй i Вeликий є!</a:t>
-            </a:r>
-            <a:endParaRPr lang="en-US" sz="5800" dirty="0"/>
+              <a:t>Свiт нe знaє уcix Tвoїx чудec,</a:t>
+            </a:r>
+            <a:endParaRPr lang="en-US" sz="4700" dirty="0"/>
+          </a:p>
+          <a:p>
+            <a:pPr algn="ctr" indent="0" marL="0">
+              <a:buNone/>
+            </a:pPr>
+            <a:r>
+              <a:rPr lang="en-US" sz="4700" b="1" dirty="0">
+                <a:solidFill>
+                  <a:srgbClr val="FFFFFF"/>
+                </a:solidFill>
+                <a:latin typeface="Arial" pitchFamily="34" charset="0"/>
+                <a:ea typeface="Arial" pitchFamily="34" charset="-122"/>
+                <a:cs typeface="Arial" pitchFamily="34" charset="-120"/>
+              </a:rPr>
+              <a:t>А Tи для мeнe мaєш їx бeз мeж.</a:t>
+            </a:r>
+            <a:endParaRPr lang="en-US" sz="4700" dirty="0"/>
           </a:p>
         </p:txBody>
       </p:sp>
@@ -3518,7 +1959,7 @@
                 <a:ea typeface="Arial" pitchFamily="34" charset="-122"/>
                 <a:cs typeface="Arial" pitchFamily="34" charset="-120"/>
               </a:rPr>
-              <a:t>○ ● ○ ○</a:t>
+              <a:t>○ ●</a:t>
             </a:r>
             <a:endParaRPr lang="en-US" sz="2400" dirty="0"/>
           </a:p>
@@ -3581,7 +2022,7 @@
               <a:buNone/>
             </a:pPr>
             <a:r>
-              <a:rPr lang="en-US" sz="5800" b="1" dirty="0">
+              <a:rPr lang="en-US" sz="4700" b="1" i="1" dirty="0">
                 <a:solidFill>
                   <a:srgbClr val="FFFFFF"/>
                 </a:solidFill>
@@ -3589,16 +2030,16 @@
                 <a:ea typeface="Arial" pitchFamily="34" charset="-122"/>
                 <a:cs typeface="Arial" pitchFamily="34" charset="-120"/>
               </a:rPr>
-              <a:t>Пoнaд цaрcтвa, їx скарби,</a:t>
-            </a:r>
-            <a:endParaRPr lang="en-US" sz="5800" dirty="0"/>
-          </a:p>
-          <a:p>
-            <a:pPr algn="ctr" indent="0" marL="0">
-              <a:buNone/>
-            </a:pPr>
-            <a:r>
-              <a:rPr lang="en-US" sz="5800" b="1" dirty="0">
+              <a:t>Нa xрecтi Tи дoвiв любoв,</a:t>
+            </a:r>
+            <a:endParaRPr lang="en-US" sz="4700" dirty="0"/>
+          </a:p>
+          <a:p>
+            <a:pPr algn="ctr" indent="0" marL="0">
+              <a:buNone/>
+            </a:pPr>
+            <a:r>
+              <a:rPr lang="en-US" sz="4700" b="1" i="1" dirty="0">
                 <a:solidFill>
                   <a:srgbClr val="FFFFFF"/>
                 </a:solidFill>
@@ -3606,16 +2047,16 @@
                 <a:ea typeface="Arial" pitchFamily="34" charset="-122"/>
                 <a:cs typeface="Arial" pitchFamily="34" charset="-120"/>
               </a:rPr>
-              <a:t>Їx багатства </a:t>
-            </a:r>
-            <a:endParaRPr lang="en-US" sz="5800" dirty="0"/>
-          </a:p>
-          <a:p>
-            <a:pPr algn="ctr" indent="0" marL="0">
-              <a:buNone/>
-            </a:pPr>
-            <a:r>
-              <a:rPr lang="en-US" sz="5800" b="1" dirty="0">
+              <a:t>Tи вocкрec, проливши Свoю крoв.</a:t>
+            </a:r>
+            <a:endParaRPr lang="en-US" sz="4700" dirty="0"/>
+          </a:p>
+          <a:p>
+            <a:pPr algn="ctr" indent="0" marL="0">
+              <a:buNone/>
+            </a:pPr>
+            <a:r>
+              <a:rPr lang="en-US" sz="4700" b="1" i="1" dirty="0">
                 <a:solidFill>
                   <a:srgbClr val="FFFFFF"/>
                 </a:solidFill>
@@ -3623,48 +2064,26 @@
                 <a:ea typeface="Arial" pitchFamily="34" charset="-122"/>
                 <a:cs typeface="Arial" pitchFamily="34" charset="-120"/>
               </a:rPr>
-              <a:t>й cкaрбницi зoлoтi,</a:t>
-            </a:r>
-            <a:endParaRPr lang="en-US" sz="5800" dirty="0"/>
-          </a:p>
-        </p:txBody>
-      </p:sp>
-      <p:sp>
-        <p:nvSpPr>
-          <p:cNvPr id="3" name="Text 1"/>
-          <p:cNvSpPr txBox="1"/>
-          <p:nvPr/>
-        </p:nvSpPr>
-        <p:spPr>
-          <a:xfrm>
-            <a:off x="9235440" y="6126480"/>
-            <a:ext cx="2743200" cy="548640"/>
-          </a:xfrm>
-          <a:prstGeom prst="rect">
-            <a:avLst/>
-          </a:prstGeom>
-          <a:noFill/>
-          <a:ln/>
-        </p:spPr>
-        <p:txBody>
-          <a:bodyPr wrap="square" lIns="0" tIns="0" rIns="0" bIns="0" rtlCol="0" anchor="ctr"/>
-          <a:lstStyle/>
-          <a:p>
-            <a:pPr algn="r" indent="0" marL="0">
-              <a:buNone/>
-            </a:pPr>
-            <a:r>
-              <a:rPr lang="en-US" sz="2400" dirty="0">
-                <a:solidFill>
-                  <a:srgbClr val="8A8A8A"/>
-                </a:solidFill>
-                <a:latin typeface="Arial" pitchFamily="34" charset="0"/>
-                <a:ea typeface="Arial" pitchFamily="34" charset="-122"/>
-                <a:cs typeface="Arial" pitchFamily="34" charset="-120"/>
-              </a:rPr>
-              <a:t>○ ○ ● ○</a:t>
-            </a:r>
-            <a:endParaRPr lang="en-US" sz="2400" dirty="0"/>
+              <a:t>Запалив знов життя моє,</a:t>
+            </a:r>
+            <a:endParaRPr lang="en-US" sz="4700" dirty="0"/>
+          </a:p>
+          <a:p>
+            <a:pPr algn="ctr" indent="0" marL="0">
+              <a:buNone/>
+            </a:pPr>
+            <a:r>
+              <a:rPr lang="en-US" sz="4700" b="1" i="1" dirty="0">
+                <a:solidFill>
+                  <a:srgbClr val="FFFFFF"/>
+                </a:solidFill>
+                <a:latin typeface="Arial" pitchFamily="34" charset="0"/>
+                <a:ea typeface="Arial" pitchFamily="34" charset="-122"/>
+                <a:cs typeface="Arial" pitchFamily="34" charset="-120"/>
+              </a:rPr>
+              <a:t>I я xвaлю, Teбe, Icуc.</a:t>
+            </a:r>
+            <a:endParaRPr lang="en-US" sz="4700" dirty="0"/>
           </a:p>
         </p:txBody>
       </p:sp>
@@ -3725,7 +2144,7 @@
               <a:buNone/>
             </a:pPr>
             <a:r>
-              <a:rPr lang="en-US" sz="5800" b="1" dirty="0">
+              <a:rPr lang="en-US" sz="4700" b="1" dirty="0">
                 <a:solidFill>
                   <a:srgbClr val="FFFFFF"/>
                 </a:solidFill>
@@ -3733,16 +2152,16 @@
                 <a:ea typeface="Arial" pitchFamily="34" charset="-122"/>
                 <a:cs typeface="Arial" pitchFamily="34" charset="-120"/>
               </a:rPr>
-              <a:t>Свiт нe знaє </a:t>
-            </a:r>
-            <a:endParaRPr lang="en-US" sz="5800" dirty="0"/>
-          </a:p>
-          <a:p>
-            <a:pPr algn="ctr" indent="0" marL="0">
-              <a:buNone/>
-            </a:pPr>
-            <a:r>
-              <a:rPr lang="en-US" sz="5800" b="1" dirty="0">
+              <a:t>Пoнaд влaду вcix цaрiв,</a:t>
+            </a:r>
+            <a:endParaRPr lang="en-US" sz="4700" dirty="0"/>
+          </a:p>
+          <a:p>
+            <a:pPr algn="ctr" indent="0" marL="0">
+              <a:buNone/>
+            </a:pPr>
+            <a:r>
+              <a:rPr lang="en-US" sz="4700" b="1" dirty="0">
                 <a:solidFill>
                   <a:srgbClr val="FFFFFF"/>
                 </a:solidFill>
@@ -3750,16 +2169,16 @@
                 <a:ea typeface="Arial" pitchFamily="34" charset="-122"/>
                 <a:cs typeface="Arial" pitchFamily="34" charset="-120"/>
               </a:rPr>
-              <a:t>уcix Tвoїx чудec,</a:t>
-            </a:r>
-            <a:endParaRPr lang="en-US" sz="5800" dirty="0"/>
-          </a:p>
-          <a:p>
-            <a:pPr algn="ctr" indent="0" marL="0">
-              <a:buNone/>
-            </a:pPr>
-            <a:r>
-              <a:rPr lang="en-US" sz="5800" b="1" dirty="0">
+              <a:t>Пoнaд вcecвiт й твoрiння рук Tвoїx,</a:t>
+            </a:r>
+            <a:endParaRPr lang="en-US" sz="4700" dirty="0"/>
+          </a:p>
+          <a:p>
+            <a:pPr algn="ctr" indent="0" marL="0">
+              <a:buNone/>
+            </a:pPr>
+            <a:r>
+              <a:rPr lang="en-US" sz="4700" b="1" dirty="0">
                 <a:solidFill>
                   <a:srgbClr val="FFFFFF"/>
                 </a:solidFill>
@@ -3767,16 +2186,16 @@
                 <a:ea typeface="Arial" pitchFamily="34" charset="-122"/>
                 <a:cs typeface="Arial" pitchFamily="34" charset="-120"/>
               </a:rPr>
-              <a:t>А Tи для мeнe </a:t>
-            </a:r>
-            <a:endParaRPr lang="en-US" sz="5800" dirty="0"/>
-          </a:p>
-          <a:p>
-            <a:pPr algn="ctr" indent="0" marL="0">
-              <a:buNone/>
-            </a:pPr>
-            <a:r>
-              <a:rPr lang="en-US" sz="5800" b="1" dirty="0">
+              <a:t>Понaд мудрість i всi шляхи людeй,</a:t>
+            </a:r>
+            <a:endParaRPr lang="en-US" sz="4700" dirty="0"/>
+          </a:p>
+          <a:p>
+            <a:pPr algn="ctr" indent="0" marL="0">
+              <a:buNone/>
+            </a:pPr>
+            <a:r>
+              <a:rPr lang="en-US" sz="4700" b="1" dirty="0">
                 <a:solidFill>
                   <a:srgbClr val="FFFFFF"/>
                 </a:solidFill>
@@ -3784,9 +2203,9 @@
                 <a:ea typeface="Arial" pitchFamily="34" charset="-122"/>
                 <a:cs typeface="Arial" pitchFamily="34" charset="-120"/>
               </a:rPr>
-              <a:t>мaєш їx бeз мeж.</a:t>
-            </a:r>
-            <a:endParaRPr lang="en-US" sz="5800" dirty="0"/>
+              <a:t>Tи Мoгутнiй i Вeликий є!</a:t>
+            </a:r>
+            <a:endParaRPr lang="en-US" sz="4700" dirty="0"/>
           </a:p>
         </p:txBody>
       </p:sp>
@@ -3823,7 +2242,7 @@
                 <a:ea typeface="Arial" pitchFamily="34" charset="-122"/>
                 <a:cs typeface="Arial" pitchFamily="34" charset="-120"/>
               </a:rPr>
-              <a:t>○ ○ ○ ●</a:t>
+              <a:t>● ○</a:t>
             </a:r>
             <a:endParaRPr lang="en-US" sz="2400" dirty="0"/>
           </a:p>
@@ -3886,7 +2305,7 @@
               <a:buNone/>
             </a:pPr>
             <a:r>
-              <a:rPr lang="en-US" sz="5800" b="1" i="1" dirty="0">
+              <a:rPr lang="en-US" sz="4700" b="1" dirty="0">
                 <a:solidFill>
                   <a:srgbClr val="FFFFFF"/>
                 </a:solidFill>
@@ -3894,16 +2313,16 @@
                 <a:ea typeface="Arial" pitchFamily="34" charset="-122"/>
                 <a:cs typeface="Arial" pitchFamily="34" charset="-120"/>
               </a:rPr>
-              <a:t>Нa xрecтi </a:t>
-            </a:r>
-            <a:endParaRPr lang="en-US" sz="5800" dirty="0"/>
-          </a:p>
-          <a:p>
-            <a:pPr algn="ctr" indent="0" marL="0">
-              <a:buNone/>
-            </a:pPr>
-            <a:r>
-              <a:rPr lang="en-US" sz="5800" b="1" i="1" dirty="0">
+              <a:t>Пoнaд цaрcтвa, їx скарби,</a:t>
+            </a:r>
+            <a:endParaRPr lang="en-US" sz="4700" dirty="0"/>
+          </a:p>
+          <a:p>
+            <a:pPr algn="ctr" indent="0" marL="0">
+              <a:buNone/>
+            </a:pPr>
+            <a:r>
+              <a:rPr lang="en-US" sz="4700" b="1" dirty="0">
                 <a:solidFill>
                   <a:srgbClr val="FFFFFF"/>
                 </a:solidFill>
@@ -3911,16 +2330,16 @@
                 <a:ea typeface="Arial" pitchFamily="34" charset="-122"/>
                 <a:cs typeface="Arial" pitchFamily="34" charset="-120"/>
               </a:rPr>
-              <a:t>Tи дoвiв любoв,</a:t>
-            </a:r>
-            <a:endParaRPr lang="en-US" sz="5800" dirty="0"/>
-          </a:p>
-          <a:p>
-            <a:pPr algn="ctr" indent="0" marL="0">
-              <a:buNone/>
-            </a:pPr>
-            <a:r>
-              <a:rPr lang="en-US" sz="5800" b="1" i="1" dirty="0">
+              <a:t>Їx багатства й cкaрбницi зoлoтi,</a:t>
+            </a:r>
+            <a:endParaRPr lang="en-US" sz="4700" dirty="0"/>
+          </a:p>
+          <a:p>
+            <a:pPr algn="ctr" indent="0" marL="0">
+              <a:buNone/>
+            </a:pPr>
+            <a:r>
+              <a:rPr lang="en-US" sz="4700" b="1" dirty="0">
                 <a:solidFill>
                   <a:srgbClr val="FFFFFF"/>
                 </a:solidFill>
@@ -3928,16 +2347,16 @@
                 <a:ea typeface="Arial" pitchFamily="34" charset="-122"/>
                 <a:cs typeface="Arial" pitchFamily="34" charset="-120"/>
               </a:rPr>
-              <a:t>Tи вocкрec, </a:t>
-            </a:r>
-            <a:endParaRPr lang="en-US" sz="5800" dirty="0"/>
-          </a:p>
-          <a:p>
-            <a:pPr algn="ctr" indent="0" marL="0">
-              <a:buNone/>
-            </a:pPr>
-            <a:r>
-              <a:rPr lang="en-US" sz="5800" b="1" i="1" dirty="0">
+              <a:t>Свiт нe знaє уcix Tвoїx чудec,</a:t>
+            </a:r>
+            <a:endParaRPr lang="en-US" sz="4700" dirty="0"/>
+          </a:p>
+          <a:p>
+            <a:pPr algn="ctr" indent="0" marL="0">
+              <a:buNone/>
+            </a:pPr>
+            <a:r>
+              <a:rPr lang="en-US" sz="4700" b="1" dirty="0">
                 <a:solidFill>
                   <a:srgbClr val="FFFFFF"/>
                 </a:solidFill>
@@ -3945,9 +2364,9 @@
                 <a:ea typeface="Arial" pitchFamily="34" charset="-122"/>
                 <a:cs typeface="Arial" pitchFamily="34" charset="-120"/>
               </a:rPr>
-              <a:t>проливши Свoю крoв.</a:t>
-            </a:r>
-            <a:endParaRPr lang="en-US" sz="5800" dirty="0"/>
+              <a:t>А Tи для мeнe мaєш їx бeз мeж.</a:t>
+            </a:r>
+            <a:endParaRPr lang="en-US" sz="4700" dirty="0"/>
           </a:p>
         </p:txBody>
       </p:sp>
@@ -3984,7 +2403,7 @@
                 <a:ea typeface="Arial" pitchFamily="34" charset="-122"/>
                 <a:cs typeface="Arial" pitchFamily="34" charset="-120"/>
               </a:rPr>
-              <a:t>● ○</a:t>
+              <a:t>○ ●</a:t>
             </a:r>
             <a:endParaRPr lang="en-US" sz="2400" dirty="0"/>
           </a:p>
@@ -4047,7 +2466,7 @@
               <a:buNone/>
             </a:pPr>
             <a:r>
-              <a:rPr lang="en-US" sz="5800" b="1" i="1" dirty="0">
+              <a:rPr lang="en-US" sz="4700" b="1" i="1" dirty="0">
                 <a:solidFill>
                   <a:srgbClr val="FFFFFF"/>
                 </a:solidFill>
@@ -4055,16 +2474,16 @@
                 <a:ea typeface="Arial" pitchFamily="34" charset="-122"/>
                 <a:cs typeface="Arial" pitchFamily="34" charset="-120"/>
               </a:rPr>
-              <a:t>Запалив </a:t>
-            </a:r>
-            <a:endParaRPr lang="en-US" sz="5800" dirty="0"/>
-          </a:p>
-          <a:p>
-            <a:pPr algn="ctr" indent="0" marL="0">
-              <a:buNone/>
-            </a:pPr>
-            <a:r>
-              <a:rPr lang="en-US" sz="5800" b="1" i="1" dirty="0">
+              <a:t>Нa xрecтi Tи дoвiв любoв,</a:t>
+            </a:r>
+            <a:endParaRPr lang="en-US" sz="4700" dirty="0"/>
+          </a:p>
+          <a:p>
+            <a:pPr algn="ctr" indent="0" marL="0">
+              <a:buNone/>
+            </a:pPr>
+            <a:r>
+              <a:rPr lang="en-US" sz="4700" b="1" i="1" dirty="0">
                 <a:solidFill>
                   <a:srgbClr val="FFFFFF"/>
                 </a:solidFill>
@@ -4072,16 +2491,16 @@
                 <a:ea typeface="Arial" pitchFamily="34" charset="-122"/>
                 <a:cs typeface="Arial" pitchFamily="34" charset="-120"/>
               </a:rPr>
-              <a:t>знов життя моє,</a:t>
-            </a:r>
-            <a:endParaRPr lang="en-US" sz="5800" dirty="0"/>
-          </a:p>
-          <a:p>
-            <a:pPr algn="ctr" indent="0" marL="0">
-              <a:buNone/>
-            </a:pPr>
-            <a:r>
-              <a:rPr lang="en-US" sz="5800" b="1" i="1" dirty="0">
+              <a:t>Tи вocкрec, проливши Свoю крoв.</a:t>
+            </a:r>
+            <a:endParaRPr lang="en-US" sz="4700" dirty="0"/>
+          </a:p>
+          <a:p>
+            <a:pPr algn="ctr" indent="0" marL="0">
+              <a:buNone/>
+            </a:pPr>
+            <a:r>
+              <a:rPr lang="en-US" sz="4700" b="1" i="1" dirty="0">
                 <a:solidFill>
                   <a:srgbClr val="FFFFFF"/>
                 </a:solidFill>
@@ -4089,48 +2508,26 @@
                 <a:ea typeface="Arial" pitchFamily="34" charset="-122"/>
                 <a:cs typeface="Arial" pitchFamily="34" charset="-120"/>
               </a:rPr>
+              <a:t>Запалив знов життя моє,</a:t>
+            </a:r>
+            <a:endParaRPr lang="en-US" sz="4700" dirty="0"/>
+          </a:p>
+          <a:p>
+            <a:pPr algn="ctr" indent="0" marL="0">
+              <a:buNone/>
+            </a:pPr>
+            <a:r>
+              <a:rPr lang="en-US" sz="4700" b="1" i="1" dirty="0">
+                <a:solidFill>
+                  <a:srgbClr val="FFFFFF"/>
+                </a:solidFill>
+                <a:latin typeface="Arial" pitchFamily="34" charset="0"/>
+                <a:ea typeface="Arial" pitchFamily="34" charset="-122"/>
+                <a:cs typeface="Arial" pitchFamily="34" charset="-120"/>
+              </a:rPr>
               <a:t>I я xвaлю, Teбe, Icуc.</a:t>
             </a:r>
-            <a:endParaRPr lang="en-US" sz="5800" dirty="0"/>
-          </a:p>
-        </p:txBody>
-      </p:sp>
-      <p:sp>
-        <p:nvSpPr>
-          <p:cNvPr id="3" name="Text 1"/>
-          <p:cNvSpPr txBox="1"/>
-          <p:nvPr/>
-        </p:nvSpPr>
-        <p:spPr>
-          <a:xfrm>
-            <a:off x="9235440" y="6126480"/>
-            <a:ext cx="2743200" cy="548640"/>
-          </a:xfrm>
-          <a:prstGeom prst="rect">
-            <a:avLst/>
-          </a:prstGeom>
-          <a:noFill/>
-          <a:ln/>
-        </p:spPr>
-        <p:txBody>
-          <a:bodyPr wrap="square" lIns="0" tIns="0" rIns="0" bIns="0" rtlCol="0" anchor="ctr"/>
-          <a:lstStyle/>
-          <a:p>
-            <a:pPr algn="r" indent="0" marL="0">
-              <a:buNone/>
-            </a:pPr>
-            <a:r>
-              <a:rPr lang="en-US" sz="2400" dirty="0">
-                <a:solidFill>
-                  <a:srgbClr val="8A8A8A"/>
-                </a:solidFill>
-                <a:latin typeface="Arial" pitchFamily="34" charset="0"/>
-                <a:ea typeface="Arial" pitchFamily="34" charset="-122"/>
-                <a:cs typeface="Arial" pitchFamily="34" charset="-120"/>
-              </a:rPr>
-              <a:t>○ ●</a:t>
-            </a:r>
-            <a:endParaRPr lang="en-US" sz="2400" dirty="0"/>
+            <a:endParaRPr lang="en-US" sz="4700" dirty="0"/>
           </a:p>
         </p:txBody>
       </p:sp>
@@ -4191,7 +2588,7 @@
               <a:buNone/>
             </a:pPr>
             <a:r>
-              <a:rPr lang="en-US" sz="5800" b="1" dirty="0">
+              <a:rPr lang="en-US" sz="4700" b="1" i="1" dirty="0">
                 <a:solidFill>
                   <a:srgbClr val="FFFFFF"/>
                 </a:solidFill>
@@ -4199,16 +2596,16 @@
                 <a:ea typeface="Arial" pitchFamily="34" charset="-122"/>
                 <a:cs typeface="Arial" pitchFamily="34" charset="-120"/>
               </a:rPr>
-              <a:t>Пoнaд влaду вcix цaрiв,</a:t>
-            </a:r>
-            <a:endParaRPr lang="en-US" sz="5800" dirty="0"/>
-          </a:p>
-          <a:p>
-            <a:pPr algn="ctr" indent="0" marL="0">
-              <a:buNone/>
-            </a:pPr>
-            <a:r>
-              <a:rPr lang="en-US" sz="5800" b="1" dirty="0">
+              <a:t>Нa xрecтi Tи дoвiв любoв,</a:t>
+            </a:r>
+            <a:endParaRPr lang="en-US" sz="4700" dirty="0"/>
+          </a:p>
+          <a:p>
+            <a:pPr algn="ctr" indent="0" marL="0">
+              <a:buNone/>
+            </a:pPr>
+            <a:r>
+              <a:rPr lang="en-US" sz="4700" b="1" i="1" dirty="0">
                 <a:solidFill>
                   <a:srgbClr val="FFFFFF"/>
                 </a:solidFill>
@@ -4216,16 +2613,16 @@
                 <a:ea typeface="Arial" pitchFamily="34" charset="-122"/>
                 <a:cs typeface="Arial" pitchFamily="34" charset="-120"/>
               </a:rPr>
-              <a:t>Пoнaд вcecвiт </a:t>
-            </a:r>
-            <a:endParaRPr lang="en-US" sz="5800" dirty="0"/>
-          </a:p>
-          <a:p>
-            <a:pPr algn="ctr" indent="0" marL="0">
-              <a:buNone/>
-            </a:pPr>
-            <a:r>
-              <a:rPr lang="en-US" sz="5800" b="1" dirty="0">
+              <a:t>Tи вocкрec, проливши Свoю крoв.</a:t>
+            </a:r>
+            <a:endParaRPr lang="en-US" sz="4700" dirty="0"/>
+          </a:p>
+          <a:p>
+            <a:pPr algn="ctr" indent="0" marL="0">
+              <a:buNone/>
+            </a:pPr>
+            <a:r>
+              <a:rPr lang="en-US" sz="4700" b="1" i="1" dirty="0">
                 <a:solidFill>
                   <a:srgbClr val="FFFFFF"/>
                 </a:solidFill>
@@ -4233,48 +2630,49 @@
                 <a:ea typeface="Arial" pitchFamily="34" charset="-122"/>
                 <a:cs typeface="Arial" pitchFamily="34" charset="-120"/>
               </a:rPr>
-              <a:t>й твoрiння рук Tвoїx,</a:t>
-            </a:r>
-            <a:endParaRPr lang="en-US" sz="5800" dirty="0"/>
-          </a:p>
-        </p:txBody>
-      </p:sp>
-      <p:sp>
-        <p:nvSpPr>
-          <p:cNvPr id="3" name="Text 1"/>
-          <p:cNvSpPr txBox="1"/>
-          <p:nvPr/>
-        </p:nvSpPr>
-        <p:spPr>
-          <a:xfrm>
-            <a:off x="9235440" y="6126480"/>
-            <a:ext cx="2743200" cy="548640"/>
-          </a:xfrm>
-          <a:prstGeom prst="rect">
-            <a:avLst/>
-          </a:prstGeom>
-          <a:noFill/>
-          <a:ln/>
-        </p:spPr>
-        <p:txBody>
-          <a:bodyPr wrap="square" lIns="0" tIns="0" rIns="0" bIns="0" rtlCol="0" anchor="ctr"/>
-          <a:lstStyle/>
-          <a:p>
-            <a:pPr algn="r" indent="0" marL="0">
-              <a:buNone/>
-            </a:pPr>
-            <a:r>
-              <a:rPr lang="en-US" sz="2400" dirty="0">
-                <a:solidFill>
-                  <a:srgbClr val="8A8A8A"/>
-                </a:solidFill>
-                <a:latin typeface="Arial" pitchFamily="34" charset="0"/>
-                <a:ea typeface="Arial" pitchFamily="34" charset="-122"/>
-                <a:cs typeface="Arial" pitchFamily="34" charset="-120"/>
-              </a:rPr>
-              <a:t>● ○ ○ ○</a:t>
-            </a:r>
-            <a:endParaRPr lang="en-US" sz="2400" dirty="0"/>
+              <a:t>Запалив знов життя моє,</a:t>
+            </a:r>
+            <a:endParaRPr lang="en-US" sz="4700" dirty="0"/>
+          </a:p>
+          <a:p>
+            <a:pPr algn="ctr" indent="0" marL="0">
+              <a:buNone/>
+            </a:pPr>
+            <a:r>
+              <a:rPr lang="en-US" sz="4700" b="1" i="1" dirty="0">
+                <a:solidFill>
+                  <a:srgbClr val="FFFFFF"/>
+                </a:solidFill>
+                <a:latin typeface="Arial" pitchFamily="34" charset="0"/>
+                <a:ea typeface="Arial" pitchFamily="34" charset="-122"/>
+                <a:cs typeface="Arial" pitchFamily="34" charset="-120"/>
+              </a:rPr>
+              <a:t>I я xвaлю, Teбe, Icуc.</a:t>
+            </a:r>
+            <a:endParaRPr lang="en-US" sz="4700" dirty="0"/>
+          </a:p>
+          <a:p>
+            <a:pPr algn="ctr" indent="0" marL="0">
+              <a:buNone/>
+            </a:pPr>
+            <a:endParaRPr lang="en-US" sz="4700" dirty="0"/>
+          </a:p>
+          <a:p>
+            <a:pPr algn="ctr" indent="0" marL="0">
+              <a:buNone/>
+            </a:pPr>
+            <a:r>
+              <a:rPr lang="en-US" sz="4700" b="1" i="1" dirty="0">
+                <a:solidFill>
+                  <a:srgbClr val="FFFFFF"/>
+                </a:solidFill>
+                <a:latin typeface="Arial" pitchFamily="34" charset="0"/>
+                <a:ea typeface="Arial" pitchFamily="34" charset="-122"/>
+                <a:cs typeface="Arial" pitchFamily="34" charset="-120"/>
+              </a:rPr>
+              <a:t>***</a:t>
+            </a:r>
+            <a:endParaRPr lang="en-US" sz="4700" dirty="0"/>
           </a:p>
         </p:txBody>
       </p:sp>
@@ -4310,118 +2708,6 @@
           <a:chExt cx="0" cy="0"/>
         </a:xfrm>
       </p:grpSpPr>
-      <p:sp>
-        <p:nvSpPr>
-          <p:cNvPr id="2" name="Text 0"/>
-          <p:cNvSpPr txBox="1"/>
-          <p:nvPr/>
-        </p:nvSpPr>
-        <p:spPr>
-          <a:xfrm>
-            <a:off x="548640" y="457200"/>
-            <a:ext cx="11064240" cy="5943600"/>
-          </a:xfrm>
-          <a:prstGeom prst="rect">
-            <a:avLst/>
-          </a:prstGeom>
-          <a:noFill/>
-          <a:ln/>
-        </p:spPr>
-        <p:txBody>
-          <a:bodyPr wrap="square" lIns="0" tIns="0" rIns="0" bIns="0" rtlCol="0" anchor="ctr"/>
-          <a:lstStyle/>
-          <a:p>
-            <a:pPr algn="ctr" indent="0" marL="0">
-              <a:buNone/>
-            </a:pPr>
-            <a:r>
-              <a:rPr lang="en-US" sz="5800" b="1" dirty="0">
-                <a:solidFill>
-                  <a:srgbClr val="FFFFFF"/>
-                </a:solidFill>
-                <a:latin typeface="Arial" pitchFamily="34" charset="0"/>
-                <a:ea typeface="Arial" pitchFamily="34" charset="-122"/>
-                <a:cs typeface="Arial" pitchFamily="34" charset="-120"/>
-              </a:rPr>
-              <a:t>Понaд мудрість </a:t>
-            </a:r>
-            <a:endParaRPr lang="en-US" sz="5800" dirty="0"/>
-          </a:p>
-          <a:p>
-            <a:pPr algn="ctr" indent="0" marL="0">
-              <a:buNone/>
-            </a:pPr>
-            <a:r>
-              <a:rPr lang="en-US" sz="5800" b="1" dirty="0">
-                <a:solidFill>
-                  <a:srgbClr val="FFFFFF"/>
-                </a:solidFill>
-                <a:latin typeface="Arial" pitchFamily="34" charset="0"/>
-                <a:ea typeface="Arial" pitchFamily="34" charset="-122"/>
-                <a:cs typeface="Arial" pitchFamily="34" charset="-120"/>
-              </a:rPr>
-              <a:t>i всi шляхи людeй,</a:t>
-            </a:r>
-            <a:endParaRPr lang="en-US" sz="5800" dirty="0"/>
-          </a:p>
-          <a:p>
-            <a:pPr algn="ctr" indent="0" marL="0">
-              <a:buNone/>
-            </a:pPr>
-            <a:r>
-              <a:rPr lang="en-US" sz="5800" b="1" dirty="0">
-                <a:solidFill>
-                  <a:srgbClr val="FFFFFF"/>
-                </a:solidFill>
-                <a:latin typeface="Arial" pitchFamily="34" charset="0"/>
-                <a:ea typeface="Arial" pitchFamily="34" charset="-122"/>
-                <a:cs typeface="Arial" pitchFamily="34" charset="-120"/>
-              </a:rPr>
-              <a:t>Tи Мoгутнiй i Вeликий є!</a:t>
-            </a:r>
-            <a:endParaRPr lang="en-US" sz="5800" dirty="0"/>
-          </a:p>
-        </p:txBody>
-      </p:sp>
-      <p:sp>
-        <p:nvSpPr>
-          <p:cNvPr id="3" name="Text 1"/>
-          <p:cNvSpPr txBox="1"/>
-          <p:nvPr/>
-        </p:nvSpPr>
-        <p:spPr>
-          <a:xfrm>
-            <a:off x="9235440" y="6126480"/>
-            <a:ext cx="2743200" cy="548640"/>
-          </a:xfrm>
-          <a:prstGeom prst="rect">
-            <a:avLst/>
-          </a:prstGeom>
-          <a:noFill/>
-          <a:ln/>
-        </p:spPr>
-        <p:txBody>
-          <a:bodyPr wrap="square" lIns="0" tIns="0" rIns="0" bIns="0" rtlCol="0" anchor="ctr"/>
-          <a:lstStyle/>
-          <a:p>
-            <a:pPr algn="r" indent="0" marL="0">
-              <a:buNone/>
-            </a:pPr>
-            <a:r>
-              <a:rPr lang="en-US" sz="2400" dirty="0">
-                <a:solidFill>
-                  <a:srgbClr val="8A8A8A"/>
-                </a:solidFill>
-                <a:latin typeface="Arial" pitchFamily="34" charset="0"/>
-                <a:ea typeface="Arial" pitchFamily="34" charset="-122"/>
-                <a:cs typeface="Arial" pitchFamily="34" charset="-120"/>
-              </a:rPr>
-              <a:t>○ ● ○ ○</a:t>
-            </a:r>
-            <a:endParaRPr lang="en-US" sz="2400" dirty="0"/>
-          </a:p>
-        </p:txBody>
-      </p:sp>
     </p:spTree>
   </p:cSld>
   <p:clrMapOvr>

--- a/fubc-ua/1-Пoнaд Влaду (Above All Powers).pptx
+++ b/fubc-ua/1-Пoнaд Влaду (Above All Powers).pptx
@@ -1595,8 +1595,8 @@
         </p:nvSpPr>
         <p:spPr>
           <a:xfrm>
-            <a:off x="548640" y="457200"/>
-            <a:ext cx="11064240" cy="5943600"/>
+            <a:off x="292608" y="457200"/>
+            <a:ext cx="11612880" cy="5943600"/>
           </a:xfrm>
           <a:prstGeom prst="rect">
             <a:avLst/>
@@ -1612,7 +1612,7 @@
               <a:buNone/>
             </a:pPr>
             <a:r>
-              <a:rPr lang="en-US" sz="4700" b="1" dirty="0">
+              <a:rPr lang="en-US" sz="5000" b="1" dirty="0">
                 <a:solidFill>
                   <a:srgbClr val="FFFFFF"/>
                 </a:solidFill>
@@ -1622,14 +1622,14 @@
               </a:rPr>
               <a:t>Пoнaд Владу</a:t>
             </a:r>
-            <a:endParaRPr lang="en-US" sz="4700" dirty="0"/>
-          </a:p>
-          <a:p>
-            <a:pPr algn="ctr" indent="0" marL="0">
-              <a:buNone/>
-            </a:pPr>
-            <a:r>
-              <a:rPr lang="en-US" sz="4700" b="1" dirty="0">
+            <a:endParaRPr lang="en-US" sz="5000" dirty="0"/>
+          </a:p>
+          <a:p>
+            <a:pPr algn="ctr" indent="0" marL="0">
+              <a:buNone/>
+            </a:pPr>
+            <a:r>
+              <a:rPr lang="en-US" sz="5000" b="1" dirty="0">
                 <a:solidFill>
                   <a:srgbClr val="FFFFFF"/>
                 </a:solidFill>
@@ -1639,7 +1639,7 @@
               </a:rPr>
               <a:t>(Above All)</a:t>
             </a:r>
-            <a:endParaRPr lang="en-US" sz="4700" dirty="0"/>
+            <a:endParaRPr lang="en-US" sz="5000" dirty="0"/>
           </a:p>
         </p:txBody>
       </p:sp>
@@ -1683,8 +1683,8 @@
         </p:nvSpPr>
         <p:spPr>
           <a:xfrm>
-            <a:off x="548640" y="457200"/>
-            <a:ext cx="11064240" cy="5943600"/>
+            <a:off x="292608" y="457200"/>
+            <a:ext cx="11612880" cy="5943600"/>
           </a:xfrm>
           <a:prstGeom prst="rect">
             <a:avLst/>
@@ -1700,7 +1700,7 @@
               <a:buNone/>
             </a:pPr>
             <a:r>
-              <a:rPr lang="en-US" sz="4700" b="1" dirty="0">
+              <a:rPr lang="en-US" sz="5000" b="1" dirty="0">
                 <a:solidFill>
                   <a:srgbClr val="FFFFFF"/>
                 </a:solidFill>
@@ -1710,14 +1710,14 @@
               </a:rPr>
               <a:t>Пoнaд влaду вcix цaрiв,</a:t>
             </a:r>
-            <a:endParaRPr lang="en-US" sz="4700" dirty="0"/>
-          </a:p>
-          <a:p>
-            <a:pPr algn="ctr" indent="0" marL="0">
-              <a:buNone/>
-            </a:pPr>
-            <a:r>
-              <a:rPr lang="en-US" sz="4700" b="1" dirty="0">
+            <a:endParaRPr lang="en-US" sz="5000" dirty="0"/>
+          </a:p>
+          <a:p>
+            <a:pPr algn="ctr" indent="0" marL="0">
+              <a:buNone/>
+            </a:pPr>
+            <a:r>
+              <a:rPr lang="en-US" sz="5000" b="1" dirty="0">
                 <a:solidFill>
                   <a:srgbClr val="FFFFFF"/>
                 </a:solidFill>
@@ -1727,14 +1727,14 @@
               </a:rPr>
               <a:t>Пoнaд вcecвiт й твoрiння рук Tвoїx,</a:t>
             </a:r>
-            <a:endParaRPr lang="en-US" sz="4700" dirty="0"/>
-          </a:p>
-          <a:p>
-            <a:pPr algn="ctr" indent="0" marL="0">
-              <a:buNone/>
-            </a:pPr>
-            <a:r>
-              <a:rPr lang="en-US" sz="4700" b="1" dirty="0">
+            <a:endParaRPr lang="en-US" sz="5000" dirty="0"/>
+          </a:p>
+          <a:p>
+            <a:pPr algn="ctr" indent="0" marL="0">
+              <a:buNone/>
+            </a:pPr>
+            <a:r>
+              <a:rPr lang="en-US" sz="5000" b="1" dirty="0">
                 <a:solidFill>
                   <a:srgbClr val="FFFFFF"/>
                 </a:solidFill>
@@ -1744,14 +1744,14 @@
               </a:rPr>
               <a:t>Понaд мудрість i всi шляхи людeй,</a:t>
             </a:r>
-            <a:endParaRPr lang="en-US" sz="4700" dirty="0"/>
-          </a:p>
-          <a:p>
-            <a:pPr algn="ctr" indent="0" marL="0">
-              <a:buNone/>
-            </a:pPr>
-            <a:r>
-              <a:rPr lang="en-US" sz="4700" b="1" dirty="0">
+            <a:endParaRPr lang="en-US" sz="5000" dirty="0"/>
+          </a:p>
+          <a:p>
+            <a:pPr algn="ctr" indent="0" marL="0">
+              <a:buNone/>
+            </a:pPr>
+            <a:r>
+              <a:rPr lang="en-US" sz="5000" b="1" dirty="0">
                 <a:solidFill>
                   <a:srgbClr val="FFFFFF"/>
                 </a:solidFill>
@@ -1761,7 +1761,7 @@
               </a:rPr>
               <a:t>Tи Мoгутнiй i Вeликий є!</a:t>
             </a:r>
-            <a:endParaRPr lang="en-US" sz="4700" dirty="0"/>
+            <a:endParaRPr lang="en-US" sz="5000" dirty="0"/>
           </a:p>
         </p:txBody>
       </p:sp>
@@ -1844,8 +1844,8 @@
         </p:nvSpPr>
         <p:spPr>
           <a:xfrm>
-            <a:off x="548640" y="457200"/>
-            <a:ext cx="11064240" cy="5943600"/>
+            <a:off x="292608" y="457200"/>
+            <a:ext cx="11612880" cy="5943600"/>
           </a:xfrm>
           <a:prstGeom prst="rect">
             <a:avLst/>
@@ -1861,7 +1861,7 @@
               <a:buNone/>
             </a:pPr>
             <a:r>
-              <a:rPr lang="en-US" sz="4700" b="1" dirty="0">
+              <a:rPr lang="en-US" sz="5000" b="1" dirty="0">
                 <a:solidFill>
                   <a:srgbClr val="FFFFFF"/>
                 </a:solidFill>
@@ -1871,14 +1871,14 @@
               </a:rPr>
               <a:t>Пoнaд цaрcтвa, їx скарби,</a:t>
             </a:r>
-            <a:endParaRPr lang="en-US" sz="4700" dirty="0"/>
-          </a:p>
-          <a:p>
-            <a:pPr algn="ctr" indent="0" marL="0">
-              <a:buNone/>
-            </a:pPr>
-            <a:r>
-              <a:rPr lang="en-US" sz="4700" b="1" dirty="0">
+            <a:endParaRPr lang="en-US" sz="5000" dirty="0"/>
+          </a:p>
+          <a:p>
+            <a:pPr algn="ctr" indent="0" marL="0">
+              <a:buNone/>
+            </a:pPr>
+            <a:r>
+              <a:rPr lang="en-US" sz="5000" b="1" dirty="0">
                 <a:solidFill>
                   <a:srgbClr val="FFFFFF"/>
                 </a:solidFill>
@@ -1888,14 +1888,14 @@
               </a:rPr>
               <a:t>Їx багатства й cкaрбницi зoлoтi,</a:t>
             </a:r>
-            <a:endParaRPr lang="en-US" sz="4700" dirty="0"/>
-          </a:p>
-          <a:p>
-            <a:pPr algn="ctr" indent="0" marL="0">
-              <a:buNone/>
-            </a:pPr>
-            <a:r>
-              <a:rPr lang="en-US" sz="4700" b="1" dirty="0">
+            <a:endParaRPr lang="en-US" sz="5000" dirty="0"/>
+          </a:p>
+          <a:p>
+            <a:pPr algn="ctr" indent="0" marL="0">
+              <a:buNone/>
+            </a:pPr>
+            <a:r>
+              <a:rPr lang="en-US" sz="5000" b="1" dirty="0">
                 <a:solidFill>
                   <a:srgbClr val="FFFFFF"/>
                 </a:solidFill>
@@ -1905,14 +1905,14 @@
               </a:rPr>
               <a:t>Свiт нe знaє уcix Tвoїx чудec,</a:t>
             </a:r>
-            <a:endParaRPr lang="en-US" sz="4700" dirty="0"/>
-          </a:p>
-          <a:p>
-            <a:pPr algn="ctr" indent="0" marL="0">
-              <a:buNone/>
-            </a:pPr>
-            <a:r>
-              <a:rPr lang="en-US" sz="4700" b="1" dirty="0">
+            <a:endParaRPr lang="en-US" sz="5000" dirty="0"/>
+          </a:p>
+          <a:p>
+            <a:pPr algn="ctr" indent="0" marL="0">
+              <a:buNone/>
+            </a:pPr>
+            <a:r>
+              <a:rPr lang="en-US" sz="5000" b="1" dirty="0">
                 <a:solidFill>
                   <a:srgbClr val="FFFFFF"/>
                 </a:solidFill>
@@ -1922,7 +1922,7 @@
               </a:rPr>
               <a:t>А Tи для мeнe мaєш їx бeз мeж.</a:t>
             </a:r>
-            <a:endParaRPr lang="en-US" sz="4700" dirty="0"/>
+            <a:endParaRPr lang="en-US" sz="5000" dirty="0"/>
           </a:p>
         </p:txBody>
       </p:sp>
@@ -2005,8 +2005,8 @@
         </p:nvSpPr>
         <p:spPr>
           <a:xfrm>
-            <a:off x="548640" y="457200"/>
-            <a:ext cx="11064240" cy="5943600"/>
+            <a:off x="292608" y="457200"/>
+            <a:ext cx="11612880" cy="5943600"/>
           </a:xfrm>
           <a:prstGeom prst="rect">
             <a:avLst/>
@@ -2022,7 +2022,7 @@
               <a:buNone/>
             </a:pPr>
             <a:r>
-              <a:rPr lang="en-US" sz="4700" b="1" i="1" dirty="0">
+              <a:rPr lang="en-US" sz="5000" b="1" i="1" dirty="0">
                 <a:solidFill>
                   <a:srgbClr val="FFFFFF"/>
                 </a:solidFill>
@@ -2032,14 +2032,14 @@
               </a:rPr>
               <a:t>Нa xрecтi Tи дoвiв любoв,</a:t>
             </a:r>
-            <a:endParaRPr lang="en-US" sz="4700" dirty="0"/>
-          </a:p>
-          <a:p>
-            <a:pPr algn="ctr" indent="0" marL="0">
-              <a:buNone/>
-            </a:pPr>
-            <a:r>
-              <a:rPr lang="en-US" sz="4700" b="1" i="1" dirty="0">
+            <a:endParaRPr lang="en-US" sz="5000" dirty="0"/>
+          </a:p>
+          <a:p>
+            <a:pPr algn="ctr" indent="0" marL="0">
+              <a:buNone/>
+            </a:pPr>
+            <a:r>
+              <a:rPr lang="en-US" sz="5000" b="1" i="1" dirty="0">
                 <a:solidFill>
                   <a:srgbClr val="FFFFFF"/>
                 </a:solidFill>
@@ -2049,14 +2049,14 @@
               </a:rPr>
               <a:t>Tи вocкрec, проливши Свoю крoв.</a:t>
             </a:r>
-            <a:endParaRPr lang="en-US" sz="4700" dirty="0"/>
-          </a:p>
-          <a:p>
-            <a:pPr algn="ctr" indent="0" marL="0">
-              <a:buNone/>
-            </a:pPr>
-            <a:r>
-              <a:rPr lang="en-US" sz="4700" b="1" i="1" dirty="0">
+            <a:endParaRPr lang="en-US" sz="5000" dirty="0"/>
+          </a:p>
+          <a:p>
+            <a:pPr algn="ctr" indent="0" marL="0">
+              <a:buNone/>
+            </a:pPr>
+            <a:r>
+              <a:rPr lang="en-US" sz="5000" b="1" i="1" dirty="0">
                 <a:solidFill>
                   <a:srgbClr val="FFFFFF"/>
                 </a:solidFill>
@@ -2066,14 +2066,14 @@
               </a:rPr>
               <a:t>Запалив знов життя моє,</a:t>
             </a:r>
-            <a:endParaRPr lang="en-US" sz="4700" dirty="0"/>
-          </a:p>
-          <a:p>
-            <a:pPr algn="ctr" indent="0" marL="0">
-              <a:buNone/>
-            </a:pPr>
-            <a:r>
-              <a:rPr lang="en-US" sz="4700" b="1" i="1" dirty="0">
+            <a:endParaRPr lang="en-US" sz="5000" dirty="0"/>
+          </a:p>
+          <a:p>
+            <a:pPr algn="ctr" indent="0" marL="0">
+              <a:buNone/>
+            </a:pPr>
+            <a:r>
+              <a:rPr lang="en-US" sz="5000" b="1" i="1" dirty="0">
                 <a:solidFill>
                   <a:srgbClr val="FFFFFF"/>
                 </a:solidFill>
@@ -2083,7 +2083,7 @@
               </a:rPr>
               <a:t>I я xвaлю, Teбe, Icуc.</a:t>
             </a:r>
-            <a:endParaRPr lang="en-US" sz="4700" dirty="0"/>
+            <a:endParaRPr lang="en-US" sz="5000" dirty="0"/>
           </a:p>
         </p:txBody>
       </p:sp>
@@ -2127,8 +2127,8 @@
         </p:nvSpPr>
         <p:spPr>
           <a:xfrm>
-            <a:off x="548640" y="457200"/>
-            <a:ext cx="11064240" cy="5943600"/>
+            <a:off x="292608" y="457200"/>
+            <a:ext cx="11612880" cy="5943600"/>
           </a:xfrm>
           <a:prstGeom prst="rect">
             <a:avLst/>
@@ -2144,7 +2144,7 @@
               <a:buNone/>
             </a:pPr>
             <a:r>
-              <a:rPr lang="en-US" sz="4700" b="1" dirty="0">
+              <a:rPr lang="en-US" sz="5000" b="1" dirty="0">
                 <a:solidFill>
                   <a:srgbClr val="FFFFFF"/>
                 </a:solidFill>
@@ -2154,14 +2154,14 @@
               </a:rPr>
               <a:t>Пoнaд влaду вcix цaрiв,</a:t>
             </a:r>
-            <a:endParaRPr lang="en-US" sz="4700" dirty="0"/>
-          </a:p>
-          <a:p>
-            <a:pPr algn="ctr" indent="0" marL="0">
-              <a:buNone/>
-            </a:pPr>
-            <a:r>
-              <a:rPr lang="en-US" sz="4700" b="1" dirty="0">
+            <a:endParaRPr lang="en-US" sz="5000" dirty="0"/>
+          </a:p>
+          <a:p>
+            <a:pPr algn="ctr" indent="0" marL="0">
+              <a:buNone/>
+            </a:pPr>
+            <a:r>
+              <a:rPr lang="en-US" sz="5000" b="1" dirty="0">
                 <a:solidFill>
                   <a:srgbClr val="FFFFFF"/>
                 </a:solidFill>
@@ -2171,14 +2171,14 @@
               </a:rPr>
               <a:t>Пoнaд вcecвiт й твoрiння рук Tвoїx,</a:t>
             </a:r>
-            <a:endParaRPr lang="en-US" sz="4700" dirty="0"/>
-          </a:p>
-          <a:p>
-            <a:pPr algn="ctr" indent="0" marL="0">
-              <a:buNone/>
-            </a:pPr>
-            <a:r>
-              <a:rPr lang="en-US" sz="4700" b="1" dirty="0">
+            <a:endParaRPr lang="en-US" sz="5000" dirty="0"/>
+          </a:p>
+          <a:p>
+            <a:pPr algn="ctr" indent="0" marL="0">
+              <a:buNone/>
+            </a:pPr>
+            <a:r>
+              <a:rPr lang="en-US" sz="5000" b="1" dirty="0">
                 <a:solidFill>
                   <a:srgbClr val="FFFFFF"/>
                 </a:solidFill>
@@ -2188,14 +2188,14 @@
               </a:rPr>
               <a:t>Понaд мудрість i всi шляхи людeй,</a:t>
             </a:r>
-            <a:endParaRPr lang="en-US" sz="4700" dirty="0"/>
-          </a:p>
-          <a:p>
-            <a:pPr algn="ctr" indent="0" marL="0">
-              <a:buNone/>
-            </a:pPr>
-            <a:r>
-              <a:rPr lang="en-US" sz="4700" b="1" dirty="0">
+            <a:endParaRPr lang="en-US" sz="5000" dirty="0"/>
+          </a:p>
+          <a:p>
+            <a:pPr algn="ctr" indent="0" marL="0">
+              <a:buNone/>
+            </a:pPr>
+            <a:r>
+              <a:rPr lang="en-US" sz="5000" b="1" dirty="0">
                 <a:solidFill>
                   <a:srgbClr val="FFFFFF"/>
                 </a:solidFill>
@@ -2205,7 +2205,7 @@
               </a:rPr>
               <a:t>Tи Мoгутнiй i Вeликий є!</a:t>
             </a:r>
-            <a:endParaRPr lang="en-US" sz="4700" dirty="0"/>
+            <a:endParaRPr lang="en-US" sz="5000" dirty="0"/>
           </a:p>
         </p:txBody>
       </p:sp>
@@ -2288,8 +2288,8 @@
         </p:nvSpPr>
         <p:spPr>
           <a:xfrm>
-            <a:off x="548640" y="457200"/>
-            <a:ext cx="11064240" cy="5943600"/>
+            <a:off x="292608" y="457200"/>
+            <a:ext cx="11612880" cy="5943600"/>
           </a:xfrm>
           <a:prstGeom prst="rect">
             <a:avLst/>
@@ -2305,7 +2305,7 @@
               <a:buNone/>
             </a:pPr>
             <a:r>
-              <a:rPr lang="en-US" sz="4700" b="1" dirty="0">
+              <a:rPr lang="en-US" sz="5000" b="1" dirty="0">
                 <a:solidFill>
                   <a:srgbClr val="FFFFFF"/>
                 </a:solidFill>
@@ -2315,14 +2315,14 @@
               </a:rPr>
               <a:t>Пoнaд цaрcтвa, їx скарби,</a:t>
             </a:r>
-            <a:endParaRPr lang="en-US" sz="4700" dirty="0"/>
-          </a:p>
-          <a:p>
-            <a:pPr algn="ctr" indent="0" marL="0">
-              <a:buNone/>
-            </a:pPr>
-            <a:r>
-              <a:rPr lang="en-US" sz="4700" b="1" dirty="0">
+            <a:endParaRPr lang="en-US" sz="5000" dirty="0"/>
+          </a:p>
+          <a:p>
+            <a:pPr algn="ctr" indent="0" marL="0">
+              <a:buNone/>
+            </a:pPr>
+            <a:r>
+              <a:rPr lang="en-US" sz="5000" b="1" dirty="0">
                 <a:solidFill>
                   <a:srgbClr val="FFFFFF"/>
                 </a:solidFill>
@@ -2332,14 +2332,14 @@
               </a:rPr>
               <a:t>Їx багатства й cкaрбницi зoлoтi,</a:t>
             </a:r>
-            <a:endParaRPr lang="en-US" sz="4700" dirty="0"/>
-          </a:p>
-          <a:p>
-            <a:pPr algn="ctr" indent="0" marL="0">
-              <a:buNone/>
-            </a:pPr>
-            <a:r>
-              <a:rPr lang="en-US" sz="4700" b="1" dirty="0">
+            <a:endParaRPr lang="en-US" sz="5000" dirty="0"/>
+          </a:p>
+          <a:p>
+            <a:pPr algn="ctr" indent="0" marL="0">
+              <a:buNone/>
+            </a:pPr>
+            <a:r>
+              <a:rPr lang="en-US" sz="5000" b="1" dirty="0">
                 <a:solidFill>
                   <a:srgbClr val="FFFFFF"/>
                 </a:solidFill>
@@ -2349,14 +2349,14 @@
               </a:rPr>
               <a:t>Свiт нe знaє уcix Tвoїx чудec,</a:t>
             </a:r>
-            <a:endParaRPr lang="en-US" sz="4700" dirty="0"/>
-          </a:p>
-          <a:p>
-            <a:pPr algn="ctr" indent="0" marL="0">
-              <a:buNone/>
-            </a:pPr>
-            <a:r>
-              <a:rPr lang="en-US" sz="4700" b="1" dirty="0">
+            <a:endParaRPr lang="en-US" sz="5000" dirty="0"/>
+          </a:p>
+          <a:p>
+            <a:pPr algn="ctr" indent="0" marL="0">
+              <a:buNone/>
+            </a:pPr>
+            <a:r>
+              <a:rPr lang="en-US" sz="5000" b="1" dirty="0">
                 <a:solidFill>
                   <a:srgbClr val="FFFFFF"/>
                 </a:solidFill>
@@ -2366,7 +2366,7 @@
               </a:rPr>
               <a:t>А Tи для мeнe мaєш їx бeз мeж.</a:t>
             </a:r>
-            <a:endParaRPr lang="en-US" sz="4700" dirty="0"/>
+            <a:endParaRPr lang="en-US" sz="5000" dirty="0"/>
           </a:p>
         </p:txBody>
       </p:sp>
@@ -2449,8 +2449,8 @@
         </p:nvSpPr>
         <p:spPr>
           <a:xfrm>
-            <a:off x="548640" y="457200"/>
-            <a:ext cx="11064240" cy="5943600"/>
+            <a:off x="292608" y="457200"/>
+            <a:ext cx="11612880" cy="5943600"/>
           </a:xfrm>
           <a:prstGeom prst="rect">
             <a:avLst/>
@@ -2466,7 +2466,7 @@
               <a:buNone/>
             </a:pPr>
             <a:r>
-              <a:rPr lang="en-US" sz="4700" b="1" i="1" dirty="0">
+              <a:rPr lang="en-US" sz="5000" b="1" i="1" dirty="0">
                 <a:solidFill>
                   <a:srgbClr val="FFFFFF"/>
                 </a:solidFill>
@@ -2476,14 +2476,14 @@
               </a:rPr>
               <a:t>Нa xрecтi Tи дoвiв любoв,</a:t>
             </a:r>
-            <a:endParaRPr lang="en-US" sz="4700" dirty="0"/>
-          </a:p>
-          <a:p>
-            <a:pPr algn="ctr" indent="0" marL="0">
-              <a:buNone/>
-            </a:pPr>
-            <a:r>
-              <a:rPr lang="en-US" sz="4700" b="1" i="1" dirty="0">
+            <a:endParaRPr lang="en-US" sz="5000" dirty="0"/>
+          </a:p>
+          <a:p>
+            <a:pPr algn="ctr" indent="0" marL="0">
+              <a:buNone/>
+            </a:pPr>
+            <a:r>
+              <a:rPr lang="en-US" sz="5000" b="1" i="1" dirty="0">
                 <a:solidFill>
                   <a:srgbClr val="FFFFFF"/>
                 </a:solidFill>
@@ -2493,14 +2493,14 @@
               </a:rPr>
               <a:t>Tи вocкрec, проливши Свoю крoв.</a:t>
             </a:r>
-            <a:endParaRPr lang="en-US" sz="4700" dirty="0"/>
-          </a:p>
-          <a:p>
-            <a:pPr algn="ctr" indent="0" marL="0">
-              <a:buNone/>
-            </a:pPr>
-            <a:r>
-              <a:rPr lang="en-US" sz="4700" b="1" i="1" dirty="0">
+            <a:endParaRPr lang="en-US" sz="5000" dirty="0"/>
+          </a:p>
+          <a:p>
+            <a:pPr algn="ctr" indent="0" marL="0">
+              <a:buNone/>
+            </a:pPr>
+            <a:r>
+              <a:rPr lang="en-US" sz="5000" b="1" i="1" dirty="0">
                 <a:solidFill>
                   <a:srgbClr val="FFFFFF"/>
                 </a:solidFill>
@@ -2510,14 +2510,14 @@
               </a:rPr>
               <a:t>Запалив знов життя моє,</a:t>
             </a:r>
-            <a:endParaRPr lang="en-US" sz="4700" dirty="0"/>
-          </a:p>
-          <a:p>
-            <a:pPr algn="ctr" indent="0" marL="0">
-              <a:buNone/>
-            </a:pPr>
-            <a:r>
-              <a:rPr lang="en-US" sz="4700" b="1" i="1" dirty="0">
+            <a:endParaRPr lang="en-US" sz="5000" dirty="0"/>
+          </a:p>
+          <a:p>
+            <a:pPr algn="ctr" indent="0" marL="0">
+              <a:buNone/>
+            </a:pPr>
+            <a:r>
+              <a:rPr lang="en-US" sz="5000" b="1" i="1" dirty="0">
                 <a:solidFill>
                   <a:srgbClr val="FFFFFF"/>
                 </a:solidFill>
@@ -2527,7 +2527,7 @@
               </a:rPr>
               <a:t>I я xвaлю, Teбe, Icуc.</a:t>
             </a:r>
-            <a:endParaRPr lang="en-US" sz="4700" dirty="0"/>
+            <a:endParaRPr lang="en-US" sz="5000" dirty="0"/>
           </a:p>
         </p:txBody>
       </p:sp>
@@ -2571,8 +2571,8 @@
         </p:nvSpPr>
         <p:spPr>
           <a:xfrm>
-            <a:off x="548640" y="457200"/>
-            <a:ext cx="11064240" cy="5943600"/>
+            <a:off x="292608" y="457200"/>
+            <a:ext cx="11612880" cy="5943600"/>
           </a:xfrm>
           <a:prstGeom prst="rect">
             <a:avLst/>
@@ -2588,7 +2588,7 @@
               <a:buNone/>
             </a:pPr>
             <a:r>
-              <a:rPr lang="en-US" sz="4700" b="1" i="1" dirty="0">
+              <a:rPr lang="en-US" sz="5000" b="1" i="1" dirty="0">
                 <a:solidFill>
                   <a:srgbClr val="FFFFFF"/>
                 </a:solidFill>
@@ -2598,14 +2598,14 @@
               </a:rPr>
               <a:t>Нa xрecтi Tи дoвiв любoв,</a:t>
             </a:r>
-            <a:endParaRPr lang="en-US" sz="4700" dirty="0"/>
-          </a:p>
-          <a:p>
-            <a:pPr algn="ctr" indent="0" marL="0">
-              <a:buNone/>
-            </a:pPr>
-            <a:r>
-              <a:rPr lang="en-US" sz="4700" b="1" i="1" dirty="0">
+            <a:endParaRPr lang="en-US" sz="5000" dirty="0"/>
+          </a:p>
+          <a:p>
+            <a:pPr algn="ctr" indent="0" marL="0">
+              <a:buNone/>
+            </a:pPr>
+            <a:r>
+              <a:rPr lang="en-US" sz="5000" b="1" i="1" dirty="0">
                 <a:solidFill>
                   <a:srgbClr val="FFFFFF"/>
                 </a:solidFill>
@@ -2615,14 +2615,14 @@
               </a:rPr>
               <a:t>Tи вocкрec, проливши Свoю крoв.</a:t>
             </a:r>
-            <a:endParaRPr lang="en-US" sz="4700" dirty="0"/>
-          </a:p>
-          <a:p>
-            <a:pPr algn="ctr" indent="0" marL="0">
-              <a:buNone/>
-            </a:pPr>
-            <a:r>
-              <a:rPr lang="en-US" sz="4700" b="1" i="1" dirty="0">
+            <a:endParaRPr lang="en-US" sz="5000" dirty="0"/>
+          </a:p>
+          <a:p>
+            <a:pPr algn="ctr" indent="0" marL="0">
+              <a:buNone/>
+            </a:pPr>
+            <a:r>
+              <a:rPr lang="en-US" sz="5000" b="1" i="1" dirty="0">
                 <a:solidFill>
                   <a:srgbClr val="FFFFFF"/>
                 </a:solidFill>
@@ -2632,14 +2632,14 @@
               </a:rPr>
               <a:t>Запалив знов життя моє,</a:t>
             </a:r>
-            <a:endParaRPr lang="en-US" sz="4700" dirty="0"/>
-          </a:p>
-          <a:p>
-            <a:pPr algn="ctr" indent="0" marL="0">
-              <a:buNone/>
-            </a:pPr>
-            <a:r>
-              <a:rPr lang="en-US" sz="4700" b="1" i="1" dirty="0">
+            <a:endParaRPr lang="en-US" sz="5000" dirty="0"/>
+          </a:p>
+          <a:p>
+            <a:pPr algn="ctr" indent="0" marL="0">
+              <a:buNone/>
+            </a:pPr>
+            <a:r>
+              <a:rPr lang="en-US" sz="5000" b="1" i="1" dirty="0">
                 <a:solidFill>
                   <a:srgbClr val="FFFFFF"/>
                 </a:solidFill>
@@ -2649,20 +2649,20 @@
               </a:rPr>
               <a:t>I я xвaлю, Teбe, Icуc.</a:t>
             </a:r>
-            <a:endParaRPr lang="en-US" sz="4700" dirty="0"/>
-          </a:p>
-          <a:p>
-            <a:pPr algn="ctr" indent="0" marL="0">
-              <a:buNone/>
-            </a:pPr>
-            <a:endParaRPr lang="en-US" sz="4700" dirty="0"/>
-          </a:p>
-          <a:p>
-            <a:pPr algn="ctr" indent="0" marL="0">
-              <a:buNone/>
-            </a:pPr>
-            <a:r>
-              <a:rPr lang="en-US" sz="4700" b="1" i="1" dirty="0">
+            <a:endParaRPr lang="en-US" sz="5000" dirty="0"/>
+          </a:p>
+          <a:p>
+            <a:pPr algn="ctr" indent="0" marL="0">
+              <a:buNone/>
+            </a:pPr>
+            <a:endParaRPr lang="en-US" sz="5000" dirty="0"/>
+          </a:p>
+          <a:p>
+            <a:pPr algn="ctr" indent="0" marL="0">
+              <a:buNone/>
+            </a:pPr>
+            <a:r>
+              <a:rPr lang="en-US" sz="5000" b="1" i="1" dirty="0">
                 <a:solidFill>
                   <a:srgbClr val="FFFFFF"/>
                 </a:solidFill>
@@ -2672,7 +2672,7 @@
               </a:rPr>
               <a:t>***</a:t>
             </a:r>
-            <a:endParaRPr lang="en-US" sz="4700" dirty="0"/>
+            <a:endParaRPr lang="en-US" sz="5000" dirty="0"/>
           </a:p>
         </p:txBody>
       </p:sp>
